--- a/static/ppts/G6_Sci_Full_Revision.pptx
+++ b/static/ppts/G6_Sci_Full_Revision.pptx
@@ -1259,7 +1259,7 @@
         </p:nvSpPr>
         <p:spPr>
           <a:xfrm>
-            <a:off x="731520" y="1280160"/>
+            <a:off x="731520" y="1097280"/>
             <a:ext cx="7772400" cy="1371600"/>
           </a:xfrm>
           <a:prstGeom prst="rect">
@@ -1276,7 +1276,7 @@
               <a:buNone/>
             </a:pPr>
             <a:r>
-              <a:rPr lang="en-US" sz="3600" b="1" dirty="0">
+              <a:rPr lang="en-US" sz="4000" b="1" dirty="0">
                 <a:solidFill>
                   <a:srgbClr val="FFFFFF"/>
                 </a:solidFill>
@@ -1286,7 +1286,7 @@
               </a:rPr>
               <a:t>Earth Science — Full Revision</a:t>
             </a:r>
-            <a:endParaRPr lang="en-US" sz="3600" dirty="0"/>
+            <a:endParaRPr lang="en-US" sz="4000" dirty="0"/>
           </a:p>
         </p:txBody>
       </p:sp>
@@ -1298,7 +1298,7 @@
         </p:nvSpPr>
         <p:spPr>
           <a:xfrm>
-            <a:off x="731520" y="2743200"/>
+            <a:off x="731520" y="2560320"/>
             <a:ext cx="7772400" cy="548640"/>
           </a:xfrm>
           <a:prstGeom prst="rect">
@@ -1317,13 +1317,13 @@
             <a:r>
               <a:rPr lang="en-US" sz="1600" dirty="0">
                 <a:solidFill>
-                  <a:srgbClr val="9B9690"/>
+                  <a:srgbClr val="E9C46A"/>
                 </a:solidFill>
                 <a:latin typeface="Calibri" pitchFamily="34" charset="0"/>
                 <a:ea typeface="Calibri" pitchFamily="34" charset="-122"/>
                 <a:cs typeface="Calibri" pitchFamily="34" charset="-120"/>
               </a:rPr>
-              <a:t>G6 Science · Term 3 Review</a:t>
+              <a:t>Grade 6 Science · Mr Zocchi</a:t>
             </a:r>
             <a:endParaRPr lang="en-US" sz="1600" dirty="0"/>
           </a:p>
@@ -1331,14 +1331,36 @@
       </p:sp>
       <p:sp>
         <p:nvSpPr>
-          <p:cNvPr id="5" name="Text 3"/>
-          <p:cNvSpPr/>
-          <p:nvPr/>
-        </p:nvSpPr>
-        <p:spPr>
-          <a:xfrm>
-            <a:off x="731520" y="4389120"/>
-            <a:ext cx="7772400" cy="457200"/>
+          <p:cNvPr id="5" name="Shape 3"/>
+          <p:cNvSpPr/>
+          <p:nvPr/>
+        </p:nvSpPr>
+        <p:spPr>
+          <a:xfrm>
+            <a:off x="731520" y="3474720"/>
+            <a:ext cx="2011680" cy="411480"/>
+          </a:xfrm>
+          <a:prstGeom prst="roundRect">
+            <a:avLst>
+              <a:gd name="adj" fmla="val 17778"/>
+            </a:avLst>
+          </a:prstGeom>
+          <a:solidFill>
+            <a:srgbClr val="2A9D8F"/>
+          </a:solidFill>
+          <a:ln/>
+        </p:spPr>
+      </p:sp>
+      <p:sp>
+        <p:nvSpPr>
+          <p:cNvPr id="6" name="Text 4"/>
+          <p:cNvSpPr/>
+          <p:nvPr/>
+        </p:nvSpPr>
+        <p:spPr>
+          <a:xfrm>
+            <a:off x="731520" y="3474720"/>
+            <a:ext cx="2011680" cy="411480"/>
           </a:xfrm>
           <a:prstGeom prst="rect">
             <a:avLst/>
@@ -1350,21 +1372,21 @@
           <a:bodyPr wrap="square" rtlCol="0" anchor="ctr"/>
           <a:lstStyle/>
           <a:p>
-            <a:pPr indent="0" marL="0">
+            <a:pPr algn="ctr" indent="0" marL="0">
               <a:buNone/>
             </a:pPr>
             <a:r>
-              <a:rPr lang="en-US" sz="1000" dirty="0">
+              <a:rPr lang="en-US" sz="1200" b="1" dirty="0">
                 <a:solidFill>
-                  <a:srgbClr val="6B6660"/>
+                  <a:srgbClr val="FFFFFF"/>
                 </a:solidFill>
                 <a:latin typeface="Calibri" pitchFamily="34" charset="0"/>
                 <a:ea typeface="Calibri" pitchFamily="34" charset="-122"/>
                 <a:cs typeface="Calibri" pitchFamily="34" charset="-120"/>
               </a:rPr>
-              <a:t>Mr Zocchi · mrzocchi.com</a:t>
-            </a:r>
-            <a:endParaRPr lang="en-US" sz="1000" dirty="0"/>
+              <a:t>Term 3 · Earth Science</a:t>
+            </a:r>
+            <a:endParaRPr lang="en-US" sz="1200" dirty="0"/>
           </a:p>
         </p:txBody>
       </p:sp>
@@ -1382,7 +1404,7 @@
     <p:bg>
       <p:bgPr>
         <a:solidFill>
-          <a:srgbClr val="FFFFFF"/>
+          <a:srgbClr val="FAF8F5"/>
         </a:solidFill>
       </p:bgPr>
     </p:bg>
@@ -1428,8 +1450,8 @@
         </p:nvSpPr>
         <p:spPr>
           <a:xfrm>
-            <a:off x="548640" y="274320"/>
-            <a:ext cx="8046720" cy="640080"/>
+            <a:off x="7772400" y="4709160"/>
+            <a:ext cx="1097280" cy="320040"/>
           </a:xfrm>
           <a:prstGeom prst="rect">
             <a:avLst/>
@@ -1438,7 +1460,46 @@
           <a:ln/>
         </p:spPr>
         <p:txBody>
-          <a:bodyPr wrap="square" lIns="0" tIns="0" rIns="0" bIns="0" rtlCol="0" anchor="ctr"/>
+          <a:bodyPr wrap="square" rtlCol="0" anchor="ctr"/>
+          <a:lstStyle/>
+          <a:p>
+            <a:pPr algn="r" indent="0" marL="0">
+              <a:buNone/>
+            </a:pPr>
+            <a:r>
+              <a:rPr lang="en-US" sz="900" dirty="0">
+                <a:solidFill>
+                  <a:srgbClr val="6B6660"/>
+                </a:solidFill>
+                <a:latin typeface="Calibri" pitchFamily="34" charset="0"/>
+                <a:ea typeface="Calibri" pitchFamily="34" charset="-122"/>
+                <a:cs typeface="Calibri" pitchFamily="34" charset="-120"/>
+              </a:rPr>
+              <a:t>2 / 5</a:t>
+            </a:r>
+            <a:endParaRPr lang="en-US" sz="900" dirty="0"/>
+          </a:p>
+        </p:txBody>
+      </p:sp>
+      <p:sp>
+        <p:nvSpPr>
+          <p:cNvPr id="4" name="Text 2"/>
+          <p:cNvSpPr/>
+          <p:nvPr/>
+        </p:nvSpPr>
+        <p:spPr>
+          <a:xfrm>
+            <a:off x="457200" y="274320"/>
+            <a:ext cx="8229600" cy="640080"/>
+          </a:xfrm>
+          <a:prstGeom prst="rect">
+            <a:avLst/>
+          </a:prstGeom>
+          <a:noFill/>
+          <a:ln/>
+        </p:spPr>
+        <p:txBody>
+          <a:bodyPr wrap="square" rtlCol="0" anchor="ctr"/>
           <a:lstStyle/>
           <a:p>
             <a:pPr indent="0" marL="0">
@@ -1461,14 +1522,66 @@
       </p:sp>
       <p:sp>
         <p:nvSpPr>
-          <p:cNvPr id="4" name="Text 2"/>
-          <p:cNvSpPr/>
-          <p:nvPr/>
-        </p:nvSpPr>
-        <p:spPr>
-          <a:xfrm>
-            <a:off x="548640" y="1097280"/>
-            <a:ext cx="8046720" cy="3474720"/>
+          <p:cNvPr id="5" name="Shape 3"/>
+          <p:cNvSpPr/>
+          <p:nvPr/>
+        </p:nvSpPr>
+        <p:spPr>
+          <a:xfrm>
+            <a:off x="457200" y="1188720"/>
+            <a:ext cx="2560320" cy="1828800"/>
+          </a:xfrm>
+          <a:prstGeom prst="rect">
+            <a:avLst/>
+          </a:prstGeom>
+          <a:solidFill>
+            <a:srgbClr val="FFFFFF"/>
+          </a:solidFill>
+          <a:ln w="12700">
+            <a:solidFill>
+              <a:srgbClr val="E5E2DC"/>
+            </a:solidFill>
+            <a:prstDash val="solid"/>
+          </a:ln>
+          <a:effectLst>
+            <a:outerShdw sx="100000" sy="100000" kx="0" ky="0" algn="bl" rotWithShape="0" blurRad="50800" dist="25400" dir="8100000">
+              <a:srgbClr val="000000">
+                <a:alpha val="10000"/>
+              </a:srgbClr>
+            </a:outerShdw>
+          </a:effectLst>
+        </p:spPr>
+      </p:sp>
+      <p:sp>
+        <p:nvSpPr>
+          <p:cNvPr id="6" name="Shape 4"/>
+          <p:cNvSpPr/>
+          <p:nvPr/>
+        </p:nvSpPr>
+        <p:spPr>
+          <a:xfrm>
+            <a:off x="457200" y="1188720"/>
+            <a:ext cx="2560320" cy="54864"/>
+          </a:xfrm>
+          <a:prstGeom prst="rect">
+            <a:avLst/>
+          </a:prstGeom>
+          <a:solidFill>
+            <a:srgbClr val="2A9D8F"/>
+          </a:solidFill>
+          <a:ln/>
+        </p:spPr>
+      </p:sp>
+      <p:sp>
+        <p:nvSpPr>
+          <p:cNvPr id="7" name="Text 5"/>
+          <p:cNvSpPr/>
+          <p:nvPr/>
+        </p:nvSpPr>
+        <p:spPr>
+          <a:xfrm>
+            <a:off x="594360" y="1325880"/>
+            <a:ext cx="2286000" cy="365760"/>
           </a:xfrm>
           <a:prstGeom prst="rect">
             <a:avLst/>
@@ -1477,18 +1590,53 @@
           <a:ln/>
         </p:spPr>
         <p:txBody>
+          <a:bodyPr wrap="square" rtlCol="0" anchor="ctr"/>
+          <a:lstStyle/>
+          <a:p>
+            <a:pPr indent="0" marL="0">
+              <a:buNone/>
+            </a:pPr>
+            <a:r>
+              <a:rPr lang="en-US" sz="1400" b="1" dirty="0">
+                <a:solidFill>
+                  <a:srgbClr val="1B2A4A"/>
+                </a:solidFill>
+                <a:latin typeface="Calibri" pitchFamily="34" charset="0"/>
+                <a:ea typeface="Calibri" pitchFamily="34" charset="-122"/>
+                <a:cs typeface="Calibri" pitchFamily="34" charset="-120"/>
+              </a:rPr>
+              <a:t>Layers</a:t>
+            </a:r>
+            <a:endParaRPr lang="en-US" sz="1400" dirty="0"/>
+          </a:p>
+        </p:txBody>
+      </p:sp>
+      <p:sp>
+        <p:nvSpPr>
+          <p:cNvPr id="8" name="Text 6"/>
+          <p:cNvSpPr/>
+          <p:nvPr/>
+        </p:nvSpPr>
+        <p:spPr>
+          <a:xfrm>
+            <a:off x="594360" y="1737360"/>
+            <a:ext cx="2286000" cy="1097280"/>
+          </a:xfrm>
+          <a:prstGeom prst="rect">
+            <a:avLst/>
+          </a:prstGeom>
+          <a:noFill/>
+          <a:ln/>
+        </p:spPr>
+        <p:txBody>
           <a:bodyPr wrap="square" rtlCol="0" anchor="t"/>
           <a:lstStyle/>
           <a:p>
-            <a:pPr marL="342900" indent="-342900">
-              <a:spcAft>
-                <a:spcPts val="800"/>
-              </a:spcAft>
-              <a:buSzPct val="100000"/>
-              <a:buChar char="•"/>
+            <a:pPr indent="0" marL="0">
+              <a:buNone/>
             </a:pPr>
             <a:r>
-              <a:rPr lang="en-US" sz="1500" dirty="0">
+              <a:rPr lang="en-US" sz="1100" dirty="0">
                 <a:solidFill>
                   <a:srgbClr val="3D3A36"/>
                 </a:solidFill>
@@ -1496,20 +1644,129 @@
                 <a:ea typeface="Calibri" pitchFamily="34" charset="-122"/>
                 <a:cs typeface="Calibri" pitchFamily="34" charset="-120"/>
               </a:rPr>
-              <a:t>4 layers: crust (thin, rocky) → mantle (thickest, semi-solid) → outer core (liquid metal) → inner core (solid metal)</a:t>
-            </a:r>
-            <a:endParaRPr lang="en-US" sz="1500" dirty="0"/>
-          </a:p>
-          <a:p>
-            <a:pPr marL="342900" indent="-342900">
-              <a:spcAft>
-                <a:spcPts val="800"/>
-              </a:spcAft>
-              <a:buSzPct val="100000"/>
-              <a:buChar char="•"/>
+              <a:t>Crust (5–70 km, thin), Mantle (2,900 km, thickest), Outer Core (liquid iron/nickel), Inner Core (solid, 5,500°C, solid from pressure).</a:t>
+            </a:r>
+            <a:endParaRPr lang="en-US" sz="1100" dirty="0"/>
+          </a:p>
+        </p:txBody>
+      </p:sp>
+      <p:sp>
+        <p:nvSpPr>
+          <p:cNvPr id="9" name="Shape 7"/>
+          <p:cNvSpPr/>
+          <p:nvPr/>
+        </p:nvSpPr>
+        <p:spPr>
+          <a:xfrm>
+            <a:off x="3291840" y="1188720"/>
+            <a:ext cx="2560320" cy="1828800"/>
+          </a:xfrm>
+          <a:prstGeom prst="rect">
+            <a:avLst/>
+          </a:prstGeom>
+          <a:solidFill>
+            <a:srgbClr val="FFFFFF"/>
+          </a:solidFill>
+          <a:ln w="12700">
+            <a:solidFill>
+              <a:srgbClr val="E5E2DC"/>
+            </a:solidFill>
+            <a:prstDash val="solid"/>
+          </a:ln>
+          <a:effectLst>
+            <a:outerShdw sx="100000" sy="100000" kx="0" ky="0" algn="bl" rotWithShape="0" blurRad="50800" dist="25400" dir="8100000">
+              <a:srgbClr val="000000">
+                <a:alpha val="10000"/>
+              </a:srgbClr>
+            </a:outerShdw>
+          </a:effectLst>
+        </p:spPr>
+      </p:sp>
+      <p:sp>
+        <p:nvSpPr>
+          <p:cNvPr id="10" name="Shape 8"/>
+          <p:cNvSpPr/>
+          <p:nvPr/>
+        </p:nvSpPr>
+        <p:spPr>
+          <a:xfrm>
+            <a:off x="3291840" y="1188720"/>
+            <a:ext cx="2560320" cy="54864"/>
+          </a:xfrm>
+          <a:prstGeom prst="rect">
+            <a:avLst/>
+          </a:prstGeom>
+          <a:solidFill>
+            <a:srgbClr val="2A9D8F"/>
+          </a:solidFill>
+          <a:ln/>
+        </p:spPr>
+      </p:sp>
+      <p:sp>
+        <p:nvSpPr>
+          <p:cNvPr id="11" name="Text 9"/>
+          <p:cNvSpPr/>
+          <p:nvPr/>
+        </p:nvSpPr>
+        <p:spPr>
+          <a:xfrm>
+            <a:off x="3429000" y="1325880"/>
+            <a:ext cx="2286000" cy="365760"/>
+          </a:xfrm>
+          <a:prstGeom prst="rect">
+            <a:avLst/>
+          </a:prstGeom>
+          <a:noFill/>
+          <a:ln/>
+        </p:spPr>
+        <p:txBody>
+          <a:bodyPr wrap="square" rtlCol="0" anchor="ctr"/>
+          <a:lstStyle/>
+          <a:p>
+            <a:pPr indent="0" marL="0">
+              <a:buNone/>
             </a:pPr>
             <a:r>
-              <a:rPr lang="en-US" sz="1500" dirty="0">
+              <a:rPr lang="en-US" sz="1400" b="1" dirty="0">
+                <a:solidFill>
+                  <a:srgbClr val="1B2A4A"/>
+                </a:solidFill>
+                <a:latin typeface="Calibri" pitchFamily="34" charset="0"/>
+                <a:ea typeface="Calibri" pitchFamily="34" charset="-122"/>
+                <a:cs typeface="Calibri" pitchFamily="34" charset="-120"/>
+              </a:rPr>
+              <a:t>Convection Currents</a:t>
+            </a:r>
+            <a:endParaRPr lang="en-US" sz="1400" dirty="0"/>
+          </a:p>
+        </p:txBody>
+      </p:sp>
+      <p:sp>
+        <p:nvSpPr>
+          <p:cNvPr id="12" name="Text 10"/>
+          <p:cNvSpPr/>
+          <p:nvPr/>
+        </p:nvSpPr>
+        <p:spPr>
+          <a:xfrm>
+            <a:off x="3429000" y="1737360"/>
+            <a:ext cx="2286000" cy="1097280"/>
+          </a:xfrm>
+          <a:prstGeom prst="rect">
+            <a:avLst/>
+          </a:prstGeom>
+          <a:noFill/>
+          <a:ln/>
+        </p:spPr>
+        <p:txBody>
+          <a:bodyPr wrap="square" rtlCol="0" anchor="t"/>
+          <a:lstStyle/>
+          <a:p>
+            <a:pPr indent="0" marL="0">
+              <a:buNone/>
+            </a:pPr>
+            <a:r>
+              <a:rPr lang="en-US" sz="1100" dirty="0">
                 <a:solidFill>
                   <a:srgbClr val="3D3A36"/>
                 </a:solidFill>
@@ -1517,20 +1774,129 @@
                 <a:ea typeface="Calibri" pitchFamily="34" charset="-122"/>
                 <a:cs typeface="Calibri" pitchFamily="34" charset="-120"/>
               </a:rPr>
-              <a:t>Temperature and pressure increase towards the centre</a:t>
-            </a:r>
-            <a:endParaRPr lang="en-US" sz="1500" dirty="0"/>
-          </a:p>
-          <a:p>
-            <a:pPr marL="342900" indent="-342900">
-              <a:spcAft>
-                <a:spcPts val="800"/>
-              </a:spcAft>
-              <a:buSzPct val="100000"/>
-              <a:buChar char="•"/>
+              <a:t>Hot rock rises → moves sideways dragging plates → cools → sinks. Powered by radioactive decay. Rate: 2–5 cm/year.</a:t>
+            </a:r>
+            <a:endParaRPr lang="en-US" sz="1100" dirty="0"/>
+          </a:p>
+        </p:txBody>
+      </p:sp>
+      <p:sp>
+        <p:nvSpPr>
+          <p:cNvPr id="13" name="Shape 11"/>
+          <p:cNvSpPr/>
+          <p:nvPr/>
+        </p:nvSpPr>
+        <p:spPr>
+          <a:xfrm>
+            <a:off x="6126480" y="1188720"/>
+            <a:ext cx="2560320" cy="1828800"/>
+          </a:xfrm>
+          <a:prstGeom prst="rect">
+            <a:avLst/>
+          </a:prstGeom>
+          <a:solidFill>
+            <a:srgbClr val="FFFFFF"/>
+          </a:solidFill>
+          <a:ln w="12700">
+            <a:solidFill>
+              <a:srgbClr val="E5E2DC"/>
+            </a:solidFill>
+            <a:prstDash val="solid"/>
+          </a:ln>
+          <a:effectLst>
+            <a:outerShdw sx="100000" sy="100000" kx="0" ky="0" algn="bl" rotWithShape="0" blurRad="50800" dist="25400" dir="8100000">
+              <a:srgbClr val="000000">
+                <a:alpha val="10000"/>
+              </a:srgbClr>
+            </a:outerShdw>
+          </a:effectLst>
+        </p:spPr>
+      </p:sp>
+      <p:sp>
+        <p:nvSpPr>
+          <p:cNvPr id="14" name="Shape 12"/>
+          <p:cNvSpPr/>
+          <p:nvPr/>
+        </p:nvSpPr>
+        <p:spPr>
+          <a:xfrm>
+            <a:off x="6126480" y="1188720"/>
+            <a:ext cx="2560320" cy="54864"/>
+          </a:xfrm>
+          <a:prstGeom prst="rect">
+            <a:avLst/>
+          </a:prstGeom>
+          <a:solidFill>
+            <a:srgbClr val="2A9D8F"/>
+          </a:solidFill>
+          <a:ln/>
+        </p:spPr>
+      </p:sp>
+      <p:sp>
+        <p:nvSpPr>
+          <p:cNvPr id="15" name="Text 13"/>
+          <p:cNvSpPr/>
+          <p:nvPr/>
+        </p:nvSpPr>
+        <p:spPr>
+          <a:xfrm>
+            <a:off x="6263640" y="1325880"/>
+            <a:ext cx="2286000" cy="365760"/>
+          </a:xfrm>
+          <a:prstGeom prst="rect">
+            <a:avLst/>
+          </a:prstGeom>
+          <a:noFill/>
+          <a:ln/>
+        </p:spPr>
+        <p:txBody>
+          <a:bodyPr wrap="square" rtlCol="0" anchor="ctr"/>
+          <a:lstStyle/>
+          <a:p>
+            <a:pPr indent="0" marL="0">
+              <a:buNone/>
             </a:pPr>
             <a:r>
-              <a:rPr lang="en-US" sz="1500" dirty="0">
+              <a:rPr lang="en-US" sz="1400" b="1" dirty="0">
+                <a:solidFill>
+                  <a:srgbClr val="1B2A4A"/>
+                </a:solidFill>
+                <a:latin typeface="Calibri" pitchFamily="34" charset="0"/>
+                <a:ea typeface="Calibri" pitchFamily="34" charset="-122"/>
+                <a:cs typeface="Calibri" pitchFamily="34" charset="-120"/>
+              </a:rPr>
+              <a:t>Plates</a:t>
+            </a:r>
+            <a:endParaRPr lang="en-US" sz="1400" dirty="0"/>
+          </a:p>
+        </p:txBody>
+      </p:sp>
+      <p:sp>
+        <p:nvSpPr>
+          <p:cNvPr id="16" name="Text 14"/>
+          <p:cNvSpPr/>
+          <p:nvPr/>
+        </p:nvSpPr>
+        <p:spPr>
+          <a:xfrm>
+            <a:off x="6263640" y="1737360"/>
+            <a:ext cx="2286000" cy="1097280"/>
+          </a:xfrm>
+          <a:prstGeom prst="rect">
+            <a:avLst/>
+          </a:prstGeom>
+          <a:noFill/>
+          <a:ln/>
+        </p:spPr>
+        <p:txBody>
+          <a:bodyPr wrap="square" rtlCol="0" anchor="t"/>
+          <a:lstStyle/>
+          <a:p>
+            <a:pPr indent="0" marL="0">
+              <a:buNone/>
+            </a:pPr>
+            <a:r>
+              <a:rPr lang="en-US" sz="1100" dirty="0">
                 <a:solidFill>
                   <a:srgbClr val="3D3A36"/>
                 </a:solidFill>
@@ -1538,66 +1904,9 @@
                 <a:ea typeface="Calibri" pitchFamily="34" charset="-122"/>
                 <a:cs typeface="Calibri" pitchFamily="34" charset="-120"/>
               </a:rPr>
-              <a:t>Crust broken into tectonic plates floating on mantle</a:t>
-            </a:r>
-            <a:endParaRPr lang="en-US" sz="1500" dirty="0"/>
-          </a:p>
-          <a:p>
-            <a:pPr marL="342900" indent="-342900">
-              <a:spcAft>
-                <a:spcPts val="800"/>
-              </a:spcAft>
-              <a:buSzPct val="100000"/>
-              <a:buChar char="•"/>
-            </a:pPr>
-            <a:r>
-              <a:rPr lang="en-US" sz="1500" dirty="0">
-                <a:solidFill>
-                  <a:srgbClr val="3D3A36"/>
-                </a:solidFill>
-                <a:latin typeface="Calibri" pitchFamily="34" charset="0"/>
-                <a:ea typeface="Calibri" pitchFamily="34" charset="-122"/>
-                <a:cs typeface="Calibri" pitchFamily="34" charset="-120"/>
-              </a:rPr>
-              <a:t>Density arrangement: lightest at surface, densest at centre</a:t>
-            </a:r>
-            <a:endParaRPr lang="en-US" sz="1500" dirty="0"/>
-          </a:p>
-        </p:txBody>
-      </p:sp>
-      <p:sp>
-        <p:nvSpPr>
-          <p:cNvPr id="5" name="Text 3"/>
-          <p:cNvSpPr/>
-          <p:nvPr/>
-        </p:nvSpPr>
-        <p:spPr>
-          <a:xfrm>
-            <a:off x="548640" y="4800600"/>
-            <a:ext cx="3657600" cy="274320"/>
-          </a:xfrm>
-          <a:prstGeom prst="rect">
-            <a:avLst/>
-          </a:prstGeom>
-          <a:noFill/>
-          <a:ln/>
-        </p:spPr>
-        <p:txBody>
-          <a:bodyPr wrap="square" rtlCol="0" anchor="ctr"/>
-          <a:lstStyle/>
-          <a:p>
-            <a:pPr indent="0" marL="0">
-              <a:buNone/>
-            </a:pPr>
-            <a:r>
-              <a:rPr lang="en-US" sz="800" dirty="0">
-                <a:solidFill>
-                  <a:srgbClr val="9B9690"/>
-                </a:solidFill>
-              </a:rPr>
-              <a:t>mrzocchi.com</a:t>
-            </a:r>
-            <a:endParaRPr lang="en-US" sz="800" dirty="0"/>
+              <a:t>Earth's crust broken into tectonic plates floating on mantle. Movement causes earthquakes, volcanoes, mountains.</a:t>
+            </a:r>
+            <a:endParaRPr lang="en-US" sz="1100" dirty="0"/>
           </a:p>
         </p:txBody>
       </p:sp>
@@ -1615,7 +1924,7 @@
     <p:bg>
       <p:bgPr>
         <a:solidFill>
-          <a:srgbClr val="FFFFFF"/>
+          <a:srgbClr val="FAF8F5"/>
         </a:solidFill>
       </p:bgPr>
     </p:bg>
@@ -1661,8 +1970,8 @@
         </p:nvSpPr>
         <p:spPr>
           <a:xfrm>
-            <a:off x="548640" y="274320"/>
-            <a:ext cx="8046720" cy="640080"/>
+            <a:off x="7772400" y="4709160"/>
+            <a:ext cx="1097280" cy="320040"/>
           </a:xfrm>
           <a:prstGeom prst="rect">
             <a:avLst/>
@@ -1671,7 +1980,46 @@
           <a:ln/>
         </p:spPr>
         <p:txBody>
-          <a:bodyPr wrap="square" lIns="0" tIns="0" rIns="0" bIns="0" rtlCol="0" anchor="ctr"/>
+          <a:bodyPr wrap="square" rtlCol="0" anchor="ctr"/>
+          <a:lstStyle/>
+          <a:p>
+            <a:pPr algn="r" indent="0" marL="0">
+              <a:buNone/>
+            </a:pPr>
+            <a:r>
+              <a:rPr lang="en-US" sz="900" dirty="0">
+                <a:solidFill>
+                  <a:srgbClr val="6B6660"/>
+                </a:solidFill>
+                <a:latin typeface="Calibri" pitchFamily="34" charset="0"/>
+                <a:ea typeface="Calibri" pitchFamily="34" charset="-122"/>
+                <a:cs typeface="Calibri" pitchFamily="34" charset="-120"/>
+              </a:rPr>
+              <a:t>3 / 5</a:t>
+            </a:r>
+            <a:endParaRPr lang="en-US" sz="900" dirty="0"/>
+          </a:p>
+        </p:txBody>
+      </p:sp>
+      <p:sp>
+        <p:nvSpPr>
+          <p:cNvPr id="4" name="Text 2"/>
+          <p:cNvSpPr/>
+          <p:nvPr/>
+        </p:nvSpPr>
+        <p:spPr>
+          <a:xfrm>
+            <a:off x="457200" y="274320"/>
+            <a:ext cx="8229600" cy="640080"/>
+          </a:xfrm>
+          <a:prstGeom prst="rect">
+            <a:avLst/>
+          </a:prstGeom>
+          <a:noFill/>
+          <a:ln/>
+        </p:spPr>
+        <p:txBody>
+          <a:bodyPr wrap="square" rtlCol="0" anchor="ctr"/>
           <a:lstStyle/>
           <a:p>
             <a:pPr indent="0" marL="0">
@@ -1686,7 +2034,7 @@
                 <a:ea typeface="Georgia" pitchFamily="34" charset="-122"/>
                 <a:cs typeface="Georgia" pitchFamily="34" charset="-120"/>
               </a:rPr>
-              <a:t>Plate Tectonics</a:t>
+              <a:t>Boundaries &amp; Features</a:t>
             </a:r>
             <a:endParaRPr lang="en-US" sz="2600" dirty="0"/>
           </a:p>
@@ -1694,14 +2042,66 @@
       </p:sp>
       <p:sp>
         <p:nvSpPr>
-          <p:cNvPr id="4" name="Text 2"/>
-          <p:cNvSpPr/>
-          <p:nvPr/>
-        </p:nvSpPr>
-        <p:spPr>
-          <a:xfrm>
-            <a:off x="548640" y="1097280"/>
-            <a:ext cx="8046720" cy="3474720"/>
+          <p:cNvPr id="5" name="Shape 3"/>
+          <p:cNvSpPr/>
+          <p:nvPr/>
+        </p:nvSpPr>
+        <p:spPr>
+          <a:xfrm>
+            <a:off x="457200" y="1188720"/>
+            <a:ext cx="2560320" cy="1828800"/>
+          </a:xfrm>
+          <a:prstGeom prst="rect">
+            <a:avLst/>
+          </a:prstGeom>
+          <a:solidFill>
+            <a:srgbClr val="FFFFFF"/>
+          </a:solidFill>
+          <a:ln w="12700">
+            <a:solidFill>
+              <a:srgbClr val="E5E2DC"/>
+            </a:solidFill>
+            <a:prstDash val="solid"/>
+          </a:ln>
+          <a:effectLst>
+            <a:outerShdw sx="100000" sy="100000" kx="0" ky="0" algn="bl" rotWithShape="0" blurRad="50800" dist="25400" dir="8100000">
+              <a:srgbClr val="000000">
+                <a:alpha val="10000"/>
+              </a:srgbClr>
+            </a:outerShdw>
+          </a:effectLst>
+        </p:spPr>
+      </p:sp>
+      <p:sp>
+        <p:nvSpPr>
+          <p:cNvPr id="6" name="Shape 4"/>
+          <p:cNvSpPr/>
+          <p:nvPr/>
+        </p:nvSpPr>
+        <p:spPr>
+          <a:xfrm>
+            <a:off x="457200" y="1188720"/>
+            <a:ext cx="2560320" cy="54864"/>
+          </a:xfrm>
+          <a:prstGeom prst="rect">
+            <a:avLst/>
+          </a:prstGeom>
+          <a:solidFill>
+            <a:srgbClr val="2A9D8F"/>
+          </a:solidFill>
+          <a:ln/>
+        </p:spPr>
+      </p:sp>
+      <p:sp>
+        <p:nvSpPr>
+          <p:cNvPr id="7" name="Text 5"/>
+          <p:cNvSpPr/>
+          <p:nvPr/>
+        </p:nvSpPr>
+        <p:spPr>
+          <a:xfrm>
+            <a:off x="594360" y="1325880"/>
+            <a:ext cx="2286000" cy="365760"/>
           </a:xfrm>
           <a:prstGeom prst="rect">
             <a:avLst/>
@@ -1710,18 +2110,53 @@
           <a:ln/>
         </p:spPr>
         <p:txBody>
+          <a:bodyPr wrap="square" rtlCol="0" anchor="ctr"/>
+          <a:lstStyle/>
+          <a:p>
+            <a:pPr indent="0" marL="0">
+              <a:buNone/>
+            </a:pPr>
+            <a:r>
+              <a:rPr lang="en-US" sz="1400" b="1" dirty="0">
+                <a:solidFill>
+                  <a:srgbClr val="1B2A4A"/>
+                </a:solidFill>
+                <a:latin typeface="Calibri" pitchFamily="34" charset="0"/>
+                <a:ea typeface="Calibri" pitchFamily="34" charset="-122"/>
+                <a:cs typeface="Calibri" pitchFamily="34" charset="-120"/>
+              </a:rPr>
+              <a:t>Divergent</a:t>
+            </a:r>
+            <a:endParaRPr lang="en-US" sz="1400" dirty="0"/>
+          </a:p>
+        </p:txBody>
+      </p:sp>
+      <p:sp>
+        <p:nvSpPr>
+          <p:cNvPr id="8" name="Text 6"/>
+          <p:cNvSpPr/>
+          <p:nvPr/>
+        </p:nvSpPr>
+        <p:spPr>
+          <a:xfrm>
+            <a:off x="594360" y="1737360"/>
+            <a:ext cx="2286000" cy="1097280"/>
+          </a:xfrm>
+          <a:prstGeom prst="rect">
+            <a:avLst/>
+          </a:prstGeom>
+          <a:noFill/>
+          <a:ln/>
+        </p:spPr>
+        <p:txBody>
           <a:bodyPr wrap="square" rtlCol="0" anchor="t"/>
           <a:lstStyle/>
           <a:p>
-            <a:pPr marL="342900" indent="-342900">
-              <a:spcAft>
-                <a:spcPts val="800"/>
-              </a:spcAft>
-              <a:buSzPct val="100000"/>
-              <a:buChar char="•"/>
+            <a:pPr indent="0" marL="0">
+              <a:buNone/>
             </a:pPr>
             <a:r>
-              <a:rPr lang="en-US" sz="1500" dirty="0">
+              <a:rPr lang="en-US" sz="1100" dirty="0">
                 <a:solidFill>
                   <a:srgbClr val="3D3A36"/>
                 </a:solidFill>
@@ -1729,20 +2164,129 @@
                 <a:ea typeface="Calibri" pitchFamily="34" charset="-122"/>
                 <a:cs typeface="Calibri" pitchFamily="34" charset="-120"/>
               </a:rPr>
-              <a:t>Convection currents in mantle drive plate movement</a:t>
-            </a:r>
-            <a:endParaRPr lang="en-US" sz="1500" dirty="0"/>
-          </a:p>
-          <a:p>
-            <a:pPr marL="342900" indent="-342900">
-              <a:spcAft>
-                <a:spcPts val="800"/>
-              </a:spcAft>
-              <a:buSzPct val="100000"/>
-              <a:buChar char="•"/>
+              <a:t>Plates apart. New crust. Mid-Atlantic Ridge. Rift valleys, volcanic islands.</a:t>
+            </a:r>
+            <a:endParaRPr lang="en-US" sz="1100" dirty="0"/>
+          </a:p>
+        </p:txBody>
+      </p:sp>
+      <p:sp>
+        <p:nvSpPr>
+          <p:cNvPr id="9" name="Shape 7"/>
+          <p:cNvSpPr/>
+          <p:nvPr/>
+        </p:nvSpPr>
+        <p:spPr>
+          <a:xfrm>
+            <a:off x="3291840" y="1188720"/>
+            <a:ext cx="2560320" cy="1828800"/>
+          </a:xfrm>
+          <a:prstGeom prst="rect">
+            <a:avLst/>
+          </a:prstGeom>
+          <a:solidFill>
+            <a:srgbClr val="FFFFFF"/>
+          </a:solidFill>
+          <a:ln w="12700">
+            <a:solidFill>
+              <a:srgbClr val="E5E2DC"/>
+            </a:solidFill>
+            <a:prstDash val="solid"/>
+          </a:ln>
+          <a:effectLst>
+            <a:outerShdw sx="100000" sy="100000" kx="0" ky="0" algn="bl" rotWithShape="0" blurRad="50800" dist="25400" dir="8100000">
+              <a:srgbClr val="000000">
+                <a:alpha val="10000"/>
+              </a:srgbClr>
+            </a:outerShdw>
+          </a:effectLst>
+        </p:spPr>
+      </p:sp>
+      <p:sp>
+        <p:nvSpPr>
+          <p:cNvPr id="10" name="Shape 8"/>
+          <p:cNvSpPr/>
+          <p:nvPr/>
+        </p:nvSpPr>
+        <p:spPr>
+          <a:xfrm>
+            <a:off x="3291840" y="1188720"/>
+            <a:ext cx="2560320" cy="54864"/>
+          </a:xfrm>
+          <a:prstGeom prst="rect">
+            <a:avLst/>
+          </a:prstGeom>
+          <a:solidFill>
+            <a:srgbClr val="2A9D8F"/>
+          </a:solidFill>
+          <a:ln/>
+        </p:spPr>
+      </p:sp>
+      <p:sp>
+        <p:nvSpPr>
+          <p:cNvPr id="11" name="Text 9"/>
+          <p:cNvSpPr/>
+          <p:nvPr/>
+        </p:nvSpPr>
+        <p:spPr>
+          <a:xfrm>
+            <a:off x="3429000" y="1325880"/>
+            <a:ext cx="2286000" cy="365760"/>
+          </a:xfrm>
+          <a:prstGeom prst="rect">
+            <a:avLst/>
+          </a:prstGeom>
+          <a:noFill/>
+          <a:ln/>
+        </p:spPr>
+        <p:txBody>
+          <a:bodyPr wrap="square" rtlCol="0" anchor="ctr"/>
+          <a:lstStyle/>
+          <a:p>
+            <a:pPr indent="0" marL="0">
+              <a:buNone/>
             </a:pPr>
             <a:r>
-              <a:rPr lang="en-US" sz="1500" dirty="0">
+              <a:rPr lang="en-US" sz="1400" b="1" dirty="0">
+                <a:solidFill>
+                  <a:srgbClr val="1B2A4A"/>
+                </a:solidFill>
+                <a:latin typeface="Calibri" pitchFamily="34" charset="0"/>
+                <a:ea typeface="Calibri" pitchFamily="34" charset="-122"/>
+                <a:cs typeface="Calibri" pitchFamily="34" charset="-120"/>
+              </a:rPr>
+              <a:t>Convergent</a:t>
+            </a:r>
+            <a:endParaRPr lang="en-US" sz="1400" dirty="0"/>
+          </a:p>
+        </p:txBody>
+      </p:sp>
+      <p:sp>
+        <p:nvSpPr>
+          <p:cNvPr id="12" name="Text 10"/>
+          <p:cNvSpPr/>
+          <p:nvPr/>
+        </p:nvSpPr>
+        <p:spPr>
+          <a:xfrm>
+            <a:off x="3429000" y="1737360"/>
+            <a:ext cx="2286000" cy="1097280"/>
+          </a:xfrm>
+          <a:prstGeom prst="rect">
+            <a:avLst/>
+          </a:prstGeom>
+          <a:noFill/>
+          <a:ln/>
+        </p:spPr>
+        <p:txBody>
+          <a:bodyPr wrap="square" rtlCol="0" anchor="t"/>
+          <a:lstStyle/>
+          <a:p>
+            <a:pPr indent="0" marL="0">
+              <a:buNone/>
+            </a:pPr>
+            <a:r>
+              <a:rPr lang="en-US" sz="1100" dirty="0">
                 <a:solidFill>
                   <a:srgbClr val="3D3A36"/>
                 </a:solidFill>
@@ -1750,20 +2294,129 @@
                 <a:ea typeface="Calibri" pitchFamily="34" charset="-122"/>
                 <a:cs typeface="Calibri" pitchFamily="34" charset="-120"/>
               </a:rPr>
-              <a:t>Divergent: apart → new crust | Convergent: together → subduction | Transform: past → earthquakes</a:t>
-            </a:r>
-            <a:endParaRPr lang="en-US" sz="1500" dirty="0"/>
-          </a:p>
-          <a:p>
-            <a:pPr marL="342900" indent="-342900">
-              <a:spcAft>
-                <a:spcPts val="800"/>
-              </a:spcAft>
-              <a:buSzPct val="100000"/>
-              <a:buChar char="•"/>
+              <a:t>Plates together. Subduction. Trenches, mountains, volcanoes. Three subtypes: ocean-ocean, ocean-continent, continent-continent.</a:t>
+            </a:r>
+            <a:endParaRPr lang="en-US" sz="1100" dirty="0"/>
+          </a:p>
+        </p:txBody>
+      </p:sp>
+      <p:sp>
+        <p:nvSpPr>
+          <p:cNvPr id="13" name="Shape 11"/>
+          <p:cNvSpPr/>
+          <p:nvPr/>
+        </p:nvSpPr>
+        <p:spPr>
+          <a:xfrm>
+            <a:off x="6126480" y="1188720"/>
+            <a:ext cx="2560320" cy="1828800"/>
+          </a:xfrm>
+          <a:prstGeom prst="rect">
+            <a:avLst/>
+          </a:prstGeom>
+          <a:solidFill>
+            <a:srgbClr val="FFFFFF"/>
+          </a:solidFill>
+          <a:ln w="12700">
+            <a:solidFill>
+              <a:srgbClr val="E5E2DC"/>
+            </a:solidFill>
+            <a:prstDash val="solid"/>
+          </a:ln>
+          <a:effectLst>
+            <a:outerShdw sx="100000" sy="100000" kx="0" ky="0" algn="bl" rotWithShape="0" blurRad="50800" dist="25400" dir="8100000">
+              <a:srgbClr val="000000">
+                <a:alpha val="10000"/>
+              </a:srgbClr>
+            </a:outerShdw>
+          </a:effectLst>
+        </p:spPr>
+      </p:sp>
+      <p:sp>
+        <p:nvSpPr>
+          <p:cNvPr id="14" name="Shape 12"/>
+          <p:cNvSpPr/>
+          <p:nvPr/>
+        </p:nvSpPr>
+        <p:spPr>
+          <a:xfrm>
+            <a:off x="6126480" y="1188720"/>
+            <a:ext cx="2560320" cy="54864"/>
+          </a:xfrm>
+          <a:prstGeom prst="rect">
+            <a:avLst/>
+          </a:prstGeom>
+          <a:solidFill>
+            <a:srgbClr val="2A9D8F"/>
+          </a:solidFill>
+          <a:ln/>
+        </p:spPr>
+      </p:sp>
+      <p:sp>
+        <p:nvSpPr>
+          <p:cNvPr id="15" name="Text 13"/>
+          <p:cNvSpPr/>
+          <p:nvPr/>
+        </p:nvSpPr>
+        <p:spPr>
+          <a:xfrm>
+            <a:off x="6263640" y="1325880"/>
+            <a:ext cx="2286000" cy="365760"/>
+          </a:xfrm>
+          <a:prstGeom prst="rect">
+            <a:avLst/>
+          </a:prstGeom>
+          <a:noFill/>
+          <a:ln/>
+        </p:spPr>
+        <p:txBody>
+          <a:bodyPr wrap="square" rtlCol="0" anchor="ctr"/>
+          <a:lstStyle/>
+          <a:p>
+            <a:pPr indent="0" marL="0">
+              <a:buNone/>
             </a:pPr>
             <a:r>
-              <a:rPr lang="en-US" sz="1500" dirty="0">
+              <a:rPr lang="en-US" sz="1400" b="1" dirty="0">
+                <a:solidFill>
+                  <a:srgbClr val="1B2A4A"/>
+                </a:solidFill>
+                <a:latin typeface="Calibri" pitchFamily="34" charset="0"/>
+                <a:ea typeface="Calibri" pitchFamily="34" charset="-122"/>
+                <a:cs typeface="Calibri" pitchFamily="34" charset="-120"/>
+              </a:rPr>
+              <a:t>Transform</a:t>
+            </a:r>
+            <a:endParaRPr lang="en-US" sz="1400" dirty="0"/>
+          </a:p>
+        </p:txBody>
+      </p:sp>
+      <p:sp>
+        <p:nvSpPr>
+          <p:cNvPr id="16" name="Text 14"/>
+          <p:cNvSpPr/>
+          <p:nvPr/>
+        </p:nvSpPr>
+        <p:spPr>
+          <a:xfrm>
+            <a:off x="6263640" y="1737360"/>
+            <a:ext cx="2286000" cy="1097280"/>
+          </a:xfrm>
+          <a:prstGeom prst="rect">
+            <a:avLst/>
+          </a:prstGeom>
+          <a:noFill/>
+          <a:ln/>
+        </p:spPr>
+        <p:txBody>
+          <a:bodyPr wrap="square" rtlCol="0" anchor="t"/>
+          <a:lstStyle/>
+          <a:p>
+            <a:pPr indent="0" marL="0">
+              <a:buNone/>
+            </a:pPr>
+            <a:r>
+              <a:rPr lang="en-US" sz="1100" dirty="0">
                 <a:solidFill>
                   <a:srgbClr val="3D3A36"/>
                 </a:solidFill>
@@ -1771,87 +2424,9 @@
                 <a:ea typeface="Calibri" pitchFamily="34" charset="-122"/>
                 <a:cs typeface="Calibri" pitchFamily="34" charset="-120"/>
               </a:rPr>
-              <a:t>Earthquakes: seismic waves from sudden plate movement</a:t>
-            </a:r>
-            <a:endParaRPr lang="en-US" sz="1500" dirty="0"/>
-          </a:p>
-          <a:p>
-            <a:pPr marL="342900" indent="-342900">
-              <a:spcAft>
-                <a:spcPts val="800"/>
-              </a:spcAft>
-              <a:buSzPct val="100000"/>
-              <a:buChar char="•"/>
-            </a:pPr>
-            <a:r>
-              <a:rPr lang="en-US" sz="1500" dirty="0">
-                <a:solidFill>
-                  <a:srgbClr val="3D3A36"/>
-                </a:solidFill>
-                <a:latin typeface="Calibri" pitchFamily="34" charset="0"/>
-                <a:ea typeface="Calibri" pitchFamily="34" charset="-122"/>
-                <a:cs typeface="Calibri" pitchFamily="34" charset="-120"/>
-              </a:rPr>
-              <a:t>Volcanoes: magma escaping at convergent/divergent boundaries</a:t>
-            </a:r>
-            <a:endParaRPr lang="en-US" sz="1500" dirty="0"/>
-          </a:p>
-          <a:p>
-            <a:pPr marL="342900" indent="-342900">
-              <a:spcAft>
-                <a:spcPts val="800"/>
-              </a:spcAft>
-              <a:buSzPct val="100000"/>
-              <a:buChar char="•"/>
-            </a:pPr>
-            <a:r>
-              <a:rPr lang="en-US" sz="1500" dirty="0">
-                <a:solidFill>
-                  <a:srgbClr val="3D3A36"/>
-                </a:solidFill>
-                <a:latin typeface="Calibri" pitchFamily="34" charset="0"/>
-                <a:ea typeface="Calibri" pitchFamily="34" charset="-122"/>
-                <a:cs typeface="Calibri" pitchFamily="34" charset="-120"/>
-              </a:rPr>
-              <a:t>Ring of Fire: 75% of volcanoes, 90% of earthquakes</a:t>
-            </a:r>
-            <a:endParaRPr lang="en-US" sz="1500" dirty="0"/>
-          </a:p>
-        </p:txBody>
-      </p:sp>
-      <p:sp>
-        <p:nvSpPr>
-          <p:cNvPr id="5" name="Text 3"/>
-          <p:cNvSpPr/>
-          <p:nvPr/>
-        </p:nvSpPr>
-        <p:spPr>
-          <a:xfrm>
-            <a:off x="548640" y="4800600"/>
-            <a:ext cx="3657600" cy="274320"/>
-          </a:xfrm>
-          <a:prstGeom prst="rect">
-            <a:avLst/>
-          </a:prstGeom>
-          <a:noFill/>
-          <a:ln/>
-        </p:spPr>
-        <p:txBody>
-          <a:bodyPr wrap="square" rtlCol="0" anchor="ctr"/>
-          <a:lstStyle/>
-          <a:p>
-            <a:pPr indent="0" marL="0">
-              <a:buNone/>
-            </a:pPr>
-            <a:r>
-              <a:rPr lang="en-US" sz="800" dirty="0">
-                <a:solidFill>
-                  <a:srgbClr val="9B9690"/>
-                </a:solidFill>
-              </a:rPr>
-              <a:t>mrzocchi.com</a:t>
-            </a:r>
-            <a:endParaRPr lang="en-US" sz="800" dirty="0"/>
+              <a:t>Plates sideways. No new/destroyed crust. Earthquakes. San Andreas Fault.</a:t>
+            </a:r>
+            <a:endParaRPr lang="en-US" sz="1100" dirty="0"/>
           </a:p>
         </p:txBody>
       </p:sp>
@@ -1869,7 +2444,7 @@
     <p:bg>
       <p:bgPr>
         <a:solidFill>
-          <a:srgbClr val="FFFFFF"/>
+          <a:srgbClr val="FAF8F5"/>
         </a:solidFill>
       </p:bgPr>
     </p:bg>
@@ -1915,8 +2490,8 @@
         </p:nvSpPr>
         <p:spPr>
           <a:xfrm>
-            <a:off x="548640" y="274320"/>
-            <a:ext cx="8046720" cy="640080"/>
+            <a:off x="7772400" y="4709160"/>
+            <a:ext cx="1097280" cy="320040"/>
           </a:xfrm>
           <a:prstGeom prst="rect">
             <a:avLst/>
@@ -1925,7 +2500,46 @@
           <a:ln/>
         </p:spPr>
         <p:txBody>
-          <a:bodyPr wrap="square" lIns="0" tIns="0" rIns="0" bIns="0" rtlCol="0" anchor="ctr"/>
+          <a:bodyPr wrap="square" rtlCol="0" anchor="ctr"/>
+          <a:lstStyle/>
+          <a:p>
+            <a:pPr algn="r" indent="0" marL="0">
+              <a:buNone/>
+            </a:pPr>
+            <a:r>
+              <a:rPr lang="en-US" sz="900" dirty="0">
+                <a:solidFill>
+                  <a:srgbClr val="6B6660"/>
+                </a:solidFill>
+                <a:latin typeface="Calibri" pitchFamily="34" charset="0"/>
+                <a:ea typeface="Calibri" pitchFamily="34" charset="-122"/>
+                <a:cs typeface="Calibri" pitchFamily="34" charset="-120"/>
+              </a:rPr>
+              <a:t>4 / 5</a:t>
+            </a:r>
+            <a:endParaRPr lang="en-US" sz="900" dirty="0"/>
+          </a:p>
+        </p:txBody>
+      </p:sp>
+      <p:sp>
+        <p:nvSpPr>
+          <p:cNvPr id="4" name="Text 2"/>
+          <p:cNvSpPr/>
+          <p:nvPr/>
+        </p:nvSpPr>
+        <p:spPr>
+          <a:xfrm>
+            <a:off x="457200" y="274320"/>
+            <a:ext cx="8229600" cy="640080"/>
+          </a:xfrm>
+          <a:prstGeom prst="rect">
+            <a:avLst/>
+          </a:prstGeom>
+          <a:noFill/>
+          <a:ln/>
+        </p:spPr>
+        <p:txBody>
+          <a:bodyPr wrap="square" rtlCol="0" anchor="ctr"/>
           <a:lstStyle/>
           <a:p>
             <a:pPr indent="0" marL="0">
@@ -1940,22 +2554,113 @@
                 <a:ea typeface="Georgia" pitchFamily="34" charset="-122"/>
                 <a:cs typeface="Georgia" pitchFamily="34" charset="-120"/>
               </a:rPr>
+              <a:t>Drift, Quakes &amp; Volcanoes</a:t>
+            </a:r>
+            <a:endParaRPr lang="en-US" sz="2600" dirty="0"/>
+          </a:p>
+        </p:txBody>
+      </p:sp>
+      <p:sp>
+        <p:nvSpPr>
+          <p:cNvPr id="5" name="Shape 3"/>
+          <p:cNvSpPr/>
+          <p:nvPr/>
+        </p:nvSpPr>
+        <p:spPr>
+          <a:xfrm>
+            <a:off x="457200" y="1188720"/>
+            <a:ext cx="2560320" cy="1828800"/>
+          </a:xfrm>
+          <a:prstGeom prst="rect">
+            <a:avLst/>
+          </a:prstGeom>
+          <a:solidFill>
+            <a:srgbClr val="FFFFFF"/>
+          </a:solidFill>
+          <a:ln w="12700">
+            <a:solidFill>
+              <a:srgbClr val="E5E2DC"/>
+            </a:solidFill>
+            <a:prstDash val="solid"/>
+          </a:ln>
+          <a:effectLst>
+            <a:outerShdw sx="100000" sy="100000" kx="0" ky="0" algn="bl" rotWithShape="0" blurRad="50800" dist="25400" dir="8100000">
+              <a:srgbClr val="000000">
+                <a:alpha val="10000"/>
+              </a:srgbClr>
+            </a:outerShdw>
+          </a:effectLst>
+        </p:spPr>
+      </p:sp>
+      <p:sp>
+        <p:nvSpPr>
+          <p:cNvPr id="6" name="Shape 4"/>
+          <p:cNvSpPr/>
+          <p:nvPr/>
+        </p:nvSpPr>
+        <p:spPr>
+          <a:xfrm>
+            <a:off x="457200" y="1188720"/>
+            <a:ext cx="2560320" cy="54864"/>
+          </a:xfrm>
+          <a:prstGeom prst="rect">
+            <a:avLst/>
+          </a:prstGeom>
+          <a:solidFill>
+            <a:srgbClr val="2A9D8F"/>
+          </a:solidFill>
+          <a:ln/>
+        </p:spPr>
+      </p:sp>
+      <p:sp>
+        <p:nvSpPr>
+          <p:cNvPr id="7" name="Text 5"/>
+          <p:cNvSpPr/>
+          <p:nvPr/>
+        </p:nvSpPr>
+        <p:spPr>
+          <a:xfrm>
+            <a:off x="594360" y="1325880"/>
+            <a:ext cx="2286000" cy="365760"/>
+          </a:xfrm>
+          <a:prstGeom prst="rect">
+            <a:avLst/>
+          </a:prstGeom>
+          <a:noFill/>
+          <a:ln/>
+        </p:spPr>
+        <p:txBody>
+          <a:bodyPr wrap="square" rtlCol="0" anchor="ctr"/>
+          <a:lstStyle/>
+          <a:p>
+            <a:pPr indent="0" marL="0">
+              <a:buNone/>
+            </a:pPr>
+            <a:r>
+              <a:rPr lang="en-US" sz="1400" b="1" dirty="0">
+                <a:solidFill>
+                  <a:srgbClr val="1B2A4A"/>
+                </a:solidFill>
+                <a:latin typeface="Calibri" pitchFamily="34" charset="0"/>
+                <a:ea typeface="Calibri" pitchFamily="34" charset="-122"/>
+                <a:cs typeface="Calibri" pitchFamily="34" charset="-120"/>
+              </a:rPr>
               <a:t>Continental Drift</a:t>
             </a:r>
-            <a:endParaRPr lang="en-US" sz="2600" dirty="0"/>
-          </a:p>
-        </p:txBody>
-      </p:sp>
-      <p:sp>
-        <p:nvSpPr>
-          <p:cNvPr id="4" name="Text 2"/>
-          <p:cNvSpPr/>
-          <p:nvPr/>
-        </p:nvSpPr>
-        <p:spPr>
-          <a:xfrm>
-            <a:off x="548640" y="1097280"/>
-            <a:ext cx="8046720" cy="3474720"/>
+            <a:endParaRPr lang="en-US" sz="1400" dirty="0"/>
+          </a:p>
+        </p:txBody>
+      </p:sp>
+      <p:sp>
+        <p:nvSpPr>
+          <p:cNvPr id="8" name="Text 6"/>
+          <p:cNvSpPr/>
+          <p:nvPr/>
+        </p:nvSpPr>
+        <p:spPr>
+          <a:xfrm>
+            <a:off x="594360" y="1737360"/>
+            <a:ext cx="2286000" cy="1097280"/>
           </a:xfrm>
           <a:prstGeom prst="rect">
             <a:avLst/>
@@ -1967,15 +2672,11 @@
           <a:bodyPr wrap="square" rtlCol="0" anchor="t"/>
           <a:lstStyle/>
           <a:p>
-            <a:pPr marL="342900" indent="-342900">
-              <a:spcAft>
-                <a:spcPts val="800"/>
-              </a:spcAft>
-              <a:buSzPct val="100000"/>
-              <a:buChar char="•"/>
+            <a:pPr indent="0" marL="0">
+              <a:buNone/>
             </a:pPr>
             <a:r>
-              <a:rPr lang="en-US" sz="1500" dirty="0">
+              <a:rPr lang="en-US" sz="1100" dirty="0">
                 <a:solidFill>
                   <a:srgbClr val="3D3A36"/>
                 </a:solidFill>
@@ -1983,20 +2684,129 @@
                 <a:ea typeface="Calibri" pitchFamily="34" charset="-122"/>
                 <a:cs typeface="Calibri" pitchFamily="34" charset="-120"/>
               </a:rPr>
-              <a:t>Wegener: Pangaea broke apart ~200 million years ago</a:t>
-            </a:r>
-            <a:endParaRPr lang="en-US" sz="1500" dirty="0"/>
-          </a:p>
-          <a:p>
-            <a:pPr marL="342900" indent="-342900">
-              <a:spcAft>
-                <a:spcPts val="800"/>
-              </a:spcAft>
-              <a:buSzPct val="100000"/>
-              <a:buChar char="•"/>
+              <a:t>Wegener, 1912. Pangaea. Evidence: jigsaw fit, fossils, rocks, glacial marks. Rejected — no mechanism. Accepted 1960s with sea-floor spreading.</a:t>
+            </a:r>
+            <a:endParaRPr lang="en-US" sz="1100" dirty="0"/>
+          </a:p>
+        </p:txBody>
+      </p:sp>
+      <p:sp>
+        <p:nvSpPr>
+          <p:cNvPr id="9" name="Shape 7"/>
+          <p:cNvSpPr/>
+          <p:nvPr/>
+        </p:nvSpPr>
+        <p:spPr>
+          <a:xfrm>
+            <a:off x="3291840" y="1188720"/>
+            <a:ext cx="2560320" cy="1828800"/>
+          </a:xfrm>
+          <a:prstGeom prst="rect">
+            <a:avLst/>
+          </a:prstGeom>
+          <a:solidFill>
+            <a:srgbClr val="FFFFFF"/>
+          </a:solidFill>
+          <a:ln w="12700">
+            <a:solidFill>
+              <a:srgbClr val="E5E2DC"/>
+            </a:solidFill>
+            <a:prstDash val="solid"/>
+          </a:ln>
+          <a:effectLst>
+            <a:outerShdw sx="100000" sy="100000" kx="0" ky="0" algn="bl" rotWithShape="0" blurRad="50800" dist="25400" dir="8100000">
+              <a:srgbClr val="000000">
+                <a:alpha val="10000"/>
+              </a:srgbClr>
+            </a:outerShdw>
+          </a:effectLst>
+        </p:spPr>
+      </p:sp>
+      <p:sp>
+        <p:nvSpPr>
+          <p:cNvPr id="10" name="Shape 8"/>
+          <p:cNvSpPr/>
+          <p:nvPr/>
+        </p:nvSpPr>
+        <p:spPr>
+          <a:xfrm>
+            <a:off x="3291840" y="1188720"/>
+            <a:ext cx="2560320" cy="54864"/>
+          </a:xfrm>
+          <a:prstGeom prst="rect">
+            <a:avLst/>
+          </a:prstGeom>
+          <a:solidFill>
+            <a:srgbClr val="2A9D8F"/>
+          </a:solidFill>
+          <a:ln/>
+        </p:spPr>
+      </p:sp>
+      <p:sp>
+        <p:nvSpPr>
+          <p:cNvPr id="11" name="Text 9"/>
+          <p:cNvSpPr/>
+          <p:nvPr/>
+        </p:nvSpPr>
+        <p:spPr>
+          <a:xfrm>
+            <a:off x="3429000" y="1325880"/>
+            <a:ext cx="2286000" cy="365760"/>
+          </a:xfrm>
+          <a:prstGeom prst="rect">
+            <a:avLst/>
+          </a:prstGeom>
+          <a:noFill/>
+          <a:ln/>
+        </p:spPr>
+        <p:txBody>
+          <a:bodyPr wrap="square" rtlCol="0" anchor="ctr"/>
+          <a:lstStyle/>
+          <a:p>
+            <a:pPr indent="0" marL="0">
+              <a:buNone/>
             </a:pPr>
             <a:r>
-              <a:rPr lang="en-US" sz="1500" dirty="0">
+              <a:rPr lang="en-US" sz="1400" b="1" dirty="0">
+                <a:solidFill>
+                  <a:srgbClr val="1B2A4A"/>
+                </a:solidFill>
+                <a:latin typeface="Calibri" pitchFamily="34" charset="0"/>
+                <a:ea typeface="Calibri" pitchFamily="34" charset="-122"/>
+                <a:cs typeface="Calibri" pitchFamily="34" charset="-120"/>
+              </a:rPr>
+              <a:t>Earthquakes</a:t>
+            </a:r>
+            <a:endParaRPr lang="en-US" sz="1400" dirty="0"/>
+          </a:p>
+        </p:txBody>
+      </p:sp>
+      <p:sp>
+        <p:nvSpPr>
+          <p:cNvPr id="12" name="Text 10"/>
+          <p:cNvSpPr/>
+          <p:nvPr/>
+        </p:nvSpPr>
+        <p:spPr>
+          <a:xfrm>
+            <a:off x="3429000" y="1737360"/>
+            <a:ext cx="2286000" cy="1097280"/>
+          </a:xfrm>
+          <a:prstGeom prst="rect">
+            <a:avLst/>
+          </a:prstGeom>
+          <a:noFill/>
+          <a:ln/>
+        </p:spPr>
+        <p:txBody>
+          <a:bodyPr wrap="square" rtlCol="0" anchor="t"/>
+          <a:lstStyle/>
+          <a:p>
+            <a:pPr indent="0" marL="0">
+              <a:buNone/>
+            </a:pPr>
+            <a:r>
+              <a:rPr lang="en-US" sz="1100" dirty="0">
                 <a:solidFill>
                   <a:srgbClr val="3D3A36"/>
                 </a:solidFill>
@@ -2004,20 +2814,129 @@
                 <a:ea typeface="Calibri" pitchFamily="34" charset="-122"/>
                 <a:cs typeface="Calibri" pitchFamily="34" charset="-120"/>
               </a:rPr>
-              <a:t>Evidence: matching fossils, rocks, coastlines, climate clues</a:t>
-            </a:r>
-            <a:endParaRPr lang="en-US" sz="1500" dirty="0"/>
-          </a:p>
-          <a:p>
-            <a:pPr marL="342900" indent="-342900">
-              <a:spcAft>
-                <a:spcPts val="800"/>
-              </a:spcAft>
-              <a:buSzPct val="100000"/>
-              <a:buChar char="•"/>
+              <a:t>Friction → pressure → seismic waves. Focus (underground) vs epicentre (surface). Richter scale. Ring of Fire: 90% of earthquakes.</a:t>
+            </a:r>
+            <a:endParaRPr lang="en-US" sz="1100" dirty="0"/>
+          </a:p>
+        </p:txBody>
+      </p:sp>
+      <p:sp>
+        <p:nvSpPr>
+          <p:cNvPr id="13" name="Shape 11"/>
+          <p:cNvSpPr/>
+          <p:nvPr/>
+        </p:nvSpPr>
+        <p:spPr>
+          <a:xfrm>
+            <a:off x="6126480" y="1188720"/>
+            <a:ext cx="2560320" cy="1828800"/>
+          </a:xfrm>
+          <a:prstGeom prst="rect">
+            <a:avLst/>
+          </a:prstGeom>
+          <a:solidFill>
+            <a:srgbClr val="FFFFFF"/>
+          </a:solidFill>
+          <a:ln w="12700">
+            <a:solidFill>
+              <a:srgbClr val="E5E2DC"/>
+            </a:solidFill>
+            <a:prstDash val="solid"/>
+          </a:ln>
+          <a:effectLst>
+            <a:outerShdw sx="100000" sy="100000" kx="0" ky="0" algn="bl" rotWithShape="0" blurRad="50800" dist="25400" dir="8100000">
+              <a:srgbClr val="000000">
+                <a:alpha val="10000"/>
+              </a:srgbClr>
+            </a:outerShdw>
+          </a:effectLst>
+        </p:spPr>
+      </p:sp>
+      <p:sp>
+        <p:nvSpPr>
+          <p:cNvPr id="14" name="Shape 12"/>
+          <p:cNvSpPr/>
+          <p:nvPr/>
+        </p:nvSpPr>
+        <p:spPr>
+          <a:xfrm>
+            <a:off x="6126480" y="1188720"/>
+            <a:ext cx="2560320" cy="54864"/>
+          </a:xfrm>
+          <a:prstGeom prst="rect">
+            <a:avLst/>
+          </a:prstGeom>
+          <a:solidFill>
+            <a:srgbClr val="2A9D8F"/>
+          </a:solidFill>
+          <a:ln/>
+        </p:spPr>
+      </p:sp>
+      <p:sp>
+        <p:nvSpPr>
+          <p:cNvPr id="15" name="Text 13"/>
+          <p:cNvSpPr/>
+          <p:nvPr/>
+        </p:nvSpPr>
+        <p:spPr>
+          <a:xfrm>
+            <a:off x="6263640" y="1325880"/>
+            <a:ext cx="2286000" cy="365760"/>
+          </a:xfrm>
+          <a:prstGeom prst="rect">
+            <a:avLst/>
+          </a:prstGeom>
+          <a:noFill/>
+          <a:ln/>
+        </p:spPr>
+        <p:txBody>
+          <a:bodyPr wrap="square" rtlCol="0" anchor="ctr"/>
+          <a:lstStyle/>
+          <a:p>
+            <a:pPr indent="0" marL="0">
+              <a:buNone/>
             </a:pPr>
             <a:r>
-              <a:rPr lang="en-US" sz="1500" dirty="0">
+              <a:rPr lang="en-US" sz="1400" b="1" dirty="0">
+                <a:solidFill>
+                  <a:srgbClr val="1B2A4A"/>
+                </a:solidFill>
+                <a:latin typeface="Calibri" pitchFamily="34" charset="0"/>
+                <a:ea typeface="Calibri" pitchFamily="34" charset="-122"/>
+                <a:cs typeface="Calibri" pitchFamily="34" charset="-120"/>
+              </a:rPr>
+              <a:t>Volcanoes</a:t>
+            </a:r>
+            <a:endParaRPr lang="en-US" sz="1400" dirty="0"/>
+          </a:p>
+        </p:txBody>
+      </p:sp>
+      <p:sp>
+        <p:nvSpPr>
+          <p:cNvPr id="16" name="Text 14"/>
+          <p:cNvSpPr/>
+          <p:nvPr/>
+        </p:nvSpPr>
+        <p:spPr>
+          <a:xfrm>
+            <a:off x="6263640" y="1737360"/>
+            <a:ext cx="2286000" cy="1097280"/>
+          </a:xfrm>
+          <a:prstGeom prst="rect">
+            <a:avLst/>
+          </a:prstGeom>
+          <a:noFill/>
+          <a:ln/>
+        </p:spPr>
+        <p:txBody>
+          <a:bodyPr wrap="square" rtlCol="0" anchor="t"/>
+          <a:lstStyle/>
+          <a:p>
+            <a:pPr indent="0" marL="0">
+              <a:buNone/>
+            </a:pPr>
+            <a:r>
+              <a:rPr lang="en-US" sz="1100" dirty="0">
                 <a:solidFill>
                   <a:srgbClr val="3D3A36"/>
                 </a:solidFill>
@@ -2025,66 +2944,9 @@
                 <a:ea typeface="Calibri" pitchFamily="34" charset="-122"/>
                 <a:cs typeface="Calibri" pitchFamily="34" charset="-120"/>
               </a:rPr>
-              <a:t>Initially rejected (no mechanism) → convection currents explained it</a:t>
-            </a:r>
-            <a:endParaRPr lang="en-US" sz="1500" dirty="0"/>
-          </a:p>
-          <a:p>
-            <a:pPr marL="342900" indent="-342900">
-              <a:spcAft>
-                <a:spcPts val="800"/>
-              </a:spcAft>
-              <a:buSzPct val="100000"/>
-              <a:buChar char="•"/>
-            </a:pPr>
-            <a:r>
-              <a:rPr lang="en-US" sz="1500" dirty="0">
-                <a:solidFill>
-                  <a:srgbClr val="3D3A36"/>
-                </a:solidFill>
-                <a:latin typeface="Calibri" pitchFamily="34" charset="0"/>
-                <a:ea typeface="Calibri" pitchFamily="34" charset="-122"/>
-                <a:cs typeface="Calibri" pitchFamily="34" charset="-120"/>
-              </a:rPr>
-              <a:t>Plates move a few centimetres per year — very slow but powerful</a:t>
-            </a:r>
-            <a:endParaRPr lang="en-US" sz="1500" dirty="0"/>
-          </a:p>
-        </p:txBody>
-      </p:sp>
-      <p:sp>
-        <p:nvSpPr>
-          <p:cNvPr id="5" name="Text 3"/>
-          <p:cNvSpPr/>
-          <p:nvPr/>
-        </p:nvSpPr>
-        <p:spPr>
-          <a:xfrm>
-            <a:off x="548640" y="4800600"/>
-            <a:ext cx="3657600" cy="274320"/>
-          </a:xfrm>
-          <a:prstGeom prst="rect">
-            <a:avLst/>
-          </a:prstGeom>
-          <a:noFill/>
-          <a:ln/>
-        </p:spPr>
-        <p:txBody>
-          <a:bodyPr wrap="square" rtlCol="0" anchor="ctr"/>
-          <a:lstStyle/>
-          <a:p>
-            <a:pPr indent="0" marL="0">
-              <a:buNone/>
-            </a:pPr>
-            <a:r>
-              <a:rPr lang="en-US" sz="800" dirty="0">
-                <a:solidFill>
-                  <a:srgbClr val="9B9690"/>
-                </a:solidFill>
-              </a:rPr>
-              <a:t>mrzocchi.com</a:t>
-            </a:r>
-            <a:endParaRPr lang="en-US" sz="800" dirty="0"/>
+              <a:t>Convergent, divergent, hotspots. Explosive (thick lava) vs effusive (thin lava). Benefits: fertile soil, geothermal energy, minerals.</a:t>
+            </a:r>
+            <a:endParaRPr lang="en-US" sz="1100" dirty="0"/>
           </a:p>
         </p:txBody>
       </p:sp>
@@ -2129,13 +2991,13 @@
         <p:spPr>
           <a:xfrm>
             <a:off x="0" y="0"/>
-            <a:ext cx="9144000" cy="54864"/>
-          </a:xfrm>
-          <a:prstGeom prst="rect">
-            <a:avLst/>
-          </a:prstGeom>
-          <a:solidFill>
-            <a:srgbClr val="2A9D8F"/>
+            <a:ext cx="109728" cy="5143500"/>
+          </a:xfrm>
+          <a:prstGeom prst="rect">
+            <a:avLst/>
+          </a:prstGeom>
+          <a:solidFill>
+            <a:srgbClr val="E9C46A"/>
           </a:solidFill>
           <a:ln/>
         </p:spPr>
@@ -2148,8 +3010,8 @@
         </p:nvSpPr>
         <p:spPr>
           <a:xfrm>
-            <a:off x="548640" y="457200"/>
-            <a:ext cx="8046720" cy="640080"/>
+            <a:off x="731520" y="457200"/>
+            <a:ext cx="7772400" cy="731520"/>
           </a:xfrm>
           <a:prstGeom prst="rect">
             <a:avLst/>
@@ -2165,7 +3027,7 @@
               <a:buNone/>
             </a:pPr>
             <a:r>
-              <a:rPr lang="en-US" sz="2800" b="1" dirty="0">
+              <a:rPr lang="en-US" sz="3200" b="1" dirty="0">
                 <a:solidFill>
                   <a:srgbClr val="FFFFFF"/>
                 </a:solidFill>
@@ -2175,7 +3037,7 @@
               </a:rPr>
               <a:t>Key Takeaways</a:t>
             </a:r>
-            <a:endParaRPr lang="en-US" sz="2800" dirty="0"/>
+            <a:endParaRPr lang="en-US" sz="3200" dirty="0"/>
           </a:p>
         </p:txBody>
       </p:sp>
@@ -2187,8 +3049,8 @@
         </p:nvSpPr>
         <p:spPr>
           <a:xfrm>
-            <a:off x="731520" y="1371600"/>
-            <a:ext cx="7680960" cy="3200400"/>
+            <a:off x="731520" y="1463040"/>
+            <a:ext cx="7772400" cy="3200400"/>
           </a:xfrm>
           <a:prstGeom prst="rect">
             <a:avLst/>
@@ -2208,7 +3070,7 @@
               <a:buChar char="•"/>
             </a:pPr>
             <a:r>
-              <a:rPr lang="en-US" sz="1600" dirty="0">
+              <a:rPr lang="en-US" sz="1500" dirty="0">
                 <a:solidFill>
                   <a:srgbClr val="CADCFC"/>
                 </a:solidFill>
@@ -2216,9 +3078,9 @@
                 <a:ea typeface="Calibri" pitchFamily="34" charset="-122"/>
                 <a:cs typeface="Calibri" pitchFamily="34" charset="-120"/>
               </a:rPr>
-              <a:t>Earth = 4 layers with increasing temperature and pressure</a:t>
-            </a:r>
-            <a:endParaRPr lang="en-US" sz="1600" dirty="0"/>
+              <a:t>Layers: crust, mantle, outer core (liquid), inner core (solid)</a:t>
+            </a:r>
+            <a:endParaRPr lang="en-US" sz="1500" dirty="0"/>
           </a:p>
           <a:p>
             <a:pPr marL="342900" indent="-342900">
@@ -2229,7 +3091,7 @@
               <a:buChar char="•"/>
             </a:pPr>
             <a:r>
-              <a:rPr lang="en-US" sz="1600" dirty="0">
+              <a:rPr lang="en-US" sz="1500" dirty="0">
                 <a:solidFill>
                   <a:srgbClr val="CADCFC"/>
                 </a:solidFill>
@@ -2237,9 +3099,9 @@
                 <a:ea typeface="Calibri" pitchFamily="34" charset="-122"/>
                 <a:cs typeface="Calibri" pitchFamily="34" charset="-120"/>
               </a:rPr>
-              <a:t>Convection currents drive plate tectonics</a:t>
-            </a:r>
-            <a:endParaRPr lang="en-US" sz="1600" dirty="0"/>
+              <a:t>Convection drives plates: hot rises, cools, sinks</a:t>
+            </a:r>
+            <a:endParaRPr lang="en-US" sz="1500" dirty="0"/>
           </a:p>
           <a:p>
             <a:pPr marL="342900" indent="-342900">
@@ -2250,7 +3112,7 @@
               <a:buChar char="•"/>
             </a:pPr>
             <a:r>
-              <a:rPr lang="en-US" sz="1600" dirty="0">
+              <a:rPr lang="en-US" sz="1500" dirty="0">
                 <a:solidFill>
                   <a:srgbClr val="CADCFC"/>
                 </a:solidFill>
@@ -2258,9 +3120,9 @@
                 <a:ea typeface="Calibri" pitchFamily="34" charset="-122"/>
                 <a:cs typeface="Calibri" pitchFamily="34" charset="-120"/>
               </a:rPr>
-              <a:t>Three boundary types cause earthquakes and volcanoes</a:t>
-            </a:r>
-            <a:endParaRPr lang="en-US" sz="1600" dirty="0"/>
+              <a:t>Three boundaries: divergent (apart), convergent (together), transform (sideways)</a:t>
+            </a:r>
+            <a:endParaRPr lang="en-US" sz="1500" dirty="0"/>
           </a:p>
           <a:p>
             <a:pPr marL="342900" indent="-342900">
@@ -2271,7 +3133,7 @@
               <a:buChar char="•"/>
             </a:pPr>
             <a:r>
-              <a:rPr lang="en-US" sz="1600" dirty="0">
+              <a:rPr lang="en-US" sz="1500" dirty="0">
                 <a:solidFill>
                   <a:srgbClr val="CADCFC"/>
                 </a:solidFill>
@@ -2279,9 +3141,30 @@
                 <a:ea typeface="Calibri" pitchFamily="34" charset="-122"/>
                 <a:cs typeface="Calibri" pitchFamily="34" charset="-120"/>
               </a:rPr>
-              <a:t>Continental drift evidence: fossils, rocks, coastlines, climate</a:t>
-            </a:r>
-            <a:endParaRPr lang="en-US" sz="1600" dirty="0"/>
+              <a:t>Wegener's evidence: jigsaw fit, fossils, rocks — accepted with sea-floor spreading</a:t>
+            </a:r>
+            <a:endParaRPr lang="en-US" sz="1500" dirty="0"/>
+          </a:p>
+          <a:p>
+            <a:pPr marL="342900" indent="-342900">
+              <a:spcAft>
+                <a:spcPts val="1000"/>
+              </a:spcAft>
+              <a:buSzPct val="100000"/>
+              <a:buChar char="•"/>
+            </a:pPr>
+            <a:r>
+              <a:rPr lang="en-US" sz="1500" dirty="0">
+                <a:solidFill>
+                  <a:srgbClr val="CADCFC"/>
+                </a:solidFill>
+                <a:latin typeface="Calibri" pitchFamily="34" charset="0"/>
+                <a:ea typeface="Calibri" pitchFamily="34" charset="-122"/>
+                <a:cs typeface="Calibri" pitchFamily="34" charset="-120"/>
+              </a:rPr>
+              <a:t>Ring of Fire: 75% volcanoes, 90% earthquakes around Pacific</a:t>
+            </a:r>
+            <a:endParaRPr lang="en-US" sz="1500" dirty="0"/>
           </a:p>
         </p:txBody>
       </p:sp>
@@ -2293,8 +3176,8 @@
         </p:nvSpPr>
         <p:spPr>
           <a:xfrm>
-            <a:off x="548640" y="4572000"/>
-            <a:ext cx="3657600" cy="274320"/>
+            <a:off x="731520" y="4572000"/>
+            <a:ext cx="7772400" cy="365760"/>
           </a:xfrm>
           <a:prstGeom prst="rect">
             <a:avLst/>
@@ -2310,14 +3193,17 @@
               <a:buNone/>
             </a:pPr>
             <a:r>
-              <a:rPr lang="en-US" sz="1000" dirty="0">
+              <a:rPr lang="en-US" sz="1100" dirty="0">
                 <a:solidFill>
-                  <a:srgbClr val="6B6660"/>
+                  <a:srgbClr val="E9C46A"/>
                 </a:solidFill>
+                <a:latin typeface="Calibri" pitchFamily="34" charset="0"/>
+                <a:ea typeface="Calibri" pitchFamily="34" charset="-122"/>
+                <a:cs typeface="Calibri" pitchFamily="34" charset="-120"/>
               </a:rPr>
               <a:t>mrzocchi.com</a:t>
             </a:r>
-            <a:endParaRPr lang="en-US" sz="1000" dirty="0"/>
+            <a:endParaRPr lang="en-US" sz="1100" dirty="0"/>
           </a:p>
         </p:txBody>
       </p:sp>

--- a/static/ppts/G6_Sci_Full_Revision.pptx
+++ b/static/ppts/G6_Sci_Full_Revision.pptx
@@ -10,9 +10,14 @@
     <p:sldId id="258" r:id="rId4"/>
     <p:sldId id="259" r:id="rId5"/>
     <p:sldId id="260" r:id="rId6"/>
+    <p:sldId id="261" r:id="rId7"/>
+    <p:sldId id="262" r:id="rId8"/>
+    <p:sldId id="263" r:id="rId9"/>
+    <p:sldId id="264" r:id="rId10"/>
+    <p:sldId id="265" r:id="rId11"/>
   </p:sldIdLst>
   <p:notesMasterIdLst>
-    <p:notesMasterId r:id="rId7"/>
+    <p:notesMasterId r:id="rId12"/>
   </p:notesMasterIdLst>
   <p:sldSz cx="9144000" cy="5143500"/>
   <p:notesSz cx="5143500" cy="9144000"/>
@@ -548,6 +553,94 @@
 </p:notes>
 </file>
 
+<file path=ppt/notesSlides/notesSlide10.xml><?xml version="1.0" encoding="utf-8"?>
+<p:notes xmlns:a="http://schemas.openxmlformats.org/drawingml/2006/main" xmlns:r="http://schemas.openxmlformats.org/officeDocument/2006/relationships" xmlns:p="http://schemas.openxmlformats.org/presentationml/2006/main">
+  <p:cSld>
+    <p:spTree>
+      <p:nvGrpSpPr>
+        <p:cNvPr id="1" name=""/>
+        <p:cNvGrpSpPr/>
+        <p:nvPr/>
+      </p:nvGrpSpPr>
+      <p:grpSpPr>
+        <a:xfrm>
+          <a:off x="0" y="0"/>
+          <a:ext cx="0" cy="0"/>
+          <a:chOff x="0" y="0"/>
+          <a:chExt cx="0" cy="0"/>
+        </a:xfrm>
+      </p:grpSpPr>
+      <p:sp>
+        <p:nvSpPr>
+          <p:cNvPr id="2" name="Slide Image Placeholder 1"/>
+          <p:cNvSpPr>
+            <a:spLocks noGrp="1" noRot="1" noChangeAspect="1"/>
+          </p:cNvSpPr>
+          <p:nvPr>
+            <p:ph type="sldImg"/>
+          </p:nvPr>
+        </p:nvSpPr>
+        <p:spPr/>
+      </p:sp>
+      <p:sp>
+        <p:nvSpPr>
+          <p:cNvPr id="3" name="Notes Placeholder 2"/>
+          <p:cNvSpPr>
+            <a:spLocks noGrp="1"/>
+          </p:cNvSpPr>
+          <p:nvPr>
+            <p:ph type="body" idx="1"/>
+          </p:nvPr>
+        </p:nvSpPr>
+        <p:spPr/>
+        <p:txBody>
+          <a:bodyPr/>
+          <a:lstStyle/>
+          <a:p>
+            <a:r>
+              <a:rPr lang="en-US" dirty="0"/>
+              <a:t/>
+            </a:r>
+            <a:endParaRPr lang="en-US" dirty="0"/>
+          </a:p>
+        </p:txBody>
+      </p:sp>
+      <p:sp>
+        <p:nvSpPr>
+          <p:cNvPr id="4" name="Slide Number Placeholder 3"/>
+          <p:cNvSpPr>
+            <a:spLocks noGrp="1"/>
+          </p:cNvSpPr>
+          <p:nvPr>
+            <p:ph type="sldNum" sz="quarter" idx="10"/>
+          </p:nvPr>
+        </p:nvSpPr>
+        <p:spPr/>
+        <p:txBody>
+          <a:bodyPr/>
+          <a:lstStyle/>
+          <a:p>
+            <a:fld id="{F7021451-1387-4CA6-816F-3879F97B5CBC}" type="slidenum">
+              <a:rPr lang="en-US"/>
+              <a:t>10</a:t>
+            </a:fld>
+            <a:endParaRPr lang="en-US"/>
+          </a:p>
+        </p:txBody>
+      </p:sp>
+    </p:spTree>
+    <p:extLst>
+      <p:ext uri="{BB962C8B-B14F-4D97-AF65-F5344CB8AC3E}">
+        <p14:creationId xmlns:p14="http://schemas.microsoft.com/office/powerpoint/2010/main" val="1024086991"/>
+      </p:ext>
+    </p:extLst>
+  </p:cSld>
+  <p:clrMapOvr>
+    <a:masterClrMapping/>
+  </p:clrMapOvr>
+</p:notes>
+</file>
+
 <file path=ppt/notesSlides/notesSlide2.xml><?xml version="1.0" encoding="utf-8"?>
 <p:notes xmlns:a="http://schemas.openxmlformats.org/drawingml/2006/main" xmlns:r="http://schemas.openxmlformats.org/officeDocument/2006/relationships" xmlns:p="http://schemas.openxmlformats.org/presentationml/2006/main">
   <p:cSld>
@@ -882,6 +975,358 @@
             <a:fld id="{F7021451-1387-4CA6-816F-3879F97B5CBC}" type="slidenum">
               <a:rPr lang="en-US"/>
               <a:t>5</a:t>
+            </a:fld>
+            <a:endParaRPr lang="en-US"/>
+          </a:p>
+        </p:txBody>
+      </p:sp>
+    </p:spTree>
+    <p:extLst>
+      <p:ext uri="{BB962C8B-B14F-4D97-AF65-F5344CB8AC3E}">
+        <p14:creationId xmlns:p14="http://schemas.microsoft.com/office/powerpoint/2010/main" val="1024086991"/>
+      </p:ext>
+    </p:extLst>
+  </p:cSld>
+  <p:clrMapOvr>
+    <a:masterClrMapping/>
+  </p:clrMapOvr>
+</p:notes>
+</file>
+
+<file path=ppt/notesSlides/notesSlide6.xml><?xml version="1.0" encoding="utf-8"?>
+<p:notes xmlns:a="http://schemas.openxmlformats.org/drawingml/2006/main" xmlns:r="http://schemas.openxmlformats.org/officeDocument/2006/relationships" xmlns:p="http://schemas.openxmlformats.org/presentationml/2006/main">
+  <p:cSld>
+    <p:spTree>
+      <p:nvGrpSpPr>
+        <p:cNvPr id="1" name=""/>
+        <p:cNvGrpSpPr/>
+        <p:nvPr/>
+      </p:nvGrpSpPr>
+      <p:grpSpPr>
+        <a:xfrm>
+          <a:off x="0" y="0"/>
+          <a:ext cx="0" cy="0"/>
+          <a:chOff x="0" y="0"/>
+          <a:chExt cx="0" cy="0"/>
+        </a:xfrm>
+      </p:grpSpPr>
+      <p:sp>
+        <p:nvSpPr>
+          <p:cNvPr id="2" name="Slide Image Placeholder 1"/>
+          <p:cNvSpPr>
+            <a:spLocks noGrp="1" noRot="1" noChangeAspect="1"/>
+          </p:cNvSpPr>
+          <p:nvPr>
+            <p:ph type="sldImg"/>
+          </p:nvPr>
+        </p:nvSpPr>
+        <p:spPr/>
+      </p:sp>
+      <p:sp>
+        <p:nvSpPr>
+          <p:cNvPr id="3" name="Notes Placeholder 2"/>
+          <p:cNvSpPr>
+            <a:spLocks noGrp="1"/>
+          </p:cNvSpPr>
+          <p:nvPr>
+            <p:ph type="body" idx="1"/>
+          </p:nvPr>
+        </p:nvSpPr>
+        <p:spPr/>
+        <p:txBody>
+          <a:bodyPr/>
+          <a:lstStyle/>
+          <a:p>
+            <a:r>
+              <a:rPr lang="en-US" dirty="0"/>
+              <a:t/>
+            </a:r>
+            <a:endParaRPr lang="en-US" dirty="0"/>
+          </a:p>
+        </p:txBody>
+      </p:sp>
+      <p:sp>
+        <p:nvSpPr>
+          <p:cNvPr id="4" name="Slide Number Placeholder 3"/>
+          <p:cNvSpPr>
+            <a:spLocks noGrp="1"/>
+          </p:cNvSpPr>
+          <p:nvPr>
+            <p:ph type="sldNum" sz="quarter" idx="10"/>
+          </p:nvPr>
+        </p:nvSpPr>
+        <p:spPr/>
+        <p:txBody>
+          <a:bodyPr/>
+          <a:lstStyle/>
+          <a:p>
+            <a:fld id="{F7021451-1387-4CA6-816F-3879F97B5CBC}" type="slidenum">
+              <a:rPr lang="en-US"/>
+              <a:t>6</a:t>
+            </a:fld>
+            <a:endParaRPr lang="en-US"/>
+          </a:p>
+        </p:txBody>
+      </p:sp>
+    </p:spTree>
+    <p:extLst>
+      <p:ext uri="{BB962C8B-B14F-4D97-AF65-F5344CB8AC3E}">
+        <p14:creationId xmlns:p14="http://schemas.microsoft.com/office/powerpoint/2010/main" val="1024086991"/>
+      </p:ext>
+    </p:extLst>
+  </p:cSld>
+  <p:clrMapOvr>
+    <a:masterClrMapping/>
+  </p:clrMapOvr>
+</p:notes>
+</file>
+
+<file path=ppt/notesSlides/notesSlide7.xml><?xml version="1.0" encoding="utf-8"?>
+<p:notes xmlns:a="http://schemas.openxmlformats.org/drawingml/2006/main" xmlns:r="http://schemas.openxmlformats.org/officeDocument/2006/relationships" xmlns:p="http://schemas.openxmlformats.org/presentationml/2006/main">
+  <p:cSld>
+    <p:spTree>
+      <p:nvGrpSpPr>
+        <p:cNvPr id="1" name=""/>
+        <p:cNvGrpSpPr/>
+        <p:nvPr/>
+      </p:nvGrpSpPr>
+      <p:grpSpPr>
+        <a:xfrm>
+          <a:off x="0" y="0"/>
+          <a:ext cx="0" cy="0"/>
+          <a:chOff x="0" y="0"/>
+          <a:chExt cx="0" cy="0"/>
+        </a:xfrm>
+      </p:grpSpPr>
+      <p:sp>
+        <p:nvSpPr>
+          <p:cNvPr id="2" name="Slide Image Placeholder 1"/>
+          <p:cNvSpPr>
+            <a:spLocks noGrp="1" noRot="1" noChangeAspect="1"/>
+          </p:cNvSpPr>
+          <p:nvPr>
+            <p:ph type="sldImg"/>
+          </p:nvPr>
+        </p:nvSpPr>
+        <p:spPr/>
+      </p:sp>
+      <p:sp>
+        <p:nvSpPr>
+          <p:cNvPr id="3" name="Notes Placeholder 2"/>
+          <p:cNvSpPr>
+            <a:spLocks noGrp="1"/>
+          </p:cNvSpPr>
+          <p:nvPr>
+            <p:ph type="body" idx="1"/>
+          </p:nvPr>
+        </p:nvSpPr>
+        <p:spPr/>
+        <p:txBody>
+          <a:bodyPr/>
+          <a:lstStyle/>
+          <a:p>
+            <a:r>
+              <a:rPr lang="en-US" dirty="0"/>
+              <a:t/>
+            </a:r>
+            <a:endParaRPr lang="en-US" dirty="0"/>
+          </a:p>
+        </p:txBody>
+      </p:sp>
+      <p:sp>
+        <p:nvSpPr>
+          <p:cNvPr id="4" name="Slide Number Placeholder 3"/>
+          <p:cNvSpPr>
+            <a:spLocks noGrp="1"/>
+          </p:cNvSpPr>
+          <p:nvPr>
+            <p:ph type="sldNum" sz="quarter" idx="10"/>
+          </p:nvPr>
+        </p:nvSpPr>
+        <p:spPr/>
+        <p:txBody>
+          <a:bodyPr/>
+          <a:lstStyle/>
+          <a:p>
+            <a:fld id="{F7021451-1387-4CA6-816F-3879F97B5CBC}" type="slidenum">
+              <a:rPr lang="en-US"/>
+              <a:t>7</a:t>
+            </a:fld>
+            <a:endParaRPr lang="en-US"/>
+          </a:p>
+        </p:txBody>
+      </p:sp>
+    </p:spTree>
+    <p:extLst>
+      <p:ext uri="{BB962C8B-B14F-4D97-AF65-F5344CB8AC3E}">
+        <p14:creationId xmlns:p14="http://schemas.microsoft.com/office/powerpoint/2010/main" val="1024086991"/>
+      </p:ext>
+    </p:extLst>
+  </p:cSld>
+  <p:clrMapOvr>
+    <a:masterClrMapping/>
+  </p:clrMapOvr>
+</p:notes>
+</file>
+
+<file path=ppt/notesSlides/notesSlide8.xml><?xml version="1.0" encoding="utf-8"?>
+<p:notes xmlns:a="http://schemas.openxmlformats.org/drawingml/2006/main" xmlns:r="http://schemas.openxmlformats.org/officeDocument/2006/relationships" xmlns:p="http://schemas.openxmlformats.org/presentationml/2006/main">
+  <p:cSld>
+    <p:spTree>
+      <p:nvGrpSpPr>
+        <p:cNvPr id="1" name=""/>
+        <p:cNvGrpSpPr/>
+        <p:nvPr/>
+      </p:nvGrpSpPr>
+      <p:grpSpPr>
+        <a:xfrm>
+          <a:off x="0" y="0"/>
+          <a:ext cx="0" cy="0"/>
+          <a:chOff x="0" y="0"/>
+          <a:chExt cx="0" cy="0"/>
+        </a:xfrm>
+      </p:grpSpPr>
+      <p:sp>
+        <p:nvSpPr>
+          <p:cNvPr id="2" name="Slide Image Placeholder 1"/>
+          <p:cNvSpPr>
+            <a:spLocks noGrp="1" noRot="1" noChangeAspect="1"/>
+          </p:cNvSpPr>
+          <p:nvPr>
+            <p:ph type="sldImg"/>
+          </p:nvPr>
+        </p:nvSpPr>
+        <p:spPr/>
+      </p:sp>
+      <p:sp>
+        <p:nvSpPr>
+          <p:cNvPr id="3" name="Notes Placeholder 2"/>
+          <p:cNvSpPr>
+            <a:spLocks noGrp="1"/>
+          </p:cNvSpPr>
+          <p:nvPr>
+            <p:ph type="body" idx="1"/>
+          </p:nvPr>
+        </p:nvSpPr>
+        <p:spPr/>
+        <p:txBody>
+          <a:bodyPr/>
+          <a:lstStyle/>
+          <a:p>
+            <a:r>
+              <a:rPr lang="en-US" dirty="0"/>
+              <a:t/>
+            </a:r>
+            <a:endParaRPr lang="en-US" dirty="0"/>
+          </a:p>
+        </p:txBody>
+      </p:sp>
+      <p:sp>
+        <p:nvSpPr>
+          <p:cNvPr id="4" name="Slide Number Placeholder 3"/>
+          <p:cNvSpPr>
+            <a:spLocks noGrp="1"/>
+          </p:cNvSpPr>
+          <p:nvPr>
+            <p:ph type="sldNum" sz="quarter" idx="10"/>
+          </p:nvPr>
+        </p:nvSpPr>
+        <p:spPr/>
+        <p:txBody>
+          <a:bodyPr/>
+          <a:lstStyle/>
+          <a:p>
+            <a:fld id="{F7021451-1387-4CA6-816F-3879F97B5CBC}" type="slidenum">
+              <a:rPr lang="en-US"/>
+              <a:t>8</a:t>
+            </a:fld>
+            <a:endParaRPr lang="en-US"/>
+          </a:p>
+        </p:txBody>
+      </p:sp>
+    </p:spTree>
+    <p:extLst>
+      <p:ext uri="{BB962C8B-B14F-4D97-AF65-F5344CB8AC3E}">
+        <p14:creationId xmlns:p14="http://schemas.microsoft.com/office/powerpoint/2010/main" val="1024086991"/>
+      </p:ext>
+    </p:extLst>
+  </p:cSld>
+  <p:clrMapOvr>
+    <a:masterClrMapping/>
+  </p:clrMapOvr>
+</p:notes>
+</file>
+
+<file path=ppt/notesSlides/notesSlide9.xml><?xml version="1.0" encoding="utf-8"?>
+<p:notes xmlns:a="http://schemas.openxmlformats.org/drawingml/2006/main" xmlns:r="http://schemas.openxmlformats.org/officeDocument/2006/relationships" xmlns:p="http://schemas.openxmlformats.org/presentationml/2006/main">
+  <p:cSld>
+    <p:spTree>
+      <p:nvGrpSpPr>
+        <p:cNvPr id="1" name=""/>
+        <p:cNvGrpSpPr/>
+        <p:nvPr/>
+      </p:nvGrpSpPr>
+      <p:grpSpPr>
+        <a:xfrm>
+          <a:off x="0" y="0"/>
+          <a:ext cx="0" cy="0"/>
+          <a:chOff x="0" y="0"/>
+          <a:chExt cx="0" cy="0"/>
+        </a:xfrm>
+      </p:grpSpPr>
+      <p:sp>
+        <p:nvSpPr>
+          <p:cNvPr id="2" name="Slide Image Placeholder 1"/>
+          <p:cNvSpPr>
+            <a:spLocks noGrp="1" noRot="1" noChangeAspect="1"/>
+          </p:cNvSpPr>
+          <p:nvPr>
+            <p:ph type="sldImg"/>
+          </p:nvPr>
+        </p:nvSpPr>
+        <p:spPr/>
+      </p:sp>
+      <p:sp>
+        <p:nvSpPr>
+          <p:cNvPr id="3" name="Notes Placeholder 2"/>
+          <p:cNvSpPr>
+            <a:spLocks noGrp="1"/>
+          </p:cNvSpPr>
+          <p:nvPr>
+            <p:ph type="body" idx="1"/>
+          </p:nvPr>
+        </p:nvSpPr>
+        <p:spPr/>
+        <p:txBody>
+          <a:bodyPr/>
+          <a:lstStyle/>
+          <a:p>
+            <a:r>
+              <a:rPr lang="en-US" dirty="0"/>
+              <a:t/>
+            </a:r>
+            <a:endParaRPr lang="en-US" dirty="0"/>
+          </a:p>
+        </p:txBody>
+      </p:sp>
+      <p:sp>
+        <p:nvSpPr>
+          <p:cNvPr id="4" name="Slide Number Placeholder 3"/>
+          <p:cNvSpPr>
+            <a:spLocks noGrp="1"/>
+          </p:cNvSpPr>
+          <p:nvPr>
+            <p:ph type="sldNum" sz="quarter" idx="10"/>
+          </p:nvPr>
+        </p:nvSpPr>
+        <p:spPr/>
+        <p:txBody>
+          <a:bodyPr/>
+          <a:lstStyle/>
+          <a:p>
+            <a:fld id="{F7021451-1387-4CA6-816F-3879F97B5CBC}" type="slidenum">
+              <a:rPr lang="en-US"/>
+              <a:t>9</a:t>
             </a:fld>
             <a:endParaRPr lang="en-US"/>
           </a:p>
@@ -1210,13 +1655,6 @@
 <file path=ppt/slides/slide1.xml><?xml version="1.0" encoding="utf-8"?>
 <p:sld xmlns:a="http://schemas.openxmlformats.org/drawingml/2006/main" xmlns:r="http://schemas.openxmlformats.org/officeDocument/2006/relationships" xmlns:p="http://schemas.openxmlformats.org/presentationml/2006/main">
   <p:cSld name="Slide 1">
-    <p:bg>
-      <p:bgPr>
-        <a:solidFill>
-          <a:srgbClr val="1B2A4A"/>
-        </a:solidFill>
-      </p:bgPr>
-    </p:bg>
     <p:spTree>
       <p:nvGrpSpPr>
         <p:cNvPr id="1" name=""/>
@@ -1240,7 +1678,27 @@
         <p:spPr>
           <a:xfrm>
             <a:off x="0" y="0"/>
-            <a:ext cx="109728" cy="5143500"/>
+            <a:ext cx="9144000" cy="5143500"/>
+          </a:xfrm>
+          <a:prstGeom prst="rect">
+            <a:avLst/>
+          </a:prstGeom>
+          <a:solidFill>
+            <a:srgbClr val="1B2A4A"/>
+          </a:solidFill>
+          <a:ln/>
+        </p:spPr>
+      </p:sp>
+      <p:sp>
+        <p:nvSpPr>
+          <p:cNvPr id="3" name="Shape 1"/>
+          <p:cNvSpPr/>
+          <p:nvPr/>
+        </p:nvSpPr>
+        <p:spPr>
+          <a:xfrm>
+            <a:off x="0" y="4777740"/>
+            <a:ext cx="9144000" cy="365760"/>
           </a:xfrm>
           <a:prstGeom prst="rect">
             <a:avLst/>
@@ -1253,14 +1711,14 @@
       </p:sp>
       <p:sp>
         <p:nvSpPr>
-          <p:cNvPr id="3" name="Text 1"/>
+          <p:cNvPr id="4" name="Text 2"/>
           <p:cNvSpPr/>
           <p:nvPr/>
         </p:nvSpPr>
         <p:spPr>
           <a:xfrm>
             <a:off x="731520" y="1097280"/>
-            <a:ext cx="7772400" cy="1371600"/>
+            <a:ext cx="7680960" cy="457200"/>
           </a:xfrm>
           <a:prstGeom prst="rect">
             <a:avLst/>
@@ -1270,6 +1728,45 @@
         </p:spPr>
         <p:txBody>
           <a:bodyPr wrap="square" rtlCol="0" anchor="ctr"/>
+          <a:lstStyle/>
+          <a:p>
+            <a:pPr indent="0" marL="0">
+              <a:buNone/>
+            </a:pPr>
+            <a:r>
+              <a:rPr lang="en-US" sz="1400" b="1" spc="400" kern="0" dirty="0">
+                <a:solidFill>
+                  <a:srgbClr val="2A9D8F"/>
+                </a:solidFill>
+                <a:latin typeface="Calibri" pitchFamily="34" charset="0"/>
+                <a:ea typeface="Calibri" pitchFamily="34" charset="-122"/>
+                <a:cs typeface="Calibri" pitchFamily="34" charset="-120"/>
+              </a:rPr>
+              <a:t>GRADE 6 SCIENCE</a:t>
+            </a:r>
+            <a:endParaRPr lang="en-US" sz="1400" dirty="0"/>
+          </a:p>
+        </p:txBody>
+      </p:sp>
+      <p:sp>
+        <p:nvSpPr>
+          <p:cNvPr id="5" name="Text 3"/>
+          <p:cNvSpPr/>
+          <p:nvPr/>
+        </p:nvSpPr>
+        <p:spPr>
+          <a:xfrm>
+            <a:off x="731520" y="1645920"/>
+            <a:ext cx="7680960" cy="1463040"/>
+          </a:xfrm>
+          <a:prstGeom prst="rect">
+            <a:avLst/>
+          </a:prstGeom>
+          <a:noFill/>
+          <a:ln/>
+        </p:spPr>
+        <p:txBody>
+          <a:bodyPr wrap="square" rtlCol="0" anchor="t"/>
           <a:lstStyle/>
           <a:p>
             <a:pPr indent="0" marL="0">
@@ -1284,22 +1781,39 @@
                 <a:ea typeface="Georgia" pitchFamily="34" charset="-122"/>
                 <a:cs typeface="Georgia" pitchFamily="34" charset="-120"/>
               </a:rPr>
-              <a:t>Earth Science — Full Revision</a:t>
+              <a:t>Earth Science</a:t>
             </a:r>
             <a:endParaRPr lang="en-US" sz="4000" dirty="0"/>
           </a:p>
+          <a:p>
+            <a:pPr indent="0" marL="0">
+              <a:buNone/>
+            </a:pPr>
+            <a:r>
+              <a:rPr lang="en-US" sz="4000" b="1" dirty="0">
+                <a:solidFill>
+                  <a:srgbClr val="FFFFFF"/>
+                </a:solidFill>
+                <a:latin typeface="Georgia" pitchFamily="34" charset="0"/>
+                <a:ea typeface="Georgia" pitchFamily="34" charset="-122"/>
+                <a:cs typeface="Georgia" pitchFamily="34" charset="-120"/>
+              </a:rPr>
+              <a:t>Full Revision</a:t>
+            </a:r>
+            <a:endParaRPr lang="en-US" sz="4000" dirty="0"/>
+          </a:p>
         </p:txBody>
       </p:sp>
       <p:sp>
         <p:nvSpPr>
-          <p:cNvPr id="4" name="Text 2"/>
+          <p:cNvPr id="6" name="Text 4"/>
           <p:cNvSpPr/>
           <p:nvPr/>
         </p:nvSpPr>
         <p:spPr>
           <a:xfrm>
-            <a:off x="731520" y="2560320"/>
-            <a:ext cx="7772400" cy="548640"/>
+            <a:off x="731520" y="3200400"/>
+            <a:ext cx="7680960" cy="548640"/>
           </a:xfrm>
           <a:prstGeom prst="rect">
             <a:avLst/>
@@ -1315,15 +1829,15 @@
               <a:buNone/>
             </a:pPr>
             <a:r>
-              <a:rPr lang="en-US" sz="1600" dirty="0">
+              <a:rPr lang="en-US" sz="1600" i="1" dirty="0">
                 <a:solidFill>
-                  <a:srgbClr val="E9C46A"/>
+                  <a:srgbClr val="9B9690"/>
                 </a:solidFill>
                 <a:latin typeface="Calibri" pitchFamily="34" charset="0"/>
                 <a:ea typeface="Calibri" pitchFamily="34" charset="-122"/>
                 <a:cs typeface="Calibri" pitchFamily="34" charset="-120"/>
               </a:rPr>
-              <a:t>Grade 6 Science · Mr Zocchi</a:t>
+              <a:t>Everything you need to know</a:t>
             </a:r>
             <a:endParaRPr lang="en-US" sz="1600" dirty="0"/>
           </a:p>
@@ -1331,36 +1845,14 @@
       </p:sp>
       <p:sp>
         <p:nvSpPr>
-          <p:cNvPr id="5" name="Shape 3"/>
+          <p:cNvPr id="7" name="Text 5"/>
           <p:cNvSpPr/>
           <p:nvPr/>
         </p:nvSpPr>
         <p:spPr>
           <a:xfrm>
-            <a:off x="731520" y="3474720"/>
-            <a:ext cx="2011680" cy="411480"/>
-          </a:xfrm>
-          <a:prstGeom prst="roundRect">
-            <a:avLst>
-              <a:gd name="adj" fmla="val 17778"/>
-            </a:avLst>
-          </a:prstGeom>
-          <a:solidFill>
-            <a:srgbClr val="2A9D8F"/>
-          </a:solidFill>
-          <a:ln/>
-        </p:spPr>
-      </p:sp>
-      <p:sp>
-        <p:nvSpPr>
-          <p:cNvPr id="6" name="Text 4"/>
-          <p:cNvSpPr/>
-          <p:nvPr/>
-        </p:nvSpPr>
-        <p:spPr>
-          <a:xfrm>
-            <a:off x="731520" y="3474720"/>
-            <a:ext cx="2011680" cy="411480"/>
+            <a:off x="731520" y="4206240"/>
+            <a:ext cx="3657600" cy="365760"/>
           </a:xfrm>
           <a:prstGeom prst="rect">
             <a:avLst/>
@@ -1372,19 +1864,19 @@
           <a:bodyPr wrap="square" rtlCol="0" anchor="ctr"/>
           <a:lstStyle/>
           <a:p>
-            <a:pPr algn="ctr" indent="0" marL="0">
+            <a:pPr indent="0" marL="0">
               <a:buNone/>
             </a:pPr>
             <a:r>
-              <a:rPr lang="en-US" sz="1200" b="1" dirty="0">
+              <a:rPr lang="en-US" sz="1200" dirty="0">
                 <a:solidFill>
-                  <a:srgbClr val="FFFFFF"/>
+                  <a:srgbClr val="6B6660"/>
                 </a:solidFill>
                 <a:latin typeface="Calibri" pitchFamily="34" charset="0"/>
                 <a:ea typeface="Calibri" pitchFamily="34" charset="-122"/>
                 <a:cs typeface="Calibri" pitchFamily="34" charset="-120"/>
               </a:rPr>
-              <a:t>Term 3 · Earth Science</a:t>
+              <a:t>Mr Zocchi</a:t>
             </a:r>
             <a:endParaRPr lang="en-US" sz="1200" dirty="0"/>
           </a:p>
@@ -1398,16 +1890,9 @@
 </p:sld>
 </file>
 
-<file path=ppt/slides/slide2.xml><?xml version="1.0" encoding="utf-8"?>
+<file path=ppt/slides/slide10.xml><?xml version="1.0" encoding="utf-8"?>
 <p:sld xmlns:a="http://schemas.openxmlformats.org/drawingml/2006/main" xmlns:r="http://schemas.openxmlformats.org/officeDocument/2006/relationships" xmlns:p="http://schemas.openxmlformats.org/presentationml/2006/main">
-  <p:cSld name="Slide 2">
-    <p:bg>
-      <p:bgPr>
-        <a:solidFill>
-          <a:srgbClr val="FAF8F5"/>
-        </a:solidFill>
-      </p:bgPr>
-    </p:bg>
+  <p:cSld name="Slide 10">
     <p:spTree>
       <p:nvGrpSpPr>
         <p:cNvPr id="1" name=""/>
@@ -1431,7 +1916,27 @@
         <p:spPr>
           <a:xfrm>
             <a:off x="0" y="0"/>
-            <a:ext cx="9144000" cy="54864"/>
+            <a:ext cx="9144000" cy="5143500"/>
+          </a:xfrm>
+          <a:prstGeom prst="rect">
+            <a:avLst/>
+          </a:prstGeom>
+          <a:solidFill>
+            <a:srgbClr val="1B2A4A"/>
+          </a:solidFill>
+          <a:ln/>
+        </p:spPr>
+      </p:sp>
+      <p:sp>
+        <p:nvSpPr>
+          <p:cNvPr id="3" name="Shape 1"/>
+          <p:cNvSpPr/>
+          <p:nvPr/>
+        </p:nvSpPr>
+        <p:spPr>
+          <a:xfrm>
+            <a:off x="0" y="4777740"/>
+            <a:ext cx="9144000" cy="365760"/>
           </a:xfrm>
           <a:prstGeom prst="rect">
             <a:avLst/>
@@ -1444,14 +1949,14 @@
       </p:sp>
       <p:sp>
         <p:nvSpPr>
-          <p:cNvPr id="3" name="Text 1"/>
+          <p:cNvPr id="4" name="Text 2"/>
           <p:cNvSpPr/>
           <p:nvPr/>
         </p:nvSpPr>
         <p:spPr>
           <a:xfrm>
-            <a:off x="7772400" y="4709160"/>
-            <a:ext cx="1097280" cy="320040"/>
+            <a:off x="731520" y="1371600"/>
+            <a:ext cx="7680960" cy="914400"/>
           </a:xfrm>
           <a:prstGeom prst="rect">
             <a:avLst/>
@@ -1463,34 +1968,34 @@
           <a:bodyPr wrap="square" rtlCol="0" anchor="ctr"/>
           <a:lstStyle/>
           <a:p>
-            <a:pPr algn="r" indent="0" marL="0">
+            <a:pPr algn="ctr" indent="0" marL="0">
               <a:buNone/>
             </a:pPr>
             <a:r>
-              <a:rPr lang="en-US" sz="900" dirty="0">
+              <a:rPr lang="en-US" sz="3600" b="1" dirty="0">
                 <a:solidFill>
-                  <a:srgbClr val="6B6660"/>
+                  <a:srgbClr val="FFFFFF"/>
                 </a:solidFill>
-                <a:latin typeface="Calibri" pitchFamily="34" charset="0"/>
-                <a:ea typeface="Calibri" pitchFamily="34" charset="-122"/>
-                <a:cs typeface="Calibri" pitchFamily="34" charset="-120"/>
+                <a:latin typeface="Georgia" pitchFamily="34" charset="0"/>
+                <a:ea typeface="Georgia" pitchFamily="34" charset="-122"/>
+                <a:cs typeface="Georgia" pitchFamily="34" charset="-120"/>
               </a:rPr>
-              <a:t>2 / 5</a:t>
+              <a:t>Review &amp; Practise</a:t>
             </a:r>
-            <a:endParaRPr lang="en-US" sz="900" dirty="0"/>
+            <a:endParaRPr lang="en-US" sz="3600" dirty="0"/>
           </a:p>
         </p:txBody>
       </p:sp>
       <p:sp>
         <p:nvSpPr>
-          <p:cNvPr id="4" name="Text 2"/>
+          <p:cNvPr id="5" name="Text 3"/>
           <p:cNvSpPr/>
           <p:nvPr/>
         </p:nvSpPr>
         <p:spPr>
           <a:xfrm>
-            <a:off x="457200" y="274320"/>
-            <a:ext cx="8229600" cy="640080"/>
+            <a:off x="731520" y="2560320"/>
+            <a:ext cx="7680960" cy="548640"/>
           </a:xfrm>
           <a:prstGeom prst="rect">
             <a:avLst/>
@@ -1502,86 +2007,79 @@
           <a:bodyPr wrap="square" rtlCol="0" anchor="ctr"/>
           <a:lstStyle/>
           <a:p>
-            <a:pPr indent="0" marL="0">
+            <a:pPr algn="ctr" indent="0" marL="0">
               <a:buNone/>
             </a:pPr>
             <a:r>
-              <a:rPr lang="en-US" sz="2600" b="1" dirty="0">
+              <a:rPr lang="en-US" sz="2000" dirty="0">
                 <a:solidFill>
-                  <a:srgbClr val="1B2A4A"/>
+                  <a:srgbClr val="2A9D8F"/>
                 </a:solidFill>
-                <a:latin typeface="Georgia" pitchFamily="34" charset="0"/>
-                <a:ea typeface="Georgia" pitchFamily="34" charset="-122"/>
-                <a:cs typeface="Georgia" pitchFamily="34" charset="-120"/>
+                <a:latin typeface="Calibri" pitchFamily="34" charset="0"/>
+                <a:ea typeface="Calibri" pitchFamily="34" charset="-122"/>
+                <a:cs typeface="Calibri" pitchFamily="34" charset="-120"/>
               </a:rPr>
-              <a:t>Earth's Structure</a:t>
+              <a:t>mrzocchi.com</a:t>
             </a:r>
-            <a:endParaRPr lang="en-US" sz="2600" dirty="0"/>
+            <a:endParaRPr lang="en-US" sz="2000" dirty="0"/>
           </a:p>
         </p:txBody>
       </p:sp>
-      <p:sp>
-        <p:nvSpPr>
-          <p:cNvPr id="5" name="Shape 3"/>
+    </p:spTree>
+  </p:cSld>
+  <p:clrMapOvr>
+    <a:masterClrMapping/>
+  </p:clrMapOvr>
+</p:sld>
+</file>
+
+<file path=ppt/slides/slide2.xml><?xml version="1.0" encoding="utf-8"?>
+<p:sld xmlns:a="http://schemas.openxmlformats.org/drawingml/2006/main" xmlns:r="http://schemas.openxmlformats.org/officeDocument/2006/relationships" xmlns:p="http://schemas.openxmlformats.org/presentationml/2006/main">
+  <p:cSld name="Slide 2">
+    <p:spTree>
+      <p:nvGrpSpPr>
+        <p:cNvPr id="1" name=""/>
+        <p:cNvGrpSpPr/>
+        <p:nvPr/>
+      </p:nvGrpSpPr>
+      <p:grpSpPr>
+        <a:xfrm>
+          <a:off x="0" y="0"/>
+          <a:ext cx="0" cy="0"/>
+          <a:chOff x="0" y="0"/>
+          <a:chExt cx="0" cy="0"/>
+        </a:xfrm>
+      </p:grpSpPr>
+      <p:sp>
+        <p:nvSpPr>
+          <p:cNvPr id="2" name="Shape 0"/>
           <p:cNvSpPr/>
           <p:nvPr/>
         </p:nvSpPr>
         <p:spPr>
           <a:xfrm>
-            <a:off x="457200" y="1188720"/>
-            <a:ext cx="2560320" cy="1828800"/>
+            <a:off x="0" y="0"/>
+            <a:ext cx="9144000" cy="5143500"/>
           </a:xfrm>
           <a:prstGeom prst="rect">
             <a:avLst/>
           </a:prstGeom>
           <a:solidFill>
-            <a:srgbClr val="FFFFFF"/>
-          </a:solidFill>
-          <a:ln w="12700">
-            <a:solidFill>
-              <a:srgbClr val="E5E2DC"/>
-            </a:solidFill>
-            <a:prstDash val="solid"/>
-          </a:ln>
-          <a:effectLst>
-            <a:outerShdw sx="100000" sy="100000" kx="0" ky="0" algn="bl" rotWithShape="0" blurRad="50800" dist="25400" dir="8100000">
-              <a:srgbClr val="000000">
-                <a:alpha val="10000"/>
-              </a:srgbClr>
-            </a:outerShdw>
-          </a:effectLst>
-        </p:spPr>
-      </p:sp>
-      <p:sp>
-        <p:nvSpPr>
-          <p:cNvPr id="6" name="Shape 4"/>
-          <p:cNvSpPr/>
-          <p:nvPr/>
-        </p:nvSpPr>
-        <p:spPr>
-          <a:xfrm>
-            <a:off x="457200" y="1188720"/>
-            <a:ext cx="2560320" cy="54864"/>
-          </a:xfrm>
-          <a:prstGeom prst="rect">
-            <a:avLst/>
-          </a:prstGeom>
-          <a:solidFill>
-            <a:srgbClr val="2A9D8F"/>
+            <a:srgbClr val="111D35"/>
           </a:solidFill>
           <a:ln/>
         </p:spPr>
       </p:sp>
       <p:sp>
         <p:nvSpPr>
-          <p:cNvPr id="7" name="Text 5"/>
+          <p:cNvPr id="3" name="Text 1"/>
           <p:cNvSpPr/>
           <p:nvPr/>
         </p:nvSpPr>
         <p:spPr>
           <a:xfrm>
-            <a:off x="594360" y="1325880"/>
-            <a:ext cx="2286000" cy="365760"/>
+            <a:off x="731520" y="914400"/>
+            <a:ext cx="1828800" cy="1097280"/>
           </a:xfrm>
           <a:prstGeom prst="rect">
             <a:avLst/>
@@ -1597,121 +2095,32 @@
               <a:buNone/>
             </a:pPr>
             <a:r>
-              <a:rPr lang="en-US" sz="1400" b="1" dirty="0">
+              <a:rPr lang="en-US" sz="7200" b="1" dirty="0">
                 <a:solidFill>
-                  <a:srgbClr val="1B2A4A"/>
+                  <a:srgbClr val="2A9D8F">
+                    <a:alpha val="70000"/>
+                  </a:srgbClr>
                 </a:solidFill>
-                <a:latin typeface="Calibri" pitchFamily="34" charset="0"/>
-                <a:ea typeface="Calibri" pitchFamily="34" charset="-122"/>
-                <a:cs typeface="Calibri" pitchFamily="34" charset="-120"/>
+                <a:latin typeface="Georgia" pitchFamily="34" charset="0"/>
+                <a:ea typeface="Georgia" pitchFamily="34" charset="-122"/>
+                <a:cs typeface="Georgia" pitchFamily="34" charset="-120"/>
               </a:rPr>
-              <a:t>Layers</a:t>
+              <a:t>01</a:t>
             </a:r>
-            <a:endParaRPr lang="en-US" sz="1400" dirty="0"/>
+            <a:endParaRPr lang="en-US" sz="7200" dirty="0"/>
           </a:p>
         </p:txBody>
       </p:sp>
       <p:sp>
         <p:nvSpPr>
-          <p:cNvPr id="8" name="Text 6"/>
+          <p:cNvPr id="4" name="Text 2"/>
           <p:cNvSpPr/>
           <p:nvPr/>
         </p:nvSpPr>
         <p:spPr>
           <a:xfrm>
-            <a:off x="594360" y="1737360"/>
-            <a:ext cx="2286000" cy="1097280"/>
-          </a:xfrm>
-          <a:prstGeom prst="rect">
-            <a:avLst/>
-          </a:prstGeom>
-          <a:noFill/>
-          <a:ln/>
-        </p:spPr>
-        <p:txBody>
-          <a:bodyPr wrap="square" rtlCol="0" anchor="t"/>
-          <a:lstStyle/>
-          <a:p>
-            <a:pPr indent="0" marL="0">
-              <a:buNone/>
-            </a:pPr>
-            <a:r>
-              <a:rPr lang="en-US" sz="1100" dirty="0">
-                <a:solidFill>
-                  <a:srgbClr val="3D3A36"/>
-                </a:solidFill>
-                <a:latin typeface="Calibri" pitchFamily="34" charset="0"/>
-                <a:ea typeface="Calibri" pitchFamily="34" charset="-122"/>
-                <a:cs typeface="Calibri" pitchFamily="34" charset="-120"/>
-              </a:rPr>
-              <a:t>Crust (5–70 km, thin), Mantle (2,900 km, thickest), Outer Core (liquid iron/nickel), Inner Core (solid, 5,500°C, solid from pressure).</a:t>
-            </a:r>
-            <a:endParaRPr lang="en-US" sz="1100" dirty="0"/>
-          </a:p>
-        </p:txBody>
-      </p:sp>
-      <p:sp>
-        <p:nvSpPr>
-          <p:cNvPr id="9" name="Shape 7"/>
-          <p:cNvSpPr/>
-          <p:nvPr/>
-        </p:nvSpPr>
-        <p:spPr>
-          <a:xfrm>
-            <a:off x="3291840" y="1188720"/>
-            <a:ext cx="2560320" cy="1828800"/>
-          </a:xfrm>
-          <a:prstGeom prst="rect">
-            <a:avLst/>
-          </a:prstGeom>
-          <a:solidFill>
-            <a:srgbClr val="FFFFFF"/>
-          </a:solidFill>
-          <a:ln w="12700">
-            <a:solidFill>
-              <a:srgbClr val="E5E2DC"/>
-            </a:solidFill>
-            <a:prstDash val="solid"/>
-          </a:ln>
-          <a:effectLst>
-            <a:outerShdw sx="100000" sy="100000" kx="0" ky="0" algn="bl" rotWithShape="0" blurRad="50800" dist="25400" dir="8100000">
-              <a:srgbClr val="000000">
-                <a:alpha val="10000"/>
-              </a:srgbClr>
-            </a:outerShdw>
-          </a:effectLst>
-        </p:spPr>
-      </p:sp>
-      <p:sp>
-        <p:nvSpPr>
-          <p:cNvPr id="10" name="Shape 8"/>
-          <p:cNvSpPr/>
-          <p:nvPr/>
-        </p:nvSpPr>
-        <p:spPr>
-          <a:xfrm>
-            <a:off x="3291840" y="1188720"/>
-            <a:ext cx="2560320" cy="54864"/>
-          </a:xfrm>
-          <a:prstGeom prst="rect">
-            <a:avLst/>
-          </a:prstGeom>
-          <a:solidFill>
-            <a:srgbClr val="2A9D8F"/>
-          </a:solidFill>
-          <a:ln/>
-        </p:spPr>
-      </p:sp>
-      <p:sp>
-        <p:nvSpPr>
-          <p:cNvPr id="11" name="Text 9"/>
-          <p:cNvSpPr/>
-          <p:nvPr/>
-        </p:nvSpPr>
-        <p:spPr>
-          <a:xfrm>
-            <a:off x="3429000" y="1325880"/>
-            <a:ext cx="2286000" cy="365760"/>
+            <a:off x="731520" y="2011680"/>
+            <a:ext cx="7680960" cy="1097280"/>
           </a:xfrm>
           <a:prstGeom prst="rect">
             <a:avLst/>
@@ -1727,101 +2136,30 @@
               <a:buNone/>
             </a:pPr>
             <a:r>
-              <a:rPr lang="en-US" sz="1400" b="1" dirty="0">
+              <a:rPr lang="en-US" sz="3200" b="1" dirty="0">
                 <a:solidFill>
-                  <a:srgbClr val="1B2A4A"/>
+                  <a:srgbClr val="FFFFFF"/>
                 </a:solidFill>
-                <a:latin typeface="Calibri" pitchFamily="34" charset="0"/>
-                <a:ea typeface="Calibri" pitchFamily="34" charset="-122"/>
-                <a:cs typeface="Calibri" pitchFamily="34" charset="-120"/>
+                <a:latin typeface="Georgia" pitchFamily="34" charset="0"/>
+                <a:ea typeface="Georgia" pitchFamily="34" charset="-122"/>
+                <a:cs typeface="Georgia" pitchFamily="34" charset="-120"/>
               </a:rPr>
-              <a:t>Convection Currents</a:t>
+              <a:t>Earth's Layers</a:t>
             </a:r>
-            <a:endParaRPr lang="en-US" sz="1400" dirty="0"/>
+            <a:endParaRPr lang="en-US" sz="3200" dirty="0"/>
           </a:p>
         </p:txBody>
       </p:sp>
       <p:sp>
         <p:nvSpPr>
-          <p:cNvPr id="12" name="Text 10"/>
+          <p:cNvPr id="5" name="Shape 3"/>
           <p:cNvSpPr/>
           <p:nvPr/>
         </p:nvSpPr>
         <p:spPr>
           <a:xfrm>
-            <a:off x="3429000" y="1737360"/>
-            <a:ext cx="2286000" cy="1097280"/>
-          </a:xfrm>
-          <a:prstGeom prst="rect">
-            <a:avLst/>
-          </a:prstGeom>
-          <a:noFill/>
-          <a:ln/>
-        </p:spPr>
-        <p:txBody>
-          <a:bodyPr wrap="square" rtlCol="0" anchor="t"/>
-          <a:lstStyle/>
-          <a:p>
-            <a:pPr indent="0" marL="0">
-              <a:buNone/>
-            </a:pPr>
-            <a:r>
-              <a:rPr lang="en-US" sz="1100" dirty="0">
-                <a:solidFill>
-                  <a:srgbClr val="3D3A36"/>
-                </a:solidFill>
-                <a:latin typeface="Calibri" pitchFamily="34" charset="0"/>
-                <a:ea typeface="Calibri" pitchFamily="34" charset="-122"/>
-                <a:cs typeface="Calibri" pitchFamily="34" charset="-120"/>
-              </a:rPr>
-              <a:t>Hot rock rises → moves sideways dragging plates → cools → sinks. Powered by radioactive decay. Rate: 2–5 cm/year.</a:t>
-            </a:r>
-            <a:endParaRPr lang="en-US" sz="1100" dirty="0"/>
-          </a:p>
-        </p:txBody>
-      </p:sp>
-      <p:sp>
-        <p:nvSpPr>
-          <p:cNvPr id="13" name="Shape 11"/>
-          <p:cNvSpPr/>
-          <p:nvPr/>
-        </p:nvSpPr>
-        <p:spPr>
-          <a:xfrm>
-            <a:off x="6126480" y="1188720"/>
-            <a:ext cx="2560320" cy="1828800"/>
-          </a:xfrm>
-          <a:prstGeom prst="rect">
-            <a:avLst/>
-          </a:prstGeom>
-          <a:solidFill>
-            <a:srgbClr val="FFFFFF"/>
-          </a:solidFill>
-          <a:ln w="12700">
-            <a:solidFill>
-              <a:srgbClr val="E5E2DC"/>
-            </a:solidFill>
-            <a:prstDash val="solid"/>
-          </a:ln>
-          <a:effectLst>
-            <a:outerShdw sx="100000" sy="100000" kx="0" ky="0" algn="bl" rotWithShape="0" blurRad="50800" dist="25400" dir="8100000">
-              <a:srgbClr val="000000">
-                <a:alpha val="10000"/>
-              </a:srgbClr>
-            </a:outerShdw>
-          </a:effectLst>
-        </p:spPr>
-      </p:sp>
-      <p:sp>
-        <p:nvSpPr>
-          <p:cNvPr id="14" name="Shape 12"/>
-          <p:cNvSpPr/>
-          <p:nvPr/>
-        </p:nvSpPr>
-        <p:spPr>
-          <a:xfrm>
-            <a:off x="6126480" y="1188720"/>
-            <a:ext cx="2560320" cy="54864"/>
+            <a:off x="731520" y="3200400"/>
+            <a:ext cx="1828800" cy="54864"/>
           </a:xfrm>
           <a:prstGeom prst="rect">
             <a:avLst/>
@@ -1831,84 +2169,6 @@
           </a:solidFill>
           <a:ln/>
         </p:spPr>
-      </p:sp>
-      <p:sp>
-        <p:nvSpPr>
-          <p:cNvPr id="15" name="Text 13"/>
-          <p:cNvSpPr/>
-          <p:nvPr/>
-        </p:nvSpPr>
-        <p:spPr>
-          <a:xfrm>
-            <a:off x="6263640" y="1325880"/>
-            <a:ext cx="2286000" cy="365760"/>
-          </a:xfrm>
-          <a:prstGeom prst="rect">
-            <a:avLst/>
-          </a:prstGeom>
-          <a:noFill/>
-          <a:ln/>
-        </p:spPr>
-        <p:txBody>
-          <a:bodyPr wrap="square" rtlCol="0" anchor="ctr"/>
-          <a:lstStyle/>
-          <a:p>
-            <a:pPr indent="0" marL="0">
-              <a:buNone/>
-            </a:pPr>
-            <a:r>
-              <a:rPr lang="en-US" sz="1400" b="1" dirty="0">
-                <a:solidFill>
-                  <a:srgbClr val="1B2A4A"/>
-                </a:solidFill>
-                <a:latin typeface="Calibri" pitchFamily="34" charset="0"/>
-                <a:ea typeface="Calibri" pitchFamily="34" charset="-122"/>
-                <a:cs typeface="Calibri" pitchFamily="34" charset="-120"/>
-              </a:rPr>
-              <a:t>Plates</a:t>
-            </a:r>
-            <a:endParaRPr lang="en-US" sz="1400" dirty="0"/>
-          </a:p>
-        </p:txBody>
-      </p:sp>
-      <p:sp>
-        <p:nvSpPr>
-          <p:cNvPr id="16" name="Text 14"/>
-          <p:cNvSpPr/>
-          <p:nvPr/>
-        </p:nvSpPr>
-        <p:spPr>
-          <a:xfrm>
-            <a:off x="6263640" y="1737360"/>
-            <a:ext cx="2286000" cy="1097280"/>
-          </a:xfrm>
-          <a:prstGeom prst="rect">
-            <a:avLst/>
-          </a:prstGeom>
-          <a:noFill/>
-          <a:ln/>
-        </p:spPr>
-        <p:txBody>
-          <a:bodyPr wrap="square" rtlCol="0" anchor="t"/>
-          <a:lstStyle/>
-          <a:p>
-            <a:pPr indent="0" marL="0">
-              <a:buNone/>
-            </a:pPr>
-            <a:r>
-              <a:rPr lang="en-US" sz="1100" dirty="0">
-                <a:solidFill>
-                  <a:srgbClr val="3D3A36"/>
-                </a:solidFill>
-                <a:latin typeface="Calibri" pitchFamily="34" charset="0"/>
-                <a:ea typeface="Calibri" pitchFamily="34" charset="-122"/>
-                <a:cs typeface="Calibri" pitchFamily="34" charset="-120"/>
-              </a:rPr>
-              <a:t>Earth's crust broken into tectonic plates floating on mantle. Movement causes earthquakes, volcanoes, mountains.</a:t>
-            </a:r>
-            <a:endParaRPr lang="en-US" sz="1100" dirty="0"/>
-          </a:p>
-        </p:txBody>
       </p:sp>
     </p:spTree>
   </p:cSld>
@@ -1951,7 +2211,27 @@
         <p:spPr>
           <a:xfrm>
             <a:off x="0" y="0"/>
-            <a:ext cx="9144000" cy="54864"/>
+            <a:ext cx="9144000" cy="822960"/>
+          </a:xfrm>
+          <a:prstGeom prst="rect">
+            <a:avLst/>
+          </a:prstGeom>
+          <a:solidFill>
+            <a:srgbClr val="FFFFFF"/>
+          </a:solidFill>
+          <a:ln/>
+        </p:spPr>
+      </p:sp>
+      <p:sp>
+        <p:nvSpPr>
+          <p:cNvPr id="3" name="Shape 1"/>
+          <p:cNvSpPr/>
+          <p:nvPr/>
+        </p:nvSpPr>
+        <p:spPr>
+          <a:xfrm>
+            <a:off x="0" y="795528"/>
+            <a:ext cx="9144000" cy="27432"/>
           </a:xfrm>
           <a:prstGeom prst="rect">
             <a:avLst/>
@@ -1964,14 +2244,53 @@
       </p:sp>
       <p:sp>
         <p:nvSpPr>
-          <p:cNvPr id="3" name="Text 1"/>
+          <p:cNvPr id="4" name="Text 2"/>
           <p:cNvSpPr/>
           <p:nvPr/>
         </p:nvSpPr>
         <p:spPr>
           <a:xfrm>
-            <a:off x="7772400" y="4709160"/>
-            <a:ext cx="1097280" cy="320040"/>
+            <a:off x="640080" y="91440"/>
+            <a:ext cx="7863840" cy="640080"/>
+          </a:xfrm>
+          <a:prstGeom prst="rect">
+            <a:avLst/>
+          </a:prstGeom>
+          <a:noFill/>
+          <a:ln/>
+        </p:spPr>
+        <p:txBody>
+          <a:bodyPr wrap="square" lIns="0" tIns="0" rIns="0" bIns="0" rtlCol="0" anchor="ctr"/>
+          <a:lstStyle/>
+          <a:p>
+            <a:pPr indent="0" marL="0">
+              <a:buNone/>
+            </a:pPr>
+            <a:r>
+              <a:rPr lang="en-US" sz="2200" b="1" dirty="0">
+                <a:solidFill>
+                  <a:srgbClr val="1B2A4A"/>
+                </a:solidFill>
+                <a:latin typeface="Georgia" pitchFamily="34" charset="0"/>
+                <a:ea typeface="Georgia" pitchFamily="34" charset="-122"/>
+                <a:cs typeface="Georgia" pitchFamily="34" charset="-120"/>
+              </a:rPr>
+              <a:t>Layers Recap</a:t>
+            </a:r>
+            <a:endParaRPr lang="en-US" sz="2200" dirty="0"/>
+          </a:p>
+        </p:txBody>
+      </p:sp>
+      <p:sp>
+        <p:nvSpPr>
+          <p:cNvPr id="5" name="Text 3"/>
+          <p:cNvSpPr/>
+          <p:nvPr/>
+        </p:nvSpPr>
+        <p:spPr>
+          <a:xfrm>
+            <a:off x="640080" y="1005840"/>
+            <a:ext cx="7863840" cy="2926080"/>
           </a:xfrm>
           <a:prstGeom prst="rect">
             <a:avLst/>
@@ -1983,180 +2302,15 @@
           <a:bodyPr wrap="square" rtlCol="0" anchor="ctr"/>
           <a:lstStyle/>
           <a:p>
-            <a:pPr algn="r" indent="0" marL="0">
-              <a:buNone/>
+            <a:pPr marL="342900" indent="-342900">
+              <a:spcAft>
+                <a:spcPts val="800"/>
+              </a:spcAft>
+              <a:buSzPct val="100000"/>
+              <a:buChar char="•"/>
             </a:pPr>
             <a:r>
-              <a:rPr lang="en-US" sz="900" dirty="0">
-                <a:solidFill>
-                  <a:srgbClr val="6B6660"/>
-                </a:solidFill>
-                <a:latin typeface="Calibri" pitchFamily="34" charset="0"/>
-                <a:ea typeface="Calibri" pitchFamily="34" charset="-122"/>
-                <a:cs typeface="Calibri" pitchFamily="34" charset="-120"/>
-              </a:rPr>
-              <a:t>3 / 5</a:t>
-            </a:r>
-            <a:endParaRPr lang="en-US" sz="900" dirty="0"/>
-          </a:p>
-        </p:txBody>
-      </p:sp>
-      <p:sp>
-        <p:nvSpPr>
-          <p:cNvPr id="4" name="Text 2"/>
-          <p:cNvSpPr/>
-          <p:nvPr/>
-        </p:nvSpPr>
-        <p:spPr>
-          <a:xfrm>
-            <a:off x="457200" y="274320"/>
-            <a:ext cx="8229600" cy="640080"/>
-          </a:xfrm>
-          <a:prstGeom prst="rect">
-            <a:avLst/>
-          </a:prstGeom>
-          <a:noFill/>
-          <a:ln/>
-        </p:spPr>
-        <p:txBody>
-          <a:bodyPr wrap="square" rtlCol="0" anchor="ctr"/>
-          <a:lstStyle/>
-          <a:p>
-            <a:pPr indent="0" marL="0">
-              <a:buNone/>
-            </a:pPr>
-            <a:r>
-              <a:rPr lang="en-US" sz="2600" b="1" dirty="0">
-                <a:solidFill>
-                  <a:srgbClr val="1B2A4A"/>
-                </a:solidFill>
-                <a:latin typeface="Georgia" pitchFamily="34" charset="0"/>
-                <a:ea typeface="Georgia" pitchFamily="34" charset="-122"/>
-                <a:cs typeface="Georgia" pitchFamily="34" charset="-120"/>
-              </a:rPr>
-              <a:t>Boundaries &amp; Features</a:t>
-            </a:r>
-            <a:endParaRPr lang="en-US" sz="2600" dirty="0"/>
-          </a:p>
-        </p:txBody>
-      </p:sp>
-      <p:sp>
-        <p:nvSpPr>
-          <p:cNvPr id="5" name="Shape 3"/>
-          <p:cNvSpPr/>
-          <p:nvPr/>
-        </p:nvSpPr>
-        <p:spPr>
-          <a:xfrm>
-            <a:off x="457200" y="1188720"/>
-            <a:ext cx="2560320" cy="1828800"/>
-          </a:xfrm>
-          <a:prstGeom prst="rect">
-            <a:avLst/>
-          </a:prstGeom>
-          <a:solidFill>
-            <a:srgbClr val="FFFFFF"/>
-          </a:solidFill>
-          <a:ln w="12700">
-            <a:solidFill>
-              <a:srgbClr val="E5E2DC"/>
-            </a:solidFill>
-            <a:prstDash val="solid"/>
-          </a:ln>
-          <a:effectLst>
-            <a:outerShdw sx="100000" sy="100000" kx="0" ky="0" algn="bl" rotWithShape="0" blurRad="50800" dist="25400" dir="8100000">
-              <a:srgbClr val="000000">
-                <a:alpha val="10000"/>
-              </a:srgbClr>
-            </a:outerShdw>
-          </a:effectLst>
-        </p:spPr>
-      </p:sp>
-      <p:sp>
-        <p:nvSpPr>
-          <p:cNvPr id="6" name="Shape 4"/>
-          <p:cNvSpPr/>
-          <p:nvPr/>
-        </p:nvSpPr>
-        <p:spPr>
-          <a:xfrm>
-            <a:off x="457200" y="1188720"/>
-            <a:ext cx="2560320" cy="54864"/>
-          </a:xfrm>
-          <a:prstGeom prst="rect">
-            <a:avLst/>
-          </a:prstGeom>
-          <a:solidFill>
-            <a:srgbClr val="2A9D8F"/>
-          </a:solidFill>
-          <a:ln/>
-        </p:spPr>
-      </p:sp>
-      <p:sp>
-        <p:nvSpPr>
-          <p:cNvPr id="7" name="Text 5"/>
-          <p:cNvSpPr/>
-          <p:nvPr/>
-        </p:nvSpPr>
-        <p:spPr>
-          <a:xfrm>
-            <a:off x="594360" y="1325880"/>
-            <a:ext cx="2286000" cy="365760"/>
-          </a:xfrm>
-          <a:prstGeom prst="rect">
-            <a:avLst/>
-          </a:prstGeom>
-          <a:noFill/>
-          <a:ln/>
-        </p:spPr>
-        <p:txBody>
-          <a:bodyPr wrap="square" rtlCol="0" anchor="ctr"/>
-          <a:lstStyle/>
-          <a:p>
-            <a:pPr indent="0" marL="0">
-              <a:buNone/>
-            </a:pPr>
-            <a:r>
-              <a:rPr lang="en-US" sz="1400" b="1" dirty="0">
-                <a:solidFill>
-                  <a:srgbClr val="1B2A4A"/>
-                </a:solidFill>
-                <a:latin typeface="Calibri" pitchFamily="34" charset="0"/>
-                <a:ea typeface="Calibri" pitchFamily="34" charset="-122"/>
-                <a:cs typeface="Calibri" pitchFamily="34" charset="-120"/>
-              </a:rPr>
-              <a:t>Divergent</a:t>
-            </a:r>
-            <a:endParaRPr lang="en-US" sz="1400" dirty="0"/>
-          </a:p>
-        </p:txBody>
-      </p:sp>
-      <p:sp>
-        <p:nvSpPr>
-          <p:cNvPr id="8" name="Text 6"/>
-          <p:cNvSpPr/>
-          <p:nvPr/>
-        </p:nvSpPr>
-        <p:spPr>
-          <a:xfrm>
-            <a:off x="594360" y="1737360"/>
-            <a:ext cx="2286000" cy="1097280"/>
-          </a:xfrm>
-          <a:prstGeom prst="rect">
-            <a:avLst/>
-          </a:prstGeom>
-          <a:noFill/>
-          <a:ln/>
-        </p:spPr>
-        <p:txBody>
-          <a:bodyPr wrap="square" rtlCol="0" anchor="t"/>
-          <a:lstStyle/>
-          <a:p>
-            <a:pPr indent="0" marL="0">
-              <a:buNone/>
-            </a:pPr>
-            <a:r>
-              <a:rPr lang="en-US" sz="1100" dirty="0">
+              <a:rPr lang="en-US" sz="1600" dirty="0">
                 <a:solidFill>
                   <a:srgbClr val="3D3A36"/>
                 </a:solidFill>
@@ -2164,129 +2318,20 @@
                 <a:ea typeface="Calibri" pitchFamily="34" charset="-122"/>
                 <a:cs typeface="Calibri" pitchFamily="34" charset="-120"/>
               </a:rPr>
-              <a:t>Plates apart. New crust. Mid-Atlantic Ridge. Rift valleys, volcanic islands.</a:t>
+              <a:t>Crust → Mantle → Outer Core → Inner Core.</a:t>
             </a:r>
-            <a:endParaRPr lang="en-US" sz="1100" dirty="0"/>
-          </a:p>
-        </p:txBody>
-      </p:sp>
-      <p:sp>
-        <p:nvSpPr>
-          <p:cNvPr id="9" name="Shape 7"/>
-          <p:cNvSpPr/>
-          <p:nvPr/>
-        </p:nvSpPr>
-        <p:spPr>
-          <a:xfrm>
-            <a:off x="3291840" y="1188720"/>
-            <a:ext cx="2560320" cy="1828800"/>
-          </a:xfrm>
-          <a:prstGeom prst="rect">
-            <a:avLst/>
-          </a:prstGeom>
-          <a:solidFill>
-            <a:srgbClr val="FFFFFF"/>
-          </a:solidFill>
-          <a:ln w="12700">
-            <a:solidFill>
-              <a:srgbClr val="E5E2DC"/>
-            </a:solidFill>
-            <a:prstDash val="solid"/>
-          </a:ln>
-          <a:effectLst>
-            <a:outerShdw sx="100000" sy="100000" kx="0" ky="0" algn="bl" rotWithShape="0" blurRad="50800" dist="25400" dir="8100000">
-              <a:srgbClr val="000000">
-                <a:alpha val="10000"/>
-              </a:srgbClr>
-            </a:outerShdw>
-          </a:effectLst>
-        </p:spPr>
-      </p:sp>
-      <p:sp>
-        <p:nvSpPr>
-          <p:cNvPr id="10" name="Shape 8"/>
-          <p:cNvSpPr/>
-          <p:nvPr/>
-        </p:nvSpPr>
-        <p:spPr>
-          <a:xfrm>
-            <a:off x="3291840" y="1188720"/>
-            <a:ext cx="2560320" cy="54864"/>
-          </a:xfrm>
-          <a:prstGeom prst="rect">
-            <a:avLst/>
-          </a:prstGeom>
-          <a:solidFill>
-            <a:srgbClr val="2A9D8F"/>
-          </a:solidFill>
-          <a:ln/>
-        </p:spPr>
-      </p:sp>
-      <p:sp>
-        <p:nvSpPr>
-          <p:cNvPr id="11" name="Text 9"/>
-          <p:cNvSpPr/>
-          <p:nvPr/>
-        </p:nvSpPr>
-        <p:spPr>
-          <a:xfrm>
-            <a:off x="3429000" y="1325880"/>
-            <a:ext cx="2286000" cy="365760"/>
-          </a:xfrm>
-          <a:prstGeom prst="rect">
-            <a:avLst/>
-          </a:prstGeom>
-          <a:noFill/>
-          <a:ln/>
-        </p:spPr>
-        <p:txBody>
-          <a:bodyPr wrap="square" rtlCol="0" anchor="ctr"/>
-          <a:lstStyle/>
-          <a:p>
-            <a:pPr indent="0" marL="0">
-              <a:buNone/>
+            <a:endParaRPr lang="en-US" sz="1600" dirty="0"/>
+          </a:p>
+          <a:p>
+            <a:pPr marL="342900" indent="-342900">
+              <a:spcAft>
+                <a:spcPts val="800"/>
+              </a:spcAft>
+              <a:buSzPct val="100000"/>
+              <a:buChar char="•"/>
             </a:pPr>
             <a:r>
-              <a:rPr lang="en-US" sz="1400" b="1" dirty="0">
-                <a:solidFill>
-                  <a:srgbClr val="1B2A4A"/>
-                </a:solidFill>
-                <a:latin typeface="Calibri" pitchFamily="34" charset="0"/>
-                <a:ea typeface="Calibri" pitchFamily="34" charset="-122"/>
-                <a:cs typeface="Calibri" pitchFamily="34" charset="-120"/>
-              </a:rPr>
-              <a:t>Convergent</a:t>
-            </a:r>
-            <a:endParaRPr lang="en-US" sz="1400" dirty="0"/>
-          </a:p>
-        </p:txBody>
-      </p:sp>
-      <p:sp>
-        <p:nvSpPr>
-          <p:cNvPr id="12" name="Text 10"/>
-          <p:cNvSpPr/>
-          <p:nvPr/>
-        </p:nvSpPr>
-        <p:spPr>
-          <a:xfrm>
-            <a:off x="3429000" y="1737360"/>
-            <a:ext cx="2286000" cy="1097280"/>
-          </a:xfrm>
-          <a:prstGeom prst="rect">
-            <a:avLst/>
-          </a:prstGeom>
-          <a:noFill/>
-          <a:ln/>
-        </p:spPr>
-        <p:txBody>
-          <a:bodyPr wrap="square" rtlCol="0" anchor="t"/>
-          <a:lstStyle/>
-          <a:p>
-            <a:pPr indent="0" marL="0">
-              <a:buNone/>
-            </a:pPr>
-            <a:r>
-              <a:rPr lang="en-US" sz="1100" dirty="0">
+              <a:rPr lang="en-US" sz="1600" dirty="0">
                 <a:solidFill>
                   <a:srgbClr val="3D3A36"/>
                 </a:solidFill>
@@ -2294,129 +2339,20 @@
                 <a:ea typeface="Calibri" pitchFamily="34" charset="-122"/>
                 <a:cs typeface="Calibri" pitchFamily="34" charset="-120"/>
               </a:rPr>
-              <a:t>Plates together. Subduction. Trenches, mountains, volcanoes. Three subtypes: ocean-ocean, ocean-continent, continent-continent.</a:t>
+              <a:t>Continental (thick, granite) vs. Oceanic (thin, basalt).</a:t>
             </a:r>
-            <a:endParaRPr lang="en-US" sz="1100" dirty="0"/>
-          </a:p>
-        </p:txBody>
-      </p:sp>
-      <p:sp>
-        <p:nvSpPr>
-          <p:cNvPr id="13" name="Shape 11"/>
-          <p:cNvSpPr/>
-          <p:nvPr/>
-        </p:nvSpPr>
-        <p:spPr>
-          <a:xfrm>
-            <a:off x="6126480" y="1188720"/>
-            <a:ext cx="2560320" cy="1828800"/>
-          </a:xfrm>
-          <a:prstGeom prst="rect">
-            <a:avLst/>
-          </a:prstGeom>
-          <a:solidFill>
-            <a:srgbClr val="FFFFFF"/>
-          </a:solidFill>
-          <a:ln w="12700">
-            <a:solidFill>
-              <a:srgbClr val="E5E2DC"/>
-            </a:solidFill>
-            <a:prstDash val="solid"/>
-          </a:ln>
-          <a:effectLst>
-            <a:outerShdw sx="100000" sy="100000" kx="0" ky="0" algn="bl" rotWithShape="0" blurRad="50800" dist="25400" dir="8100000">
-              <a:srgbClr val="000000">
-                <a:alpha val="10000"/>
-              </a:srgbClr>
-            </a:outerShdw>
-          </a:effectLst>
-        </p:spPr>
-      </p:sp>
-      <p:sp>
-        <p:nvSpPr>
-          <p:cNvPr id="14" name="Shape 12"/>
-          <p:cNvSpPr/>
-          <p:nvPr/>
-        </p:nvSpPr>
-        <p:spPr>
-          <a:xfrm>
-            <a:off x="6126480" y="1188720"/>
-            <a:ext cx="2560320" cy="54864"/>
-          </a:xfrm>
-          <a:prstGeom prst="rect">
-            <a:avLst/>
-          </a:prstGeom>
-          <a:solidFill>
-            <a:srgbClr val="2A9D8F"/>
-          </a:solidFill>
-          <a:ln/>
-        </p:spPr>
-      </p:sp>
-      <p:sp>
-        <p:nvSpPr>
-          <p:cNvPr id="15" name="Text 13"/>
-          <p:cNvSpPr/>
-          <p:nvPr/>
-        </p:nvSpPr>
-        <p:spPr>
-          <a:xfrm>
-            <a:off x="6263640" y="1325880"/>
-            <a:ext cx="2286000" cy="365760"/>
-          </a:xfrm>
-          <a:prstGeom prst="rect">
-            <a:avLst/>
-          </a:prstGeom>
-          <a:noFill/>
-          <a:ln/>
-        </p:spPr>
-        <p:txBody>
-          <a:bodyPr wrap="square" rtlCol="0" anchor="ctr"/>
-          <a:lstStyle/>
-          <a:p>
-            <a:pPr indent="0" marL="0">
-              <a:buNone/>
+            <a:endParaRPr lang="en-US" sz="1600" dirty="0"/>
+          </a:p>
+          <a:p>
+            <a:pPr marL="342900" indent="-342900">
+              <a:spcAft>
+                <a:spcPts val="800"/>
+              </a:spcAft>
+              <a:buSzPct val="100000"/>
+              <a:buChar char="•"/>
             </a:pPr>
             <a:r>
-              <a:rPr lang="en-US" sz="1400" b="1" dirty="0">
-                <a:solidFill>
-                  <a:srgbClr val="1B2A4A"/>
-                </a:solidFill>
-                <a:latin typeface="Calibri" pitchFamily="34" charset="0"/>
-                <a:ea typeface="Calibri" pitchFamily="34" charset="-122"/>
-                <a:cs typeface="Calibri" pitchFamily="34" charset="-120"/>
-              </a:rPr>
-              <a:t>Transform</a:t>
-            </a:r>
-            <a:endParaRPr lang="en-US" sz="1400" dirty="0"/>
-          </a:p>
-        </p:txBody>
-      </p:sp>
-      <p:sp>
-        <p:nvSpPr>
-          <p:cNvPr id="16" name="Text 14"/>
-          <p:cNvSpPr/>
-          <p:nvPr/>
-        </p:nvSpPr>
-        <p:spPr>
-          <a:xfrm>
-            <a:off x="6263640" y="1737360"/>
-            <a:ext cx="2286000" cy="1097280"/>
-          </a:xfrm>
-          <a:prstGeom prst="rect">
-            <a:avLst/>
-          </a:prstGeom>
-          <a:noFill/>
-          <a:ln/>
-        </p:spPr>
-        <p:txBody>
-          <a:bodyPr wrap="square" rtlCol="0" anchor="t"/>
-          <a:lstStyle/>
-          <a:p>
-            <a:pPr indent="0" marL="0">
-              <a:buNone/>
-            </a:pPr>
-            <a:r>
-              <a:rPr lang="en-US" sz="1100" dirty="0">
+              <a:rPr lang="en-US" sz="1600" dirty="0">
                 <a:solidFill>
                   <a:srgbClr val="3D3A36"/>
                 </a:solidFill>
@@ -2424,9 +2360,30 @@
                 <a:ea typeface="Calibri" pitchFamily="34" charset="-122"/>
                 <a:cs typeface="Calibri" pitchFamily="34" charset="-120"/>
               </a:rPr>
-              <a:t>Plates sideways. No new/destroyed crust. Earthquakes. San Andreas Fault.</a:t>
+              <a:t>Mantle: convection currents drive plate movement.</a:t>
             </a:r>
-            <a:endParaRPr lang="en-US" sz="1100" dirty="0"/>
+            <a:endParaRPr lang="en-US" sz="1600" dirty="0"/>
+          </a:p>
+          <a:p>
+            <a:pPr marL="342900" indent="-342900">
+              <a:spcAft>
+                <a:spcPts val="800"/>
+              </a:spcAft>
+              <a:buSzPct val="100000"/>
+              <a:buChar char="•"/>
+            </a:pPr>
+            <a:r>
+              <a:rPr lang="en-US" sz="1600" dirty="0">
+                <a:solidFill>
+                  <a:srgbClr val="3D3A36"/>
+                </a:solidFill>
+                <a:latin typeface="Calibri" pitchFamily="34" charset="0"/>
+                <a:ea typeface="Calibri" pitchFamily="34" charset="-122"/>
+                <a:cs typeface="Calibri" pitchFamily="34" charset="-120"/>
+              </a:rPr>
+              <a:t>Nanjing sits on the Yangtze Craton — ancient continental crust.</a:t>
+            </a:r>
+            <a:endParaRPr lang="en-US" sz="1600" dirty="0"/>
           </a:p>
         </p:txBody>
       </p:sp>
@@ -2441,6 +2398,151 @@
 <file path=ppt/slides/slide4.xml><?xml version="1.0" encoding="utf-8"?>
 <p:sld xmlns:a="http://schemas.openxmlformats.org/drawingml/2006/main" xmlns:r="http://schemas.openxmlformats.org/officeDocument/2006/relationships" xmlns:p="http://schemas.openxmlformats.org/presentationml/2006/main">
   <p:cSld name="Slide 4">
+    <p:spTree>
+      <p:nvGrpSpPr>
+        <p:cNvPr id="1" name=""/>
+        <p:cNvGrpSpPr/>
+        <p:nvPr/>
+      </p:nvGrpSpPr>
+      <p:grpSpPr>
+        <a:xfrm>
+          <a:off x="0" y="0"/>
+          <a:ext cx="0" cy="0"/>
+          <a:chOff x="0" y="0"/>
+          <a:chExt cx="0" cy="0"/>
+        </a:xfrm>
+      </p:grpSpPr>
+      <p:sp>
+        <p:nvSpPr>
+          <p:cNvPr id="2" name="Shape 0"/>
+          <p:cNvSpPr/>
+          <p:nvPr/>
+        </p:nvSpPr>
+        <p:spPr>
+          <a:xfrm>
+            <a:off x="0" y="0"/>
+            <a:ext cx="9144000" cy="5143500"/>
+          </a:xfrm>
+          <a:prstGeom prst="rect">
+            <a:avLst/>
+          </a:prstGeom>
+          <a:solidFill>
+            <a:srgbClr val="111D35"/>
+          </a:solidFill>
+          <a:ln/>
+        </p:spPr>
+      </p:sp>
+      <p:sp>
+        <p:nvSpPr>
+          <p:cNvPr id="3" name="Text 1"/>
+          <p:cNvSpPr/>
+          <p:nvPr/>
+        </p:nvSpPr>
+        <p:spPr>
+          <a:xfrm>
+            <a:off x="731520" y="914400"/>
+            <a:ext cx="1828800" cy="1097280"/>
+          </a:xfrm>
+          <a:prstGeom prst="rect">
+            <a:avLst/>
+          </a:prstGeom>
+          <a:noFill/>
+          <a:ln/>
+        </p:spPr>
+        <p:txBody>
+          <a:bodyPr wrap="square" rtlCol="0" anchor="ctr"/>
+          <a:lstStyle/>
+          <a:p>
+            <a:pPr indent="0" marL="0">
+              <a:buNone/>
+            </a:pPr>
+            <a:r>
+              <a:rPr lang="en-US" sz="7200" b="1" dirty="0">
+                <a:solidFill>
+                  <a:srgbClr val="2A9D8F">
+                    <a:alpha val="70000"/>
+                  </a:srgbClr>
+                </a:solidFill>
+                <a:latin typeface="Georgia" pitchFamily="34" charset="0"/>
+                <a:ea typeface="Georgia" pitchFamily="34" charset="-122"/>
+                <a:cs typeface="Georgia" pitchFamily="34" charset="-120"/>
+              </a:rPr>
+              <a:t>02</a:t>
+            </a:r>
+            <a:endParaRPr lang="en-US" sz="7200" dirty="0"/>
+          </a:p>
+        </p:txBody>
+      </p:sp>
+      <p:sp>
+        <p:nvSpPr>
+          <p:cNvPr id="4" name="Text 2"/>
+          <p:cNvSpPr/>
+          <p:nvPr/>
+        </p:nvSpPr>
+        <p:spPr>
+          <a:xfrm>
+            <a:off x="731520" y="2011680"/>
+            <a:ext cx="7680960" cy="1097280"/>
+          </a:xfrm>
+          <a:prstGeom prst="rect">
+            <a:avLst/>
+          </a:prstGeom>
+          <a:noFill/>
+          <a:ln/>
+        </p:spPr>
+        <p:txBody>
+          <a:bodyPr wrap="square" rtlCol="0" anchor="ctr"/>
+          <a:lstStyle/>
+          <a:p>
+            <a:pPr indent="0" marL="0">
+              <a:buNone/>
+            </a:pPr>
+            <a:r>
+              <a:rPr lang="en-US" sz="3200" b="1" dirty="0">
+                <a:solidFill>
+                  <a:srgbClr val="FFFFFF"/>
+                </a:solidFill>
+                <a:latin typeface="Georgia" pitchFamily="34" charset="0"/>
+                <a:ea typeface="Georgia" pitchFamily="34" charset="-122"/>
+                <a:cs typeface="Georgia" pitchFamily="34" charset="-120"/>
+              </a:rPr>
+              <a:t>Convection &amp; Boundaries</a:t>
+            </a:r>
+            <a:endParaRPr lang="en-US" sz="3200" dirty="0"/>
+          </a:p>
+        </p:txBody>
+      </p:sp>
+      <p:sp>
+        <p:nvSpPr>
+          <p:cNvPr id="5" name="Shape 3"/>
+          <p:cNvSpPr/>
+          <p:nvPr/>
+        </p:nvSpPr>
+        <p:spPr>
+          <a:xfrm>
+            <a:off x="731520" y="3200400"/>
+            <a:ext cx="1828800" cy="54864"/>
+          </a:xfrm>
+          <a:prstGeom prst="rect">
+            <a:avLst/>
+          </a:prstGeom>
+          <a:solidFill>
+            <a:srgbClr val="2A9D8F"/>
+          </a:solidFill>
+          <a:ln/>
+        </p:spPr>
+      </p:sp>
+    </p:spTree>
+  </p:cSld>
+  <p:clrMapOvr>
+    <a:masterClrMapping/>
+  </p:clrMapOvr>
+</p:sld>
+</file>
+
+<file path=ppt/slides/slide5.xml><?xml version="1.0" encoding="utf-8"?>
+<p:sld xmlns:a="http://schemas.openxmlformats.org/drawingml/2006/main" xmlns:r="http://schemas.openxmlformats.org/officeDocument/2006/relationships" xmlns:p="http://schemas.openxmlformats.org/presentationml/2006/main">
+  <p:cSld name="Slide 5">
     <p:bg>
       <p:bgPr>
         <a:solidFill>
@@ -2471,7 +2573,27 @@
         <p:spPr>
           <a:xfrm>
             <a:off x="0" y="0"/>
-            <a:ext cx="9144000" cy="54864"/>
+            <a:ext cx="9144000" cy="822960"/>
+          </a:xfrm>
+          <a:prstGeom prst="rect">
+            <a:avLst/>
+          </a:prstGeom>
+          <a:solidFill>
+            <a:srgbClr val="FFFFFF"/>
+          </a:solidFill>
+          <a:ln/>
+        </p:spPr>
+      </p:sp>
+      <p:sp>
+        <p:nvSpPr>
+          <p:cNvPr id="3" name="Shape 1"/>
+          <p:cNvSpPr/>
+          <p:nvPr/>
+        </p:nvSpPr>
+        <p:spPr>
+          <a:xfrm>
+            <a:off x="0" y="795528"/>
+            <a:ext cx="9144000" cy="27432"/>
           </a:xfrm>
           <a:prstGeom prst="rect">
             <a:avLst/>
@@ -2484,14 +2606,1190 @@
       </p:sp>
       <p:sp>
         <p:nvSpPr>
+          <p:cNvPr id="4" name="Text 2"/>
+          <p:cNvSpPr/>
+          <p:nvPr/>
+        </p:nvSpPr>
+        <p:spPr>
+          <a:xfrm>
+            <a:off x="640080" y="91440"/>
+            <a:ext cx="7863840" cy="640080"/>
+          </a:xfrm>
+          <a:prstGeom prst="rect">
+            <a:avLst/>
+          </a:prstGeom>
+          <a:noFill/>
+          <a:ln/>
+        </p:spPr>
+        <p:txBody>
+          <a:bodyPr wrap="square" lIns="0" tIns="0" rIns="0" bIns="0" rtlCol="0" anchor="ctr"/>
+          <a:lstStyle/>
+          <a:p>
+            <a:pPr indent="0" marL="0">
+              <a:buNone/>
+            </a:pPr>
+            <a:r>
+              <a:rPr lang="en-US" sz="2200" b="1" dirty="0">
+                <a:solidFill>
+                  <a:srgbClr val="1B2A4A"/>
+                </a:solidFill>
+                <a:latin typeface="Georgia" pitchFamily="34" charset="0"/>
+                <a:ea typeface="Georgia" pitchFamily="34" charset="-122"/>
+                <a:cs typeface="Georgia" pitchFamily="34" charset="-120"/>
+              </a:rPr>
+              <a:t>Boundaries Summary</a:t>
+            </a:r>
+            <a:endParaRPr lang="en-US" sz="2200" dirty="0"/>
+          </a:p>
+        </p:txBody>
+      </p:sp>
+      <p:graphicFrame>
+        <p:nvGraphicFramePr>
+          <p:cNvPr id="6" name="Table 0"/>
+          <p:cNvGraphicFramePr>
+            <a:graphicFrameLocks noGrp="1"/>
+          </p:cNvGraphicFramePr>
+          <p:nvPr>
+            <p:extLst>
+              <p:ext uri="{D42A27DB-BD31-4B8C-83A1-F6EECF244321}">
+                <p14:modId xmlns:p14="http://schemas.microsoft.com/office/powerpoint/2010/main" val="1579011935"/>
+              </p:ext>
+            </p:extLst>
+          </p:nvPr>
+        </p:nvGraphicFramePr>
+        <p:xfrm>
+          <a:off x="640080" y="1051560"/>
+          <a:ext cx="7863840" cy="914400"/>
+        </p:xfrm>
+        <a:graphic>
+          <a:graphicData uri="http://schemas.openxmlformats.org/drawingml/2006/table">
+            <a:tbl>
+              <a:tblPr/>
+              <a:tblGrid>
+                <a:gridCol w="1965960"/>
+                <a:gridCol w="1965960"/>
+                <a:gridCol w="1965960"/>
+                <a:gridCol w="1965960"/>
+              </a:tblGrid>
+              <a:tr h="502920">
+                <a:tc>
+                  <a:txBody>
+                    <a:bodyPr/>
+                    <a:lstStyle/>
+                    <a:p>
+                      <a:pPr indent="0" marL="0">
+                        <a:buNone/>
+                      </a:pPr>
+                      <a:r>
+                        <a:rPr lang="en-US" sz="1300" b="1" dirty="0">
+                          <a:solidFill>
+                            <a:srgbClr val="FFFFFF"/>
+                          </a:solidFill>
+                          <a:latin typeface="Calibri" pitchFamily="34" charset="0"/>
+                          <a:ea typeface="Calibri" pitchFamily="34" charset="-122"/>
+                          <a:cs typeface="Calibri" pitchFamily="34" charset="-120"/>
+                        </a:rPr>
+                        <a:t>Type</a:t>
+                      </a:r>
+                      <a:endParaRPr lang="en-US" sz="1300" dirty="0">
+                        <a:latin typeface="Calibri" charset="0"/>
+                        <a:ea typeface="Calibri" charset="0"/>
+                        <a:cs typeface="Calibri" charset="0"/>
+                      </a:endParaRPr>
+                    </a:p>
+                  </a:txBody>
+                  <a:tcPr marL="91440" marR="91440" marT="45720" marB="45720">
+                    <a:lnL w="6350" cap="flat" cmpd="sng" algn="ctr">
+                      <a:solidFill>
+                        <a:srgbClr val="E5E2DC"/>
+                      </a:solidFill>
+                      <a:prstDash val="solid"/>
+                      <a:round/>
+                      <a:headEnd type="none" w="med" len="med"/>
+                      <a:tailEnd type="none" w="med" len="med"/>
+                    </a:lnL>
+                    <a:lnR w="6350" cap="flat" cmpd="sng" algn="ctr">
+                      <a:solidFill>
+                        <a:srgbClr val="E5E2DC"/>
+                      </a:solidFill>
+                      <a:prstDash val="solid"/>
+                      <a:round/>
+                      <a:headEnd type="none" w="med" len="med"/>
+                      <a:tailEnd type="none" w="med" len="med"/>
+                    </a:lnR>
+                    <a:lnT w="6350" cap="flat" cmpd="sng" algn="ctr">
+                      <a:solidFill>
+                        <a:srgbClr val="E5E2DC"/>
+                      </a:solidFill>
+                      <a:prstDash val="solid"/>
+                      <a:round/>
+                      <a:headEnd type="none" w="med" len="med"/>
+                      <a:tailEnd type="none" w="med" len="med"/>
+                    </a:lnT>
+                    <a:lnB w="6350" cap="flat" cmpd="sng" algn="ctr">
+                      <a:solidFill>
+                        <a:srgbClr val="E5E2DC"/>
+                      </a:solidFill>
+                      <a:prstDash val="solid"/>
+                      <a:round/>
+                      <a:headEnd type="none" w="med" len="med"/>
+                      <a:tailEnd type="none" w="med" len="med"/>
+                    </a:lnB>
+                    <a:solidFill>
+                      <a:srgbClr val="2A9D8F"/>
+                    </a:solidFill>
+                  </a:tcPr>
+                </a:tc>
+                <a:tc>
+                  <a:txBody>
+                    <a:bodyPr/>
+                    <a:lstStyle/>
+                    <a:p>
+                      <a:pPr indent="0" marL="0">
+                        <a:buNone/>
+                      </a:pPr>
+                      <a:r>
+                        <a:rPr lang="en-US" sz="1300" b="1" dirty="0">
+                          <a:solidFill>
+                            <a:srgbClr val="FFFFFF"/>
+                          </a:solidFill>
+                          <a:latin typeface="Calibri" pitchFamily="34" charset="0"/>
+                          <a:ea typeface="Calibri" pitchFamily="34" charset="-122"/>
+                          <a:cs typeface="Calibri" pitchFamily="34" charset="-120"/>
+                        </a:rPr>
+                        <a:t>Movement</a:t>
+                      </a:r>
+                      <a:endParaRPr lang="en-US" sz="1300" dirty="0">
+                        <a:latin typeface="Calibri" charset="0"/>
+                        <a:ea typeface="Calibri" charset="0"/>
+                        <a:cs typeface="Calibri" charset="0"/>
+                      </a:endParaRPr>
+                    </a:p>
+                  </a:txBody>
+                  <a:tcPr marL="91440" marR="91440" marT="45720" marB="45720">
+                    <a:lnL w="6350" cap="flat" cmpd="sng" algn="ctr">
+                      <a:solidFill>
+                        <a:srgbClr val="E5E2DC"/>
+                      </a:solidFill>
+                      <a:prstDash val="solid"/>
+                      <a:round/>
+                      <a:headEnd type="none" w="med" len="med"/>
+                      <a:tailEnd type="none" w="med" len="med"/>
+                    </a:lnL>
+                    <a:lnR w="6350" cap="flat" cmpd="sng" algn="ctr">
+                      <a:solidFill>
+                        <a:srgbClr val="E5E2DC"/>
+                      </a:solidFill>
+                      <a:prstDash val="solid"/>
+                      <a:round/>
+                      <a:headEnd type="none" w="med" len="med"/>
+                      <a:tailEnd type="none" w="med" len="med"/>
+                    </a:lnR>
+                    <a:lnT w="6350" cap="flat" cmpd="sng" algn="ctr">
+                      <a:solidFill>
+                        <a:srgbClr val="E5E2DC"/>
+                      </a:solidFill>
+                      <a:prstDash val="solid"/>
+                      <a:round/>
+                      <a:headEnd type="none" w="med" len="med"/>
+                      <a:tailEnd type="none" w="med" len="med"/>
+                    </a:lnT>
+                    <a:lnB w="6350" cap="flat" cmpd="sng" algn="ctr">
+                      <a:solidFill>
+                        <a:srgbClr val="E5E2DC"/>
+                      </a:solidFill>
+                      <a:prstDash val="solid"/>
+                      <a:round/>
+                      <a:headEnd type="none" w="med" len="med"/>
+                      <a:tailEnd type="none" w="med" len="med"/>
+                    </a:lnB>
+                    <a:solidFill>
+                      <a:srgbClr val="2A9D8F"/>
+                    </a:solidFill>
+                  </a:tcPr>
+                </a:tc>
+                <a:tc>
+                  <a:txBody>
+                    <a:bodyPr/>
+                    <a:lstStyle/>
+                    <a:p>
+                      <a:pPr indent="0" marL="0">
+                        <a:buNone/>
+                      </a:pPr>
+                      <a:r>
+                        <a:rPr lang="en-US" sz="1300" b="1" dirty="0">
+                          <a:solidFill>
+                            <a:srgbClr val="FFFFFF"/>
+                          </a:solidFill>
+                          <a:latin typeface="Calibri" pitchFamily="34" charset="0"/>
+                          <a:ea typeface="Calibri" pitchFamily="34" charset="-122"/>
+                          <a:cs typeface="Calibri" pitchFamily="34" charset="-120"/>
+                        </a:rPr>
+                        <a:t>Result</a:t>
+                      </a:r>
+                      <a:endParaRPr lang="en-US" sz="1300" dirty="0">
+                        <a:latin typeface="Calibri" charset="0"/>
+                        <a:ea typeface="Calibri" charset="0"/>
+                        <a:cs typeface="Calibri" charset="0"/>
+                      </a:endParaRPr>
+                    </a:p>
+                  </a:txBody>
+                  <a:tcPr marL="91440" marR="91440" marT="45720" marB="45720">
+                    <a:lnL w="6350" cap="flat" cmpd="sng" algn="ctr">
+                      <a:solidFill>
+                        <a:srgbClr val="E5E2DC"/>
+                      </a:solidFill>
+                      <a:prstDash val="solid"/>
+                      <a:round/>
+                      <a:headEnd type="none" w="med" len="med"/>
+                      <a:tailEnd type="none" w="med" len="med"/>
+                    </a:lnL>
+                    <a:lnR w="6350" cap="flat" cmpd="sng" algn="ctr">
+                      <a:solidFill>
+                        <a:srgbClr val="E5E2DC"/>
+                      </a:solidFill>
+                      <a:prstDash val="solid"/>
+                      <a:round/>
+                      <a:headEnd type="none" w="med" len="med"/>
+                      <a:tailEnd type="none" w="med" len="med"/>
+                    </a:lnR>
+                    <a:lnT w="6350" cap="flat" cmpd="sng" algn="ctr">
+                      <a:solidFill>
+                        <a:srgbClr val="E5E2DC"/>
+                      </a:solidFill>
+                      <a:prstDash val="solid"/>
+                      <a:round/>
+                      <a:headEnd type="none" w="med" len="med"/>
+                      <a:tailEnd type="none" w="med" len="med"/>
+                    </a:lnT>
+                    <a:lnB w="6350" cap="flat" cmpd="sng" algn="ctr">
+                      <a:solidFill>
+                        <a:srgbClr val="E5E2DC"/>
+                      </a:solidFill>
+                      <a:prstDash val="solid"/>
+                      <a:round/>
+                      <a:headEnd type="none" w="med" len="med"/>
+                      <a:tailEnd type="none" w="med" len="med"/>
+                    </a:lnB>
+                    <a:solidFill>
+                      <a:srgbClr val="2A9D8F"/>
+                    </a:solidFill>
+                  </a:tcPr>
+                </a:tc>
+                <a:tc>
+                  <a:txBody>
+                    <a:bodyPr/>
+                    <a:lstStyle/>
+                    <a:p>
+                      <a:pPr indent="0" marL="0">
+                        <a:buNone/>
+                      </a:pPr>
+                      <a:r>
+                        <a:rPr lang="en-US" sz="1300" b="1" dirty="0">
+                          <a:solidFill>
+                            <a:srgbClr val="FFFFFF"/>
+                          </a:solidFill>
+                          <a:latin typeface="Calibri" pitchFamily="34" charset="0"/>
+                          <a:ea typeface="Calibri" pitchFamily="34" charset="-122"/>
+                          <a:cs typeface="Calibri" pitchFamily="34" charset="-120"/>
+                        </a:rPr>
+                        <a:t>Regional Example</a:t>
+                      </a:r>
+                      <a:endParaRPr lang="en-US" sz="1300" dirty="0">
+                        <a:latin typeface="Calibri" charset="0"/>
+                        <a:ea typeface="Calibri" charset="0"/>
+                        <a:cs typeface="Calibri" charset="0"/>
+                      </a:endParaRPr>
+                    </a:p>
+                  </a:txBody>
+                  <a:tcPr marL="91440" marR="91440" marT="45720" marB="45720">
+                    <a:lnL w="6350" cap="flat" cmpd="sng" algn="ctr">
+                      <a:solidFill>
+                        <a:srgbClr val="E5E2DC"/>
+                      </a:solidFill>
+                      <a:prstDash val="solid"/>
+                      <a:round/>
+                      <a:headEnd type="none" w="med" len="med"/>
+                      <a:tailEnd type="none" w="med" len="med"/>
+                    </a:lnL>
+                    <a:lnR w="6350" cap="flat" cmpd="sng" algn="ctr">
+                      <a:solidFill>
+                        <a:srgbClr val="E5E2DC"/>
+                      </a:solidFill>
+                      <a:prstDash val="solid"/>
+                      <a:round/>
+                      <a:headEnd type="none" w="med" len="med"/>
+                      <a:tailEnd type="none" w="med" len="med"/>
+                    </a:lnR>
+                    <a:lnT w="6350" cap="flat" cmpd="sng" algn="ctr">
+                      <a:solidFill>
+                        <a:srgbClr val="E5E2DC"/>
+                      </a:solidFill>
+                      <a:prstDash val="solid"/>
+                      <a:round/>
+                      <a:headEnd type="none" w="med" len="med"/>
+                      <a:tailEnd type="none" w="med" len="med"/>
+                    </a:lnT>
+                    <a:lnB w="6350" cap="flat" cmpd="sng" algn="ctr">
+                      <a:solidFill>
+                        <a:srgbClr val="E5E2DC"/>
+                      </a:solidFill>
+                      <a:prstDash val="solid"/>
+                      <a:round/>
+                      <a:headEnd type="none" w="med" len="med"/>
+                      <a:tailEnd type="none" w="med" len="med"/>
+                    </a:lnB>
+                    <a:solidFill>
+                      <a:srgbClr val="2A9D8F"/>
+                    </a:solidFill>
+                  </a:tcPr>
+                </a:tc>
+              </a:tr>
+              <a:tr h="502920">
+                <a:tc>
+                  <a:txBody>
+                    <a:bodyPr/>
+                    <a:lstStyle/>
+                    <a:p>
+                      <a:pPr indent="0" marL="0">
+                        <a:buNone/>
+                      </a:pPr>
+                      <a:r>
+                        <a:rPr lang="en-US" sz="1300" dirty="0">
+                          <a:solidFill>
+                            <a:srgbClr val="3D3A36"/>
+                          </a:solidFill>
+                          <a:latin typeface="Calibri" pitchFamily="34" charset="0"/>
+                          <a:ea typeface="Calibri" pitchFamily="34" charset="-122"/>
+                          <a:cs typeface="Calibri" pitchFamily="34" charset="-120"/>
+                        </a:rPr>
+                        <a:t>Convergent</a:t>
+                      </a:r>
+                      <a:endParaRPr lang="en-US" sz="1300" dirty="0">
+                        <a:latin typeface="Calibri" charset="0"/>
+                        <a:ea typeface="Calibri" charset="0"/>
+                        <a:cs typeface="Calibri" charset="0"/>
+                      </a:endParaRPr>
+                    </a:p>
+                  </a:txBody>
+                  <a:tcPr marL="91440" marR="91440" marT="45720" marB="45720">
+                    <a:lnL w="6350" cap="flat" cmpd="sng" algn="ctr">
+                      <a:solidFill>
+                        <a:srgbClr val="E5E2DC"/>
+                      </a:solidFill>
+                      <a:prstDash val="solid"/>
+                      <a:round/>
+                      <a:headEnd type="none" w="med" len="med"/>
+                      <a:tailEnd type="none" w="med" len="med"/>
+                    </a:lnL>
+                    <a:lnR w="6350" cap="flat" cmpd="sng" algn="ctr">
+                      <a:solidFill>
+                        <a:srgbClr val="E5E2DC"/>
+                      </a:solidFill>
+                      <a:prstDash val="solid"/>
+                      <a:round/>
+                      <a:headEnd type="none" w="med" len="med"/>
+                      <a:tailEnd type="none" w="med" len="med"/>
+                    </a:lnR>
+                    <a:lnT w="6350" cap="flat" cmpd="sng" algn="ctr">
+                      <a:solidFill>
+                        <a:srgbClr val="E5E2DC"/>
+                      </a:solidFill>
+                      <a:prstDash val="solid"/>
+                      <a:round/>
+                      <a:headEnd type="none" w="med" len="med"/>
+                      <a:tailEnd type="none" w="med" len="med"/>
+                    </a:lnT>
+                    <a:lnB w="6350" cap="flat" cmpd="sng" algn="ctr">
+                      <a:solidFill>
+                        <a:srgbClr val="E5E2DC"/>
+                      </a:solidFill>
+                      <a:prstDash val="solid"/>
+                      <a:round/>
+                      <a:headEnd type="none" w="med" len="med"/>
+                      <a:tailEnd type="none" w="med" len="med"/>
+                    </a:lnB>
+                  </a:tcPr>
+                </a:tc>
+                <a:tc>
+                  <a:txBody>
+                    <a:bodyPr/>
+                    <a:lstStyle/>
+                    <a:p>
+                      <a:pPr indent="0" marL="0">
+                        <a:buNone/>
+                      </a:pPr>
+                      <a:r>
+                        <a:rPr lang="en-US" sz="1300" dirty="0">
+                          <a:solidFill>
+                            <a:srgbClr val="3D3A36"/>
+                          </a:solidFill>
+                          <a:latin typeface="Calibri" pitchFamily="34" charset="0"/>
+                          <a:ea typeface="Calibri" pitchFamily="34" charset="-122"/>
+                          <a:cs typeface="Calibri" pitchFamily="34" charset="-120"/>
+                        </a:rPr>
+                        <a:t>Together</a:t>
+                      </a:r>
+                      <a:endParaRPr lang="en-US" sz="1300" dirty="0">
+                        <a:latin typeface="Calibri" charset="0"/>
+                        <a:ea typeface="Calibri" charset="0"/>
+                        <a:cs typeface="Calibri" charset="0"/>
+                      </a:endParaRPr>
+                    </a:p>
+                  </a:txBody>
+                  <a:tcPr marL="91440" marR="91440" marT="45720" marB="45720">
+                    <a:lnL w="6350" cap="flat" cmpd="sng" algn="ctr">
+                      <a:solidFill>
+                        <a:srgbClr val="E5E2DC"/>
+                      </a:solidFill>
+                      <a:prstDash val="solid"/>
+                      <a:round/>
+                      <a:headEnd type="none" w="med" len="med"/>
+                      <a:tailEnd type="none" w="med" len="med"/>
+                    </a:lnL>
+                    <a:lnR w="6350" cap="flat" cmpd="sng" algn="ctr">
+                      <a:solidFill>
+                        <a:srgbClr val="E5E2DC"/>
+                      </a:solidFill>
+                      <a:prstDash val="solid"/>
+                      <a:round/>
+                      <a:headEnd type="none" w="med" len="med"/>
+                      <a:tailEnd type="none" w="med" len="med"/>
+                    </a:lnR>
+                    <a:lnT w="6350" cap="flat" cmpd="sng" algn="ctr">
+                      <a:solidFill>
+                        <a:srgbClr val="E5E2DC"/>
+                      </a:solidFill>
+                      <a:prstDash val="solid"/>
+                      <a:round/>
+                      <a:headEnd type="none" w="med" len="med"/>
+                      <a:tailEnd type="none" w="med" len="med"/>
+                    </a:lnT>
+                    <a:lnB w="6350" cap="flat" cmpd="sng" algn="ctr">
+                      <a:solidFill>
+                        <a:srgbClr val="E5E2DC"/>
+                      </a:solidFill>
+                      <a:prstDash val="solid"/>
+                      <a:round/>
+                      <a:headEnd type="none" w="med" len="med"/>
+                      <a:tailEnd type="none" w="med" len="med"/>
+                    </a:lnB>
+                  </a:tcPr>
+                </a:tc>
+                <a:tc>
+                  <a:txBody>
+                    <a:bodyPr/>
+                    <a:lstStyle/>
+                    <a:p>
+                      <a:pPr indent="0" marL="0">
+                        <a:buNone/>
+                      </a:pPr>
+                      <a:r>
+                        <a:rPr lang="en-US" sz="1300" dirty="0">
+                          <a:solidFill>
+                            <a:srgbClr val="3D3A36"/>
+                          </a:solidFill>
+                          <a:latin typeface="Calibri" pitchFamily="34" charset="0"/>
+                          <a:ea typeface="Calibri" pitchFamily="34" charset="-122"/>
+                          <a:cs typeface="Calibri" pitchFamily="34" charset="-120"/>
+                        </a:rPr>
+                        <a:t>Mountains, trenches</a:t>
+                      </a:r>
+                      <a:endParaRPr lang="en-US" sz="1300" dirty="0">
+                        <a:latin typeface="Calibri" charset="0"/>
+                        <a:ea typeface="Calibri" charset="0"/>
+                        <a:cs typeface="Calibri" charset="0"/>
+                      </a:endParaRPr>
+                    </a:p>
+                  </a:txBody>
+                  <a:tcPr marL="91440" marR="91440" marT="45720" marB="45720">
+                    <a:lnL w="6350" cap="flat" cmpd="sng" algn="ctr">
+                      <a:solidFill>
+                        <a:srgbClr val="E5E2DC"/>
+                      </a:solidFill>
+                      <a:prstDash val="solid"/>
+                      <a:round/>
+                      <a:headEnd type="none" w="med" len="med"/>
+                      <a:tailEnd type="none" w="med" len="med"/>
+                    </a:lnL>
+                    <a:lnR w="6350" cap="flat" cmpd="sng" algn="ctr">
+                      <a:solidFill>
+                        <a:srgbClr val="E5E2DC"/>
+                      </a:solidFill>
+                      <a:prstDash val="solid"/>
+                      <a:round/>
+                      <a:headEnd type="none" w="med" len="med"/>
+                      <a:tailEnd type="none" w="med" len="med"/>
+                    </a:lnR>
+                    <a:lnT w="6350" cap="flat" cmpd="sng" algn="ctr">
+                      <a:solidFill>
+                        <a:srgbClr val="E5E2DC"/>
+                      </a:solidFill>
+                      <a:prstDash val="solid"/>
+                      <a:round/>
+                      <a:headEnd type="none" w="med" len="med"/>
+                      <a:tailEnd type="none" w="med" len="med"/>
+                    </a:lnT>
+                    <a:lnB w="6350" cap="flat" cmpd="sng" algn="ctr">
+                      <a:solidFill>
+                        <a:srgbClr val="E5E2DC"/>
+                      </a:solidFill>
+                      <a:prstDash val="solid"/>
+                      <a:round/>
+                      <a:headEnd type="none" w="med" len="med"/>
+                      <a:tailEnd type="none" w="med" len="med"/>
+                    </a:lnB>
+                  </a:tcPr>
+                </a:tc>
+                <a:tc>
+                  <a:txBody>
+                    <a:bodyPr/>
+                    <a:lstStyle/>
+                    <a:p>
+                      <a:pPr indent="0" marL="0">
+                        <a:buNone/>
+                      </a:pPr>
+                      <a:r>
+                        <a:rPr lang="en-US" sz="1300" dirty="0">
+                          <a:solidFill>
+                            <a:srgbClr val="3D3A36"/>
+                          </a:solidFill>
+                          <a:latin typeface="Calibri" pitchFamily="34" charset="0"/>
+                          <a:ea typeface="Calibri" pitchFamily="34" charset="-122"/>
+                          <a:cs typeface="Calibri" pitchFamily="34" charset="-120"/>
+                        </a:rPr>
+                        <a:t>Himalayas, Japan Trench</a:t>
+                      </a:r>
+                      <a:endParaRPr lang="en-US" sz="1300" dirty="0">
+                        <a:latin typeface="Calibri" charset="0"/>
+                        <a:ea typeface="Calibri" charset="0"/>
+                        <a:cs typeface="Calibri" charset="0"/>
+                      </a:endParaRPr>
+                    </a:p>
+                  </a:txBody>
+                  <a:tcPr marL="91440" marR="91440" marT="45720" marB="45720">
+                    <a:lnL w="6350" cap="flat" cmpd="sng" algn="ctr">
+                      <a:solidFill>
+                        <a:srgbClr val="E5E2DC"/>
+                      </a:solidFill>
+                      <a:prstDash val="solid"/>
+                      <a:round/>
+                      <a:headEnd type="none" w="med" len="med"/>
+                      <a:tailEnd type="none" w="med" len="med"/>
+                    </a:lnL>
+                    <a:lnR w="6350" cap="flat" cmpd="sng" algn="ctr">
+                      <a:solidFill>
+                        <a:srgbClr val="E5E2DC"/>
+                      </a:solidFill>
+                      <a:prstDash val="solid"/>
+                      <a:round/>
+                      <a:headEnd type="none" w="med" len="med"/>
+                      <a:tailEnd type="none" w="med" len="med"/>
+                    </a:lnR>
+                    <a:lnT w="6350" cap="flat" cmpd="sng" algn="ctr">
+                      <a:solidFill>
+                        <a:srgbClr val="E5E2DC"/>
+                      </a:solidFill>
+                      <a:prstDash val="solid"/>
+                      <a:round/>
+                      <a:headEnd type="none" w="med" len="med"/>
+                      <a:tailEnd type="none" w="med" len="med"/>
+                    </a:lnT>
+                    <a:lnB w="6350" cap="flat" cmpd="sng" algn="ctr">
+                      <a:solidFill>
+                        <a:srgbClr val="E5E2DC"/>
+                      </a:solidFill>
+                      <a:prstDash val="solid"/>
+                      <a:round/>
+                      <a:headEnd type="none" w="med" len="med"/>
+                      <a:tailEnd type="none" w="med" len="med"/>
+                    </a:lnB>
+                  </a:tcPr>
+                </a:tc>
+              </a:tr>
+              <a:tr h="502920">
+                <a:tc>
+                  <a:txBody>
+                    <a:bodyPr/>
+                    <a:lstStyle/>
+                    <a:p>
+                      <a:pPr indent="0" marL="0">
+                        <a:buNone/>
+                      </a:pPr>
+                      <a:r>
+                        <a:rPr lang="en-US" sz="1300" dirty="0">
+                          <a:solidFill>
+                            <a:srgbClr val="3D3A36"/>
+                          </a:solidFill>
+                          <a:latin typeface="Calibri" pitchFamily="34" charset="0"/>
+                          <a:ea typeface="Calibri" pitchFamily="34" charset="-122"/>
+                          <a:cs typeface="Calibri" pitchFamily="34" charset="-120"/>
+                        </a:rPr>
+                        <a:t>Divergent</a:t>
+                      </a:r>
+                      <a:endParaRPr lang="en-US" sz="1300" dirty="0">
+                        <a:latin typeface="Calibri" charset="0"/>
+                        <a:ea typeface="Calibri" charset="0"/>
+                        <a:cs typeface="Calibri" charset="0"/>
+                      </a:endParaRPr>
+                    </a:p>
+                  </a:txBody>
+                  <a:tcPr marL="91440" marR="91440" marT="45720" marB="45720">
+                    <a:lnL w="6350" cap="flat" cmpd="sng" algn="ctr">
+                      <a:solidFill>
+                        <a:srgbClr val="E5E2DC"/>
+                      </a:solidFill>
+                      <a:prstDash val="solid"/>
+                      <a:round/>
+                      <a:headEnd type="none" w="med" len="med"/>
+                      <a:tailEnd type="none" w="med" len="med"/>
+                    </a:lnL>
+                    <a:lnR w="6350" cap="flat" cmpd="sng" algn="ctr">
+                      <a:solidFill>
+                        <a:srgbClr val="E5E2DC"/>
+                      </a:solidFill>
+                      <a:prstDash val="solid"/>
+                      <a:round/>
+                      <a:headEnd type="none" w="med" len="med"/>
+                      <a:tailEnd type="none" w="med" len="med"/>
+                    </a:lnR>
+                    <a:lnT w="6350" cap="flat" cmpd="sng" algn="ctr">
+                      <a:solidFill>
+                        <a:srgbClr val="E5E2DC"/>
+                      </a:solidFill>
+                      <a:prstDash val="solid"/>
+                      <a:round/>
+                      <a:headEnd type="none" w="med" len="med"/>
+                      <a:tailEnd type="none" w="med" len="med"/>
+                    </a:lnT>
+                    <a:lnB w="6350" cap="flat" cmpd="sng" algn="ctr">
+                      <a:solidFill>
+                        <a:srgbClr val="E5E2DC"/>
+                      </a:solidFill>
+                      <a:prstDash val="solid"/>
+                      <a:round/>
+                      <a:headEnd type="none" w="med" len="med"/>
+                      <a:tailEnd type="none" w="med" len="med"/>
+                    </a:lnB>
+                  </a:tcPr>
+                </a:tc>
+                <a:tc>
+                  <a:txBody>
+                    <a:bodyPr/>
+                    <a:lstStyle/>
+                    <a:p>
+                      <a:pPr indent="0" marL="0">
+                        <a:buNone/>
+                      </a:pPr>
+                      <a:r>
+                        <a:rPr lang="en-US" sz="1300" dirty="0">
+                          <a:solidFill>
+                            <a:srgbClr val="3D3A36"/>
+                          </a:solidFill>
+                          <a:latin typeface="Calibri" pitchFamily="34" charset="0"/>
+                          <a:ea typeface="Calibri" pitchFamily="34" charset="-122"/>
+                          <a:cs typeface="Calibri" pitchFamily="34" charset="-120"/>
+                        </a:rPr>
+                        <a:t>Apart</a:t>
+                      </a:r>
+                      <a:endParaRPr lang="en-US" sz="1300" dirty="0">
+                        <a:latin typeface="Calibri" charset="0"/>
+                        <a:ea typeface="Calibri" charset="0"/>
+                        <a:cs typeface="Calibri" charset="0"/>
+                      </a:endParaRPr>
+                    </a:p>
+                  </a:txBody>
+                  <a:tcPr marL="91440" marR="91440" marT="45720" marB="45720">
+                    <a:lnL w="6350" cap="flat" cmpd="sng" algn="ctr">
+                      <a:solidFill>
+                        <a:srgbClr val="E5E2DC"/>
+                      </a:solidFill>
+                      <a:prstDash val="solid"/>
+                      <a:round/>
+                      <a:headEnd type="none" w="med" len="med"/>
+                      <a:tailEnd type="none" w="med" len="med"/>
+                    </a:lnL>
+                    <a:lnR w="6350" cap="flat" cmpd="sng" algn="ctr">
+                      <a:solidFill>
+                        <a:srgbClr val="E5E2DC"/>
+                      </a:solidFill>
+                      <a:prstDash val="solid"/>
+                      <a:round/>
+                      <a:headEnd type="none" w="med" len="med"/>
+                      <a:tailEnd type="none" w="med" len="med"/>
+                    </a:lnR>
+                    <a:lnT w="6350" cap="flat" cmpd="sng" algn="ctr">
+                      <a:solidFill>
+                        <a:srgbClr val="E5E2DC"/>
+                      </a:solidFill>
+                      <a:prstDash val="solid"/>
+                      <a:round/>
+                      <a:headEnd type="none" w="med" len="med"/>
+                      <a:tailEnd type="none" w="med" len="med"/>
+                    </a:lnT>
+                    <a:lnB w="6350" cap="flat" cmpd="sng" algn="ctr">
+                      <a:solidFill>
+                        <a:srgbClr val="E5E2DC"/>
+                      </a:solidFill>
+                      <a:prstDash val="solid"/>
+                      <a:round/>
+                      <a:headEnd type="none" w="med" len="med"/>
+                      <a:tailEnd type="none" w="med" len="med"/>
+                    </a:lnB>
+                  </a:tcPr>
+                </a:tc>
+                <a:tc>
+                  <a:txBody>
+                    <a:bodyPr/>
+                    <a:lstStyle/>
+                    <a:p>
+                      <a:pPr indent="0" marL="0">
+                        <a:buNone/>
+                      </a:pPr>
+                      <a:r>
+                        <a:rPr lang="en-US" sz="1300" dirty="0">
+                          <a:solidFill>
+                            <a:srgbClr val="3D3A36"/>
+                          </a:solidFill>
+                          <a:latin typeface="Calibri" pitchFamily="34" charset="0"/>
+                          <a:ea typeface="Calibri" pitchFamily="34" charset="-122"/>
+                          <a:cs typeface="Calibri" pitchFamily="34" charset="-120"/>
+                        </a:rPr>
+                        <a:t>New crust, ridges</a:t>
+                      </a:r>
+                      <a:endParaRPr lang="en-US" sz="1300" dirty="0">
+                        <a:latin typeface="Calibri" charset="0"/>
+                        <a:ea typeface="Calibri" charset="0"/>
+                        <a:cs typeface="Calibri" charset="0"/>
+                      </a:endParaRPr>
+                    </a:p>
+                  </a:txBody>
+                  <a:tcPr marL="91440" marR="91440" marT="45720" marB="45720">
+                    <a:lnL w="6350" cap="flat" cmpd="sng" algn="ctr">
+                      <a:solidFill>
+                        <a:srgbClr val="E5E2DC"/>
+                      </a:solidFill>
+                      <a:prstDash val="solid"/>
+                      <a:round/>
+                      <a:headEnd type="none" w="med" len="med"/>
+                      <a:tailEnd type="none" w="med" len="med"/>
+                    </a:lnL>
+                    <a:lnR w="6350" cap="flat" cmpd="sng" algn="ctr">
+                      <a:solidFill>
+                        <a:srgbClr val="E5E2DC"/>
+                      </a:solidFill>
+                      <a:prstDash val="solid"/>
+                      <a:round/>
+                      <a:headEnd type="none" w="med" len="med"/>
+                      <a:tailEnd type="none" w="med" len="med"/>
+                    </a:lnR>
+                    <a:lnT w="6350" cap="flat" cmpd="sng" algn="ctr">
+                      <a:solidFill>
+                        <a:srgbClr val="E5E2DC"/>
+                      </a:solidFill>
+                      <a:prstDash val="solid"/>
+                      <a:round/>
+                      <a:headEnd type="none" w="med" len="med"/>
+                      <a:tailEnd type="none" w="med" len="med"/>
+                    </a:lnT>
+                    <a:lnB w="6350" cap="flat" cmpd="sng" algn="ctr">
+                      <a:solidFill>
+                        <a:srgbClr val="E5E2DC"/>
+                      </a:solidFill>
+                      <a:prstDash val="solid"/>
+                      <a:round/>
+                      <a:headEnd type="none" w="med" len="med"/>
+                      <a:tailEnd type="none" w="med" len="med"/>
+                    </a:lnB>
+                  </a:tcPr>
+                </a:tc>
+                <a:tc>
+                  <a:txBody>
+                    <a:bodyPr/>
+                    <a:lstStyle/>
+                    <a:p>
+                      <a:pPr indent="0" marL="0">
+                        <a:buNone/>
+                      </a:pPr>
+                      <a:r>
+                        <a:rPr lang="en-US" sz="1300" dirty="0">
+                          <a:solidFill>
+                            <a:srgbClr val="3D3A36"/>
+                          </a:solidFill>
+                          <a:latin typeface="Calibri" pitchFamily="34" charset="0"/>
+                          <a:ea typeface="Calibri" pitchFamily="34" charset="-122"/>
+                          <a:cs typeface="Calibri" pitchFamily="34" charset="-120"/>
+                        </a:rPr>
+                        <a:t>Mid-Atlantic, Rhine Graben (Germany)</a:t>
+                      </a:r>
+                      <a:endParaRPr lang="en-US" sz="1300" dirty="0">
+                        <a:latin typeface="Calibri" charset="0"/>
+                        <a:ea typeface="Calibri" charset="0"/>
+                        <a:cs typeface="Calibri" charset="0"/>
+                      </a:endParaRPr>
+                    </a:p>
+                  </a:txBody>
+                  <a:tcPr marL="91440" marR="91440" marT="45720" marB="45720">
+                    <a:lnL w="6350" cap="flat" cmpd="sng" algn="ctr">
+                      <a:solidFill>
+                        <a:srgbClr val="E5E2DC"/>
+                      </a:solidFill>
+                      <a:prstDash val="solid"/>
+                      <a:round/>
+                      <a:headEnd type="none" w="med" len="med"/>
+                      <a:tailEnd type="none" w="med" len="med"/>
+                    </a:lnL>
+                    <a:lnR w="6350" cap="flat" cmpd="sng" algn="ctr">
+                      <a:solidFill>
+                        <a:srgbClr val="E5E2DC"/>
+                      </a:solidFill>
+                      <a:prstDash val="solid"/>
+                      <a:round/>
+                      <a:headEnd type="none" w="med" len="med"/>
+                      <a:tailEnd type="none" w="med" len="med"/>
+                    </a:lnR>
+                    <a:lnT w="6350" cap="flat" cmpd="sng" algn="ctr">
+                      <a:solidFill>
+                        <a:srgbClr val="E5E2DC"/>
+                      </a:solidFill>
+                      <a:prstDash val="solid"/>
+                      <a:round/>
+                      <a:headEnd type="none" w="med" len="med"/>
+                      <a:tailEnd type="none" w="med" len="med"/>
+                    </a:lnT>
+                    <a:lnB w="6350" cap="flat" cmpd="sng" algn="ctr">
+                      <a:solidFill>
+                        <a:srgbClr val="E5E2DC"/>
+                      </a:solidFill>
+                      <a:prstDash val="solid"/>
+                      <a:round/>
+                      <a:headEnd type="none" w="med" len="med"/>
+                      <a:tailEnd type="none" w="med" len="med"/>
+                    </a:lnB>
+                  </a:tcPr>
+                </a:tc>
+              </a:tr>
+              <a:tr h="502920">
+                <a:tc>
+                  <a:txBody>
+                    <a:bodyPr/>
+                    <a:lstStyle/>
+                    <a:p>
+                      <a:pPr indent="0" marL="0">
+                        <a:buNone/>
+                      </a:pPr>
+                      <a:r>
+                        <a:rPr lang="en-US" sz="1300" dirty="0">
+                          <a:solidFill>
+                            <a:srgbClr val="3D3A36"/>
+                          </a:solidFill>
+                          <a:latin typeface="Calibri" pitchFamily="34" charset="0"/>
+                          <a:ea typeface="Calibri" pitchFamily="34" charset="-122"/>
+                          <a:cs typeface="Calibri" pitchFamily="34" charset="-120"/>
+                        </a:rPr>
+                        <a:t>Transform</a:t>
+                      </a:r>
+                      <a:endParaRPr lang="en-US" sz="1300" dirty="0">
+                        <a:latin typeface="Calibri" charset="0"/>
+                        <a:ea typeface="Calibri" charset="0"/>
+                        <a:cs typeface="Calibri" charset="0"/>
+                      </a:endParaRPr>
+                    </a:p>
+                  </a:txBody>
+                  <a:tcPr marL="91440" marR="91440" marT="45720" marB="45720">
+                    <a:lnL w="6350" cap="flat" cmpd="sng" algn="ctr">
+                      <a:solidFill>
+                        <a:srgbClr val="E5E2DC"/>
+                      </a:solidFill>
+                      <a:prstDash val="solid"/>
+                      <a:round/>
+                      <a:headEnd type="none" w="med" len="med"/>
+                      <a:tailEnd type="none" w="med" len="med"/>
+                    </a:lnL>
+                    <a:lnR w="6350" cap="flat" cmpd="sng" algn="ctr">
+                      <a:solidFill>
+                        <a:srgbClr val="E5E2DC"/>
+                      </a:solidFill>
+                      <a:prstDash val="solid"/>
+                      <a:round/>
+                      <a:headEnd type="none" w="med" len="med"/>
+                      <a:tailEnd type="none" w="med" len="med"/>
+                    </a:lnR>
+                    <a:lnT w="6350" cap="flat" cmpd="sng" algn="ctr">
+                      <a:solidFill>
+                        <a:srgbClr val="E5E2DC"/>
+                      </a:solidFill>
+                      <a:prstDash val="solid"/>
+                      <a:round/>
+                      <a:headEnd type="none" w="med" len="med"/>
+                      <a:tailEnd type="none" w="med" len="med"/>
+                    </a:lnT>
+                    <a:lnB w="6350" cap="flat" cmpd="sng" algn="ctr">
+                      <a:solidFill>
+                        <a:srgbClr val="E5E2DC"/>
+                      </a:solidFill>
+                      <a:prstDash val="solid"/>
+                      <a:round/>
+                      <a:headEnd type="none" w="med" len="med"/>
+                      <a:tailEnd type="none" w="med" len="med"/>
+                    </a:lnB>
+                  </a:tcPr>
+                </a:tc>
+                <a:tc>
+                  <a:txBody>
+                    <a:bodyPr/>
+                    <a:lstStyle/>
+                    <a:p>
+                      <a:pPr indent="0" marL="0">
+                        <a:buNone/>
+                      </a:pPr>
+                      <a:r>
+                        <a:rPr lang="en-US" sz="1300" dirty="0">
+                          <a:solidFill>
+                            <a:srgbClr val="3D3A36"/>
+                          </a:solidFill>
+                          <a:latin typeface="Calibri" pitchFamily="34" charset="0"/>
+                          <a:ea typeface="Calibri" pitchFamily="34" charset="-122"/>
+                          <a:cs typeface="Calibri" pitchFamily="34" charset="-120"/>
+                        </a:rPr>
+                        <a:t>Side by side</a:t>
+                      </a:r>
+                      <a:endParaRPr lang="en-US" sz="1300" dirty="0">
+                        <a:latin typeface="Calibri" charset="0"/>
+                        <a:ea typeface="Calibri" charset="0"/>
+                        <a:cs typeface="Calibri" charset="0"/>
+                      </a:endParaRPr>
+                    </a:p>
+                  </a:txBody>
+                  <a:tcPr marL="91440" marR="91440" marT="45720" marB="45720">
+                    <a:lnL w="6350" cap="flat" cmpd="sng" algn="ctr">
+                      <a:solidFill>
+                        <a:srgbClr val="E5E2DC"/>
+                      </a:solidFill>
+                      <a:prstDash val="solid"/>
+                      <a:round/>
+                      <a:headEnd type="none" w="med" len="med"/>
+                      <a:tailEnd type="none" w="med" len="med"/>
+                    </a:lnL>
+                    <a:lnR w="6350" cap="flat" cmpd="sng" algn="ctr">
+                      <a:solidFill>
+                        <a:srgbClr val="E5E2DC"/>
+                      </a:solidFill>
+                      <a:prstDash val="solid"/>
+                      <a:round/>
+                      <a:headEnd type="none" w="med" len="med"/>
+                      <a:tailEnd type="none" w="med" len="med"/>
+                    </a:lnR>
+                    <a:lnT w="6350" cap="flat" cmpd="sng" algn="ctr">
+                      <a:solidFill>
+                        <a:srgbClr val="E5E2DC"/>
+                      </a:solidFill>
+                      <a:prstDash val="solid"/>
+                      <a:round/>
+                      <a:headEnd type="none" w="med" len="med"/>
+                      <a:tailEnd type="none" w="med" len="med"/>
+                    </a:lnT>
+                    <a:lnB w="6350" cap="flat" cmpd="sng" algn="ctr">
+                      <a:solidFill>
+                        <a:srgbClr val="E5E2DC"/>
+                      </a:solidFill>
+                      <a:prstDash val="solid"/>
+                      <a:round/>
+                      <a:headEnd type="none" w="med" len="med"/>
+                      <a:tailEnd type="none" w="med" len="med"/>
+                    </a:lnB>
+                  </a:tcPr>
+                </a:tc>
+                <a:tc>
+                  <a:txBody>
+                    <a:bodyPr/>
+                    <a:lstStyle/>
+                    <a:p>
+                      <a:pPr indent="0" marL="0">
+                        <a:buNone/>
+                      </a:pPr>
+                      <a:r>
+                        <a:rPr lang="en-US" sz="1300" dirty="0">
+                          <a:solidFill>
+                            <a:srgbClr val="3D3A36"/>
+                          </a:solidFill>
+                          <a:latin typeface="Calibri" pitchFamily="34" charset="0"/>
+                          <a:ea typeface="Calibri" pitchFamily="34" charset="-122"/>
+                          <a:cs typeface="Calibri" pitchFamily="34" charset="-120"/>
+                        </a:rPr>
+                        <a:t>Earthquakes</a:t>
+                      </a:r>
+                      <a:endParaRPr lang="en-US" sz="1300" dirty="0">
+                        <a:latin typeface="Calibri" charset="0"/>
+                        <a:ea typeface="Calibri" charset="0"/>
+                        <a:cs typeface="Calibri" charset="0"/>
+                      </a:endParaRPr>
+                    </a:p>
+                  </a:txBody>
+                  <a:tcPr marL="91440" marR="91440" marT="45720" marB="45720">
+                    <a:lnL w="6350" cap="flat" cmpd="sng" algn="ctr">
+                      <a:solidFill>
+                        <a:srgbClr val="E5E2DC"/>
+                      </a:solidFill>
+                      <a:prstDash val="solid"/>
+                      <a:round/>
+                      <a:headEnd type="none" w="med" len="med"/>
+                      <a:tailEnd type="none" w="med" len="med"/>
+                    </a:lnL>
+                    <a:lnR w="6350" cap="flat" cmpd="sng" algn="ctr">
+                      <a:solidFill>
+                        <a:srgbClr val="E5E2DC"/>
+                      </a:solidFill>
+                      <a:prstDash val="solid"/>
+                      <a:round/>
+                      <a:headEnd type="none" w="med" len="med"/>
+                      <a:tailEnd type="none" w="med" len="med"/>
+                    </a:lnR>
+                    <a:lnT w="6350" cap="flat" cmpd="sng" algn="ctr">
+                      <a:solidFill>
+                        <a:srgbClr val="E5E2DC"/>
+                      </a:solidFill>
+                      <a:prstDash val="solid"/>
+                      <a:round/>
+                      <a:headEnd type="none" w="med" len="med"/>
+                      <a:tailEnd type="none" w="med" len="med"/>
+                    </a:lnT>
+                    <a:lnB w="6350" cap="flat" cmpd="sng" algn="ctr">
+                      <a:solidFill>
+                        <a:srgbClr val="E5E2DC"/>
+                      </a:solidFill>
+                      <a:prstDash val="solid"/>
+                      <a:round/>
+                      <a:headEnd type="none" w="med" len="med"/>
+                      <a:tailEnd type="none" w="med" len="med"/>
+                    </a:lnB>
+                  </a:tcPr>
+                </a:tc>
+                <a:tc>
+                  <a:txBody>
+                    <a:bodyPr/>
+                    <a:lstStyle/>
+                    <a:p>
+                      <a:pPr indent="0" marL="0">
+                        <a:buNone/>
+                      </a:pPr>
+                      <a:r>
+                        <a:rPr lang="en-US" sz="1300" dirty="0">
+                          <a:solidFill>
+                            <a:srgbClr val="3D3A36"/>
+                          </a:solidFill>
+                          <a:latin typeface="Calibri" pitchFamily="34" charset="0"/>
+                          <a:ea typeface="Calibri" pitchFamily="34" charset="-122"/>
+                          <a:cs typeface="Calibri" pitchFamily="34" charset="-120"/>
+                        </a:rPr>
+                        <a:t>Tan-Lu Fault (near Nanjing)</a:t>
+                      </a:r>
+                      <a:endParaRPr lang="en-US" sz="1300" dirty="0">
+                        <a:latin typeface="Calibri" charset="0"/>
+                        <a:ea typeface="Calibri" charset="0"/>
+                        <a:cs typeface="Calibri" charset="0"/>
+                      </a:endParaRPr>
+                    </a:p>
+                  </a:txBody>
+                  <a:tcPr marL="91440" marR="91440" marT="45720" marB="45720">
+                    <a:lnL w="6350" cap="flat" cmpd="sng" algn="ctr">
+                      <a:solidFill>
+                        <a:srgbClr val="E5E2DC"/>
+                      </a:solidFill>
+                      <a:prstDash val="solid"/>
+                      <a:round/>
+                      <a:headEnd type="none" w="med" len="med"/>
+                      <a:tailEnd type="none" w="med" len="med"/>
+                    </a:lnL>
+                    <a:lnR w="6350" cap="flat" cmpd="sng" algn="ctr">
+                      <a:solidFill>
+                        <a:srgbClr val="E5E2DC"/>
+                      </a:solidFill>
+                      <a:prstDash val="solid"/>
+                      <a:round/>
+                      <a:headEnd type="none" w="med" len="med"/>
+                      <a:tailEnd type="none" w="med" len="med"/>
+                    </a:lnR>
+                    <a:lnT w="6350" cap="flat" cmpd="sng" algn="ctr">
+                      <a:solidFill>
+                        <a:srgbClr val="E5E2DC"/>
+                      </a:solidFill>
+                      <a:prstDash val="solid"/>
+                      <a:round/>
+                      <a:headEnd type="none" w="med" len="med"/>
+                      <a:tailEnd type="none" w="med" len="med"/>
+                    </a:lnT>
+                    <a:lnB w="6350" cap="flat" cmpd="sng" algn="ctr">
+                      <a:solidFill>
+                        <a:srgbClr val="E5E2DC"/>
+                      </a:solidFill>
+                      <a:prstDash val="solid"/>
+                      <a:round/>
+                      <a:headEnd type="none" w="med" len="med"/>
+                      <a:tailEnd type="none" w="med" len="med"/>
+                    </a:lnB>
+                  </a:tcPr>
+                </a:tc>
+              </a:tr>
+            </a:tbl>
+          </a:graphicData>
+        </a:graphic>
+      </p:graphicFrame>
+    </p:spTree>
+  </p:cSld>
+  <p:clrMapOvr>
+    <a:masterClrMapping/>
+  </p:clrMapOvr>
+</p:sld>
+</file>
+
+<file path=ppt/slides/slide6.xml><?xml version="1.0" encoding="utf-8"?>
+<p:sld xmlns:a="http://schemas.openxmlformats.org/drawingml/2006/main" xmlns:r="http://schemas.openxmlformats.org/officeDocument/2006/relationships" xmlns:p="http://schemas.openxmlformats.org/presentationml/2006/main">
+  <p:cSld name="Slide 6">
+    <p:spTree>
+      <p:nvGrpSpPr>
+        <p:cNvPr id="1" name=""/>
+        <p:cNvGrpSpPr/>
+        <p:nvPr/>
+      </p:nvGrpSpPr>
+      <p:grpSpPr>
+        <a:xfrm>
+          <a:off x="0" y="0"/>
+          <a:ext cx="0" cy="0"/>
+          <a:chOff x="0" y="0"/>
+          <a:chExt cx="0" cy="0"/>
+        </a:xfrm>
+      </p:grpSpPr>
+      <p:sp>
+        <p:nvSpPr>
+          <p:cNvPr id="2" name="Shape 0"/>
+          <p:cNvSpPr/>
+          <p:nvPr/>
+        </p:nvSpPr>
+        <p:spPr>
+          <a:xfrm>
+            <a:off x="0" y="0"/>
+            <a:ext cx="9144000" cy="5143500"/>
+          </a:xfrm>
+          <a:prstGeom prst="rect">
+            <a:avLst/>
+          </a:prstGeom>
+          <a:solidFill>
+            <a:srgbClr val="111D35"/>
+          </a:solidFill>
+          <a:ln/>
+        </p:spPr>
+      </p:sp>
+      <p:sp>
+        <p:nvSpPr>
           <p:cNvPr id="3" name="Text 1"/>
           <p:cNvSpPr/>
           <p:nvPr/>
         </p:nvSpPr>
         <p:spPr>
           <a:xfrm>
-            <a:off x="7772400" y="4709160"/>
-            <a:ext cx="1097280" cy="320040"/>
+            <a:off x="731520" y="914400"/>
+            <a:ext cx="1828800" cy="1097280"/>
           </a:xfrm>
           <a:prstGeom prst="rect">
             <a:avLst/>
@@ -2503,21 +3801,23 @@
           <a:bodyPr wrap="square" rtlCol="0" anchor="ctr"/>
           <a:lstStyle/>
           <a:p>
-            <a:pPr algn="r" indent="0" marL="0">
+            <a:pPr indent="0" marL="0">
               <a:buNone/>
             </a:pPr>
             <a:r>
-              <a:rPr lang="en-US" sz="900" dirty="0">
+              <a:rPr lang="en-US" sz="7200" b="1" dirty="0">
                 <a:solidFill>
-                  <a:srgbClr val="6B6660"/>
+                  <a:srgbClr val="2A9D8F">
+                    <a:alpha val="70000"/>
+                  </a:srgbClr>
                 </a:solidFill>
-                <a:latin typeface="Calibri" pitchFamily="34" charset="0"/>
-                <a:ea typeface="Calibri" pitchFamily="34" charset="-122"/>
-                <a:cs typeface="Calibri" pitchFamily="34" charset="-120"/>
+                <a:latin typeface="Georgia" pitchFamily="34" charset="0"/>
+                <a:ea typeface="Georgia" pitchFamily="34" charset="-122"/>
+                <a:cs typeface="Georgia" pitchFamily="34" charset="-120"/>
               </a:rPr>
-              <a:t>4 / 5</a:t>
+              <a:t>03</a:t>
             </a:r>
-            <a:endParaRPr lang="en-US" sz="900" dirty="0"/>
+            <a:endParaRPr lang="en-US" sz="7200" dirty="0"/>
           </a:p>
         </p:txBody>
       </p:sp>
@@ -2529,8 +3829,8 @@
         </p:nvSpPr>
         <p:spPr>
           <a:xfrm>
-            <a:off x="457200" y="274320"/>
-            <a:ext cx="8229600" cy="640080"/>
+            <a:off x="731520" y="2011680"/>
+            <a:ext cx="7680960" cy="1097280"/>
           </a:xfrm>
           <a:prstGeom prst="rect">
             <a:avLst/>
@@ -2546,17 +3846,17 @@
               <a:buNone/>
             </a:pPr>
             <a:r>
-              <a:rPr lang="en-US" sz="2600" b="1" dirty="0">
+              <a:rPr lang="en-US" sz="3200" b="1" dirty="0">
                 <a:solidFill>
-                  <a:srgbClr val="1B2A4A"/>
+                  <a:srgbClr val="FFFFFF"/>
                 </a:solidFill>
                 <a:latin typeface="Georgia" pitchFamily="34" charset="0"/>
                 <a:ea typeface="Georgia" pitchFamily="34" charset="-122"/>
                 <a:cs typeface="Georgia" pitchFamily="34" charset="-120"/>
               </a:rPr>
-              <a:t>Drift, Quakes &amp; Volcanoes</a:t>
+              <a:t>Continental Drift</a:t>
             </a:r>
-            <a:endParaRPr lang="en-US" sz="2600" dirty="0"/>
+            <a:endParaRPr lang="en-US" sz="3200" dirty="0"/>
           </a:p>
         </p:txBody>
       </p:sp>
@@ -2568,40 +3868,8 @@
         </p:nvSpPr>
         <p:spPr>
           <a:xfrm>
-            <a:off x="457200" y="1188720"/>
-            <a:ext cx="2560320" cy="1828800"/>
-          </a:xfrm>
-          <a:prstGeom prst="rect">
-            <a:avLst/>
-          </a:prstGeom>
-          <a:solidFill>
-            <a:srgbClr val="FFFFFF"/>
-          </a:solidFill>
-          <a:ln w="12700">
-            <a:solidFill>
-              <a:srgbClr val="E5E2DC"/>
-            </a:solidFill>
-            <a:prstDash val="solid"/>
-          </a:ln>
-          <a:effectLst>
-            <a:outerShdw sx="100000" sy="100000" kx="0" ky="0" algn="bl" rotWithShape="0" blurRad="50800" dist="25400" dir="8100000">
-              <a:srgbClr val="000000">
-                <a:alpha val="10000"/>
-              </a:srgbClr>
-            </a:outerShdw>
-          </a:effectLst>
-        </p:spPr>
-      </p:sp>
-      <p:sp>
-        <p:nvSpPr>
-          <p:cNvPr id="6" name="Shape 4"/>
-          <p:cNvSpPr/>
-          <p:nvPr/>
-        </p:nvSpPr>
-        <p:spPr>
-          <a:xfrm>
-            <a:off x="457200" y="1188720"/>
-            <a:ext cx="2560320" cy="54864"/>
+            <a:off x="731520" y="3200400"/>
+            <a:ext cx="1828800" cy="54864"/>
           </a:xfrm>
           <a:prstGeom prst="rect">
             <a:avLst/>
@@ -2612,344 +3880,6 @@
           <a:ln/>
         </p:spPr>
       </p:sp>
-      <p:sp>
-        <p:nvSpPr>
-          <p:cNvPr id="7" name="Text 5"/>
-          <p:cNvSpPr/>
-          <p:nvPr/>
-        </p:nvSpPr>
-        <p:spPr>
-          <a:xfrm>
-            <a:off x="594360" y="1325880"/>
-            <a:ext cx="2286000" cy="365760"/>
-          </a:xfrm>
-          <a:prstGeom prst="rect">
-            <a:avLst/>
-          </a:prstGeom>
-          <a:noFill/>
-          <a:ln/>
-        </p:spPr>
-        <p:txBody>
-          <a:bodyPr wrap="square" rtlCol="0" anchor="ctr"/>
-          <a:lstStyle/>
-          <a:p>
-            <a:pPr indent="0" marL="0">
-              <a:buNone/>
-            </a:pPr>
-            <a:r>
-              <a:rPr lang="en-US" sz="1400" b="1" dirty="0">
-                <a:solidFill>
-                  <a:srgbClr val="1B2A4A"/>
-                </a:solidFill>
-                <a:latin typeface="Calibri" pitchFamily="34" charset="0"/>
-                <a:ea typeface="Calibri" pitchFamily="34" charset="-122"/>
-                <a:cs typeface="Calibri" pitchFamily="34" charset="-120"/>
-              </a:rPr>
-              <a:t>Continental Drift</a:t>
-            </a:r>
-            <a:endParaRPr lang="en-US" sz="1400" dirty="0"/>
-          </a:p>
-        </p:txBody>
-      </p:sp>
-      <p:sp>
-        <p:nvSpPr>
-          <p:cNvPr id="8" name="Text 6"/>
-          <p:cNvSpPr/>
-          <p:nvPr/>
-        </p:nvSpPr>
-        <p:spPr>
-          <a:xfrm>
-            <a:off x="594360" y="1737360"/>
-            <a:ext cx="2286000" cy="1097280"/>
-          </a:xfrm>
-          <a:prstGeom prst="rect">
-            <a:avLst/>
-          </a:prstGeom>
-          <a:noFill/>
-          <a:ln/>
-        </p:spPr>
-        <p:txBody>
-          <a:bodyPr wrap="square" rtlCol="0" anchor="t"/>
-          <a:lstStyle/>
-          <a:p>
-            <a:pPr indent="0" marL="0">
-              <a:buNone/>
-            </a:pPr>
-            <a:r>
-              <a:rPr lang="en-US" sz="1100" dirty="0">
-                <a:solidFill>
-                  <a:srgbClr val="3D3A36"/>
-                </a:solidFill>
-                <a:latin typeface="Calibri" pitchFamily="34" charset="0"/>
-                <a:ea typeface="Calibri" pitchFamily="34" charset="-122"/>
-                <a:cs typeface="Calibri" pitchFamily="34" charset="-120"/>
-              </a:rPr>
-              <a:t>Wegener, 1912. Pangaea. Evidence: jigsaw fit, fossils, rocks, glacial marks. Rejected — no mechanism. Accepted 1960s with sea-floor spreading.</a:t>
-            </a:r>
-            <a:endParaRPr lang="en-US" sz="1100" dirty="0"/>
-          </a:p>
-        </p:txBody>
-      </p:sp>
-      <p:sp>
-        <p:nvSpPr>
-          <p:cNvPr id="9" name="Shape 7"/>
-          <p:cNvSpPr/>
-          <p:nvPr/>
-        </p:nvSpPr>
-        <p:spPr>
-          <a:xfrm>
-            <a:off x="3291840" y="1188720"/>
-            <a:ext cx="2560320" cy="1828800"/>
-          </a:xfrm>
-          <a:prstGeom prst="rect">
-            <a:avLst/>
-          </a:prstGeom>
-          <a:solidFill>
-            <a:srgbClr val="FFFFFF"/>
-          </a:solidFill>
-          <a:ln w="12700">
-            <a:solidFill>
-              <a:srgbClr val="E5E2DC"/>
-            </a:solidFill>
-            <a:prstDash val="solid"/>
-          </a:ln>
-          <a:effectLst>
-            <a:outerShdw sx="100000" sy="100000" kx="0" ky="0" algn="bl" rotWithShape="0" blurRad="50800" dist="25400" dir="8100000">
-              <a:srgbClr val="000000">
-                <a:alpha val="10000"/>
-              </a:srgbClr>
-            </a:outerShdw>
-          </a:effectLst>
-        </p:spPr>
-      </p:sp>
-      <p:sp>
-        <p:nvSpPr>
-          <p:cNvPr id="10" name="Shape 8"/>
-          <p:cNvSpPr/>
-          <p:nvPr/>
-        </p:nvSpPr>
-        <p:spPr>
-          <a:xfrm>
-            <a:off x="3291840" y="1188720"/>
-            <a:ext cx="2560320" cy="54864"/>
-          </a:xfrm>
-          <a:prstGeom prst="rect">
-            <a:avLst/>
-          </a:prstGeom>
-          <a:solidFill>
-            <a:srgbClr val="2A9D8F"/>
-          </a:solidFill>
-          <a:ln/>
-        </p:spPr>
-      </p:sp>
-      <p:sp>
-        <p:nvSpPr>
-          <p:cNvPr id="11" name="Text 9"/>
-          <p:cNvSpPr/>
-          <p:nvPr/>
-        </p:nvSpPr>
-        <p:spPr>
-          <a:xfrm>
-            <a:off x="3429000" y="1325880"/>
-            <a:ext cx="2286000" cy="365760"/>
-          </a:xfrm>
-          <a:prstGeom prst="rect">
-            <a:avLst/>
-          </a:prstGeom>
-          <a:noFill/>
-          <a:ln/>
-        </p:spPr>
-        <p:txBody>
-          <a:bodyPr wrap="square" rtlCol="0" anchor="ctr"/>
-          <a:lstStyle/>
-          <a:p>
-            <a:pPr indent="0" marL="0">
-              <a:buNone/>
-            </a:pPr>
-            <a:r>
-              <a:rPr lang="en-US" sz="1400" b="1" dirty="0">
-                <a:solidFill>
-                  <a:srgbClr val="1B2A4A"/>
-                </a:solidFill>
-                <a:latin typeface="Calibri" pitchFamily="34" charset="0"/>
-                <a:ea typeface="Calibri" pitchFamily="34" charset="-122"/>
-                <a:cs typeface="Calibri" pitchFamily="34" charset="-120"/>
-              </a:rPr>
-              <a:t>Earthquakes</a:t>
-            </a:r>
-            <a:endParaRPr lang="en-US" sz="1400" dirty="0"/>
-          </a:p>
-        </p:txBody>
-      </p:sp>
-      <p:sp>
-        <p:nvSpPr>
-          <p:cNvPr id="12" name="Text 10"/>
-          <p:cNvSpPr/>
-          <p:nvPr/>
-        </p:nvSpPr>
-        <p:spPr>
-          <a:xfrm>
-            <a:off x="3429000" y="1737360"/>
-            <a:ext cx="2286000" cy="1097280"/>
-          </a:xfrm>
-          <a:prstGeom prst="rect">
-            <a:avLst/>
-          </a:prstGeom>
-          <a:noFill/>
-          <a:ln/>
-        </p:spPr>
-        <p:txBody>
-          <a:bodyPr wrap="square" rtlCol="0" anchor="t"/>
-          <a:lstStyle/>
-          <a:p>
-            <a:pPr indent="0" marL="0">
-              <a:buNone/>
-            </a:pPr>
-            <a:r>
-              <a:rPr lang="en-US" sz="1100" dirty="0">
-                <a:solidFill>
-                  <a:srgbClr val="3D3A36"/>
-                </a:solidFill>
-                <a:latin typeface="Calibri" pitchFamily="34" charset="0"/>
-                <a:ea typeface="Calibri" pitchFamily="34" charset="-122"/>
-                <a:cs typeface="Calibri" pitchFamily="34" charset="-120"/>
-              </a:rPr>
-              <a:t>Friction → pressure → seismic waves. Focus (underground) vs epicentre (surface). Richter scale. Ring of Fire: 90% of earthquakes.</a:t>
-            </a:r>
-            <a:endParaRPr lang="en-US" sz="1100" dirty="0"/>
-          </a:p>
-        </p:txBody>
-      </p:sp>
-      <p:sp>
-        <p:nvSpPr>
-          <p:cNvPr id="13" name="Shape 11"/>
-          <p:cNvSpPr/>
-          <p:nvPr/>
-        </p:nvSpPr>
-        <p:spPr>
-          <a:xfrm>
-            <a:off x="6126480" y="1188720"/>
-            <a:ext cx="2560320" cy="1828800"/>
-          </a:xfrm>
-          <a:prstGeom prst="rect">
-            <a:avLst/>
-          </a:prstGeom>
-          <a:solidFill>
-            <a:srgbClr val="FFFFFF"/>
-          </a:solidFill>
-          <a:ln w="12700">
-            <a:solidFill>
-              <a:srgbClr val="E5E2DC"/>
-            </a:solidFill>
-            <a:prstDash val="solid"/>
-          </a:ln>
-          <a:effectLst>
-            <a:outerShdw sx="100000" sy="100000" kx="0" ky="0" algn="bl" rotWithShape="0" blurRad="50800" dist="25400" dir="8100000">
-              <a:srgbClr val="000000">
-                <a:alpha val="10000"/>
-              </a:srgbClr>
-            </a:outerShdw>
-          </a:effectLst>
-        </p:spPr>
-      </p:sp>
-      <p:sp>
-        <p:nvSpPr>
-          <p:cNvPr id="14" name="Shape 12"/>
-          <p:cNvSpPr/>
-          <p:nvPr/>
-        </p:nvSpPr>
-        <p:spPr>
-          <a:xfrm>
-            <a:off x="6126480" y="1188720"/>
-            <a:ext cx="2560320" cy="54864"/>
-          </a:xfrm>
-          <a:prstGeom prst="rect">
-            <a:avLst/>
-          </a:prstGeom>
-          <a:solidFill>
-            <a:srgbClr val="2A9D8F"/>
-          </a:solidFill>
-          <a:ln/>
-        </p:spPr>
-      </p:sp>
-      <p:sp>
-        <p:nvSpPr>
-          <p:cNvPr id="15" name="Text 13"/>
-          <p:cNvSpPr/>
-          <p:nvPr/>
-        </p:nvSpPr>
-        <p:spPr>
-          <a:xfrm>
-            <a:off x="6263640" y="1325880"/>
-            <a:ext cx="2286000" cy="365760"/>
-          </a:xfrm>
-          <a:prstGeom prst="rect">
-            <a:avLst/>
-          </a:prstGeom>
-          <a:noFill/>
-          <a:ln/>
-        </p:spPr>
-        <p:txBody>
-          <a:bodyPr wrap="square" rtlCol="0" anchor="ctr"/>
-          <a:lstStyle/>
-          <a:p>
-            <a:pPr indent="0" marL="0">
-              <a:buNone/>
-            </a:pPr>
-            <a:r>
-              <a:rPr lang="en-US" sz="1400" b="1" dirty="0">
-                <a:solidFill>
-                  <a:srgbClr val="1B2A4A"/>
-                </a:solidFill>
-                <a:latin typeface="Calibri" pitchFamily="34" charset="0"/>
-                <a:ea typeface="Calibri" pitchFamily="34" charset="-122"/>
-                <a:cs typeface="Calibri" pitchFamily="34" charset="-120"/>
-              </a:rPr>
-              <a:t>Volcanoes</a:t>
-            </a:r>
-            <a:endParaRPr lang="en-US" sz="1400" dirty="0"/>
-          </a:p>
-        </p:txBody>
-      </p:sp>
-      <p:sp>
-        <p:nvSpPr>
-          <p:cNvPr id="16" name="Text 14"/>
-          <p:cNvSpPr/>
-          <p:nvPr/>
-        </p:nvSpPr>
-        <p:spPr>
-          <a:xfrm>
-            <a:off x="6263640" y="1737360"/>
-            <a:ext cx="2286000" cy="1097280"/>
-          </a:xfrm>
-          <a:prstGeom prst="rect">
-            <a:avLst/>
-          </a:prstGeom>
-          <a:noFill/>
-          <a:ln/>
-        </p:spPr>
-        <p:txBody>
-          <a:bodyPr wrap="square" rtlCol="0" anchor="t"/>
-          <a:lstStyle/>
-          <a:p>
-            <a:pPr indent="0" marL="0">
-              <a:buNone/>
-            </a:pPr>
-            <a:r>
-              <a:rPr lang="en-US" sz="1100" dirty="0">
-                <a:solidFill>
-                  <a:srgbClr val="3D3A36"/>
-                </a:solidFill>
-                <a:latin typeface="Calibri" pitchFamily="34" charset="0"/>
-                <a:ea typeface="Calibri" pitchFamily="34" charset="-122"/>
-                <a:cs typeface="Calibri" pitchFamily="34" charset="-120"/>
-              </a:rPr>
-              <a:t>Convergent, divergent, hotspots. Explosive (thick lava) vs effusive (thin lava). Benefits: fertile soil, geothermal energy, minerals.</a:t>
-            </a:r>
-            <a:endParaRPr lang="en-US" sz="1100" dirty="0"/>
-          </a:p>
-        </p:txBody>
-      </p:sp>
     </p:spTree>
   </p:cSld>
   <p:clrMapOvr>
@@ -2958,13 +3888,13 @@
 </p:sld>
 </file>
 
-<file path=ppt/slides/slide5.xml><?xml version="1.0" encoding="utf-8"?>
+<file path=ppt/slides/slide7.xml><?xml version="1.0" encoding="utf-8"?>
 <p:sld xmlns:a="http://schemas.openxmlformats.org/drawingml/2006/main" xmlns:r="http://schemas.openxmlformats.org/officeDocument/2006/relationships" xmlns:p="http://schemas.openxmlformats.org/presentationml/2006/main">
-  <p:cSld name="Slide 5">
+  <p:cSld name="Slide 7">
     <p:bg>
       <p:bgPr>
         <a:solidFill>
-          <a:srgbClr val="1B2A4A"/>
+          <a:srgbClr val="FAF8F5"/>
         </a:solidFill>
       </p:bgPr>
     </p:bg>
@@ -2991,27 +3921,257 @@
         <p:spPr>
           <a:xfrm>
             <a:off x="0" y="0"/>
-            <a:ext cx="109728" cy="5143500"/>
+            <a:ext cx="9144000" cy="822960"/>
           </a:xfrm>
           <a:prstGeom prst="rect">
             <a:avLst/>
           </a:prstGeom>
           <a:solidFill>
-            <a:srgbClr val="E9C46A"/>
+            <a:srgbClr val="FFFFFF"/>
           </a:solidFill>
           <a:ln/>
         </p:spPr>
       </p:sp>
       <p:sp>
         <p:nvSpPr>
+          <p:cNvPr id="3" name="Shape 1"/>
+          <p:cNvSpPr/>
+          <p:nvPr/>
+        </p:nvSpPr>
+        <p:spPr>
+          <a:xfrm>
+            <a:off x="0" y="795528"/>
+            <a:ext cx="9144000" cy="27432"/>
+          </a:xfrm>
+          <a:prstGeom prst="rect">
+            <a:avLst/>
+          </a:prstGeom>
+          <a:solidFill>
+            <a:srgbClr val="2A9D8F"/>
+          </a:solidFill>
+          <a:ln/>
+        </p:spPr>
+      </p:sp>
+      <p:sp>
+        <p:nvSpPr>
+          <p:cNvPr id="4" name="Text 2"/>
+          <p:cNvSpPr/>
+          <p:nvPr/>
+        </p:nvSpPr>
+        <p:spPr>
+          <a:xfrm>
+            <a:off x="640080" y="91440"/>
+            <a:ext cx="7863840" cy="640080"/>
+          </a:xfrm>
+          <a:prstGeom prst="rect">
+            <a:avLst/>
+          </a:prstGeom>
+          <a:noFill/>
+          <a:ln/>
+        </p:spPr>
+        <p:txBody>
+          <a:bodyPr wrap="square" lIns="0" tIns="0" rIns="0" bIns="0" rtlCol="0" anchor="ctr"/>
+          <a:lstStyle/>
+          <a:p>
+            <a:pPr indent="0" marL="0">
+              <a:buNone/>
+            </a:pPr>
+            <a:r>
+              <a:rPr lang="en-US" sz="2200" b="1" dirty="0">
+                <a:solidFill>
+                  <a:srgbClr val="1B2A4A"/>
+                </a:solidFill>
+                <a:latin typeface="Georgia" pitchFamily="34" charset="0"/>
+                <a:ea typeface="Georgia" pitchFamily="34" charset="-122"/>
+                <a:cs typeface="Georgia" pitchFamily="34" charset="-120"/>
+              </a:rPr>
+              <a:t>Drift Recap</a:t>
+            </a:r>
+            <a:endParaRPr lang="en-US" sz="2200" dirty="0"/>
+          </a:p>
+        </p:txBody>
+      </p:sp>
+      <p:sp>
+        <p:nvSpPr>
+          <p:cNvPr id="5" name="Text 3"/>
+          <p:cNvSpPr/>
+          <p:nvPr/>
+        </p:nvSpPr>
+        <p:spPr>
+          <a:xfrm>
+            <a:off x="640080" y="1005840"/>
+            <a:ext cx="7863840" cy="2926080"/>
+          </a:xfrm>
+          <a:prstGeom prst="rect">
+            <a:avLst/>
+          </a:prstGeom>
+          <a:noFill/>
+          <a:ln/>
+        </p:spPr>
+        <p:txBody>
+          <a:bodyPr wrap="square" rtlCol="0" anchor="ctr"/>
+          <a:lstStyle/>
+          <a:p>
+            <a:pPr marL="342900" indent="-342900">
+              <a:spcAft>
+                <a:spcPts val="800"/>
+              </a:spcAft>
+              <a:buSzPct val="100000"/>
+              <a:buChar char="•"/>
+            </a:pPr>
+            <a:r>
+              <a:rPr lang="en-US" sz="1600" dirty="0">
+                <a:solidFill>
+                  <a:srgbClr val="3D3A36"/>
+                </a:solidFill>
+                <a:latin typeface="Calibri" pitchFamily="34" charset="0"/>
+                <a:ea typeface="Calibri" pitchFamily="34" charset="-122"/>
+                <a:cs typeface="Calibri" pitchFamily="34" charset="-120"/>
+              </a:rPr>
+              <a:t>Wegener (German, 1912): Pangaea — all continents joined.</a:t>
+            </a:r>
+            <a:endParaRPr lang="en-US" sz="1600" dirty="0"/>
+          </a:p>
+          <a:p>
+            <a:pPr marL="342900" indent="-342900">
+              <a:spcAft>
+                <a:spcPts val="800"/>
+              </a:spcAft>
+              <a:buSzPct val="100000"/>
+              <a:buChar char="•"/>
+            </a:pPr>
+            <a:r>
+              <a:rPr lang="en-US" sz="1600" dirty="0">
+                <a:solidFill>
+                  <a:srgbClr val="3D3A36"/>
+                </a:solidFill>
+                <a:latin typeface="Calibri" pitchFamily="34" charset="0"/>
+                <a:ea typeface="Calibri" pitchFamily="34" charset="-122"/>
+                <a:cs typeface="Calibri" pitchFamily="34" charset="-120"/>
+              </a:rPr>
+              <a:t>Evidence: coastline fit, matching fossils (China &amp; Antarctica), rocks, climate.</a:t>
+            </a:r>
+            <a:endParaRPr lang="en-US" sz="1600" dirty="0"/>
+          </a:p>
+          <a:p>
+            <a:pPr marL="342900" indent="-342900">
+              <a:spcAft>
+                <a:spcPts val="800"/>
+              </a:spcAft>
+              <a:buSzPct val="100000"/>
+              <a:buChar char="•"/>
+            </a:pPr>
+            <a:r>
+              <a:rPr lang="en-US" sz="1600" dirty="0">
+                <a:solidFill>
+                  <a:srgbClr val="3D3A36"/>
+                </a:solidFill>
+                <a:latin typeface="Calibri" pitchFamily="34" charset="0"/>
+                <a:ea typeface="Calibri" pitchFamily="34" charset="-122"/>
+                <a:cs typeface="Calibri" pitchFamily="34" charset="-120"/>
+              </a:rPr>
+              <a:t>Rejected because no mechanism — solved by sea-floor spreading (1960s).</a:t>
+            </a:r>
+            <a:endParaRPr lang="en-US" sz="1600" dirty="0"/>
+          </a:p>
+        </p:txBody>
+      </p:sp>
+    </p:spTree>
+  </p:cSld>
+  <p:clrMapOvr>
+    <a:masterClrMapping/>
+  </p:clrMapOvr>
+</p:sld>
+</file>
+
+<file path=ppt/slides/slide8.xml><?xml version="1.0" encoding="utf-8"?>
+<p:sld xmlns:a="http://schemas.openxmlformats.org/drawingml/2006/main" xmlns:r="http://schemas.openxmlformats.org/officeDocument/2006/relationships" xmlns:p="http://schemas.openxmlformats.org/presentationml/2006/main">
+  <p:cSld name="Slide 8">
+    <p:spTree>
+      <p:nvGrpSpPr>
+        <p:cNvPr id="1" name=""/>
+        <p:cNvGrpSpPr/>
+        <p:nvPr/>
+      </p:nvGrpSpPr>
+      <p:grpSpPr>
+        <a:xfrm>
+          <a:off x="0" y="0"/>
+          <a:ext cx="0" cy="0"/>
+          <a:chOff x="0" y="0"/>
+          <a:chExt cx="0" cy="0"/>
+        </a:xfrm>
+      </p:grpSpPr>
+      <p:sp>
+        <p:nvSpPr>
+          <p:cNvPr id="2" name="Shape 0"/>
+          <p:cNvSpPr/>
+          <p:nvPr/>
+        </p:nvSpPr>
+        <p:spPr>
+          <a:xfrm>
+            <a:off x="0" y="0"/>
+            <a:ext cx="9144000" cy="5143500"/>
+          </a:xfrm>
+          <a:prstGeom prst="rect">
+            <a:avLst/>
+          </a:prstGeom>
+          <a:solidFill>
+            <a:srgbClr val="111D35"/>
+          </a:solidFill>
+          <a:ln/>
+        </p:spPr>
+      </p:sp>
+      <p:sp>
+        <p:nvSpPr>
           <p:cNvPr id="3" name="Text 1"/>
           <p:cNvSpPr/>
           <p:nvPr/>
         </p:nvSpPr>
         <p:spPr>
           <a:xfrm>
-            <a:off x="731520" y="457200"/>
-            <a:ext cx="7772400" cy="731520"/>
+            <a:off x="731520" y="914400"/>
+            <a:ext cx="1828800" cy="1097280"/>
+          </a:xfrm>
+          <a:prstGeom prst="rect">
+            <a:avLst/>
+          </a:prstGeom>
+          <a:noFill/>
+          <a:ln/>
+        </p:spPr>
+        <p:txBody>
+          <a:bodyPr wrap="square" rtlCol="0" anchor="ctr"/>
+          <a:lstStyle/>
+          <a:p>
+            <a:pPr indent="0" marL="0">
+              <a:buNone/>
+            </a:pPr>
+            <a:r>
+              <a:rPr lang="en-US" sz="7200" b="1" dirty="0">
+                <a:solidFill>
+                  <a:srgbClr val="2A9D8F">
+                    <a:alpha val="70000"/>
+                  </a:srgbClr>
+                </a:solidFill>
+                <a:latin typeface="Georgia" pitchFamily="34" charset="0"/>
+                <a:ea typeface="Georgia" pitchFamily="34" charset="-122"/>
+                <a:cs typeface="Georgia" pitchFamily="34" charset="-120"/>
+              </a:rPr>
+              <a:t>04</a:t>
+            </a:r>
+            <a:endParaRPr lang="en-US" sz="7200" dirty="0"/>
+          </a:p>
+        </p:txBody>
+      </p:sp>
+      <p:sp>
+        <p:nvSpPr>
+          <p:cNvPr id="4" name="Text 2"/>
+          <p:cNvSpPr/>
+          <p:nvPr/>
+        </p:nvSpPr>
+        <p:spPr>
+          <a:xfrm>
+            <a:off x="731520" y="2011680"/>
+            <a:ext cx="7680960" cy="1097280"/>
           </a:xfrm>
           <a:prstGeom prst="rect">
             <a:avLst/>
@@ -3035,11 +4195,103 @@
                 <a:ea typeface="Georgia" pitchFamily="34" charset="-122"/>
                 <a:cs typeface="Georgia" pitchFamily="34" charset="-120"/>
               </a:rPr>
-              <a:t>Key Takeaways</a:t>
+              <a:t>Earthquakes &amp; Volcanoes</a:t>
             </a:r>
             <a:endParaRPr lang="en-US" sz="3200" dirty="0"/>
           </a:p>
         </p:txBody>
+      </p:sp>
+      <p:sp>
+        <p:nvSpPr>
+          <p:cNvPr id="5" name="Shape 3"/>
+          <p:cNvSpPr/>
+          <p:nvPr/>
+        </p:nvSpPr>
+        <p:spPr>
+          <a:xfrm>
+            <a:off x="731520" y="3200400"/>
+            <a:ext cx="1828800" cy="54864"/>
+          </a:xfrm>
+          <a:prstGeom prst="rect">
+            <a:avLst/>
+          </a:prstGeom>
+          <a:solidFill>
+            <a:srgbClr val="2A9D8F"/>
+          </a:solidFill>
+          <a:ln/>
+        </p:spPr>
+      </p:sp>
+    </p:spTree>
+  </p:cSld>
+  <p:clrMapOvr>
+    <a:masterClrMapping/>
+  </p:clrMapOvr>
+</p:sld>
+</file>
+
+<file path=ppt/slides/slide9.xml><?xml version="1.0" encoding="utf-8"?>
+<p:sld xmlns:a="http://schemas.openxmlformats.org/drawingml/2006/main" xmlns:r="http://schemas.openxmlformats.org/officeDocument/2006/relationships" xmlns:p="http://schemas.openxmlformats.org/presentationml/2006/main">
+  <p:cSld name="Slide 9">
+    <p:bg>
+      <p:bgPr>
+        <a:solidFill>
+          <a:srgbClr val="FAF8F5"/>
+        </a:solidFill>
+      </p:bgPr>
+    </p:bg>
+    <p:spTree>
+      <p:nvGrpSpPr>
+        <p:cNvPr id="1" name=""/>
+        <p:cNvGrpSpPr/>
+        <p:nvPr/>
+      </p:nvGrpSpPr>
+      <p:grpSpPr>
+        <a:xfrm>
+          <a:off x="0" y="0"/>
+          <a:ext cx="0" cy="0"/>
+          <a:chOff x="0" y="0"/>
+          <a:chExt cx="0" cy="0"/>
+        </a:xfrm>
+      </p:grpSpPr>
+      <p:sp>
+        <p:nvSpPr>
+          <p:cNvPr id="2" name="Shape 0"/>
+          <p:cNvSpPr/>
+          <p:nvPr/>
+        </p:nvSpPr>
+        <p:spPr>
+          <a:xfrm>
+            <a:off x="0" y="0"/>
+            <a:ext cx="9144000" cy="822960"/>
+          </a:xfrm>
+          <a:prstGeom prst="rect">
+            <a:avLst/>
+          </a:prstGeom>
+          <a:solidFill>
+            <a:srgbClr val="FFFFFF"/>
+          </a:solidFill>
+          <a:ln/>
+        </p:spPr>
+      </p:sp>
+      <p:sp>
+        <p:nvSpPr>
+          <p:cNvPr id="3" name="Shape 1"/>
+          <p:cNvSpPr/>
+          <p:nvPr/>
+        </p:nvSpPr>
+        <p:spPr>
+          <a:xfrm>
+            <a:off x="0" y="795528"/>
+            <a:ext cx="9144000" cy="27432"/>
+          </a:xfrm>
+          <a:prstGeom prst="rect">
+            <a:avLst/>
+          </a:prstGeom>
+          <a:solidFill>
+            <a:srgbClr val="2A9D8F"/>
+          </a:solidFill>
+          <a:ln/>
+        </p:spPr>
       </p:sp>
       <p:sp>
         <p:nvSpPr>
@@ -3049,8 +4301,8 @@
         </p:nvSpPr>
         <p:spPr>
           <a:xfrm>
-            <a:off x="731520" y="1463040"/>
-            <a:ext cx="7772400" cy="3200400"/>
+            <a:off x="640080" y="91440"/>
+            <a:ext cx="7863840" cy="640080"/>
           </a:xfrm>
           <a:prstGeom prst="rect">
             <a:avLst/>
@@ -3059,112 +4311,24 @@
           <a:ln/>
         </p:spPr>
         <p:txBody>
-          <a:bodyPr wrap="square" rtlCol="0" anchor="t"/>
+          <a:bodyPr wrap="square" lIns="0" tIns="0" rIns="0" bIns="0" rtlCol="0" anchor="ctr"/>
           <a:lstStyle/>
           <a:p>
-            <a:pPr marL="342900" indent="-342900">
-              <a:spcAft>
-                <a:spcPts val="1000"/>
-              </a:spcAft>
-              <a:buSzPct val="100000"/>
-              <a:buChar char="•"/>
+            <a:pPr indent="0" marL="0">
+              <a:buNone/>
             </a:pPr>
             <a:r>
-              <a:rPr lang="en-US" sz="1500" dirty="0">
+              <a:rPr lang="en-US" sz="2200" b="1" dirty="0">
                 <a:solidFill>
-                  <a:srgbClr val="CADCFC"/>
+                  <a:srgbClr val="1B2A4A"/>
                 </a:solidFill>
-                <a:latin typeface="Calibri" pitchFamily="34" charset="0"/>
-                <a:ea typeface="Calibri" pitchFamily="34" charset="-122"/>
-                <a:cs typeface="Calibri" pitchFamily="34" charset="-120"/>
+                <a:latin typeface="Georgia" pitchFamily="34" charset="0"/>
+                <a:ea typeface="Georgia" pitchFamily="34" charset="-122"/>
+                <a:cs typeface="Georgia" pitchFamily="34" charset="-120"/>
               </a:rPr>
-              <a:t>Layers: crust, mantle, outer core (liquid), inner core (solid)</a:t>
+              <a:t>The Big Picture</a:t>
             </a:r>
-            <a:endParaRPr lang="en-US" sz="1500" dirty="0"/>
-          </a:p>
-          <a:p>
-            <a:pPr marL="342900" indent="-342900">
-              <a:spcAft>
-                <a:spcPts val="1000"/>
-              </a:spcAft>
-              <a:buSzPct val="100000"/>
-              <a:buChar char="•"/>
-            </a:pPr>
-            <a:r>
-              <a:rPr lang="en-US" sz="1500" dirty="0">
-                <a:solidFill>
-                  <a:srgbClr val="CADCFC"/>
-                </a:solidFill>
-                <a:latin typeface="Calibri" pitchFamily="34" charset="0"/>
-                <a:ea typeface="Calibri" pitchFamily="34" charset="-122"/>
-                <a:cs typeface="Calibri" pitchFamily="34" charset="-120"/>
-              </a:rPr>
-              <a:t>Convection drives plates: hot rises, cools, sinks</a:t>
-            </a:r>
-            <a:endParaRPr lang="en-US" sz="1500" dirty="0"/>
-          </a:p>
-          <a:p>
-            <a:pPr marL="342900" indent="-342900">
-              <a:spcAft>
-                <a:spcPts val="1000"/>
-              </a:spcAft>
-              <a:buSzPct val="100000"/>
-              <a:buChar char="•"/>
-            </a:pPr>
-            <a:r>
-              <a:rPr lang="en-US" sz="1500" dirty="0">
-                <a:solidFill>
-                  <a:srgbClr val="CADCFC"/>
-                </a:solidFill>
-                <a:latin typeface="Calibri" pitchFamily="34" charset="0"/>
-                <a:ea typeface="Calibri" pitchFamily="34" charset="-122"/>
-                <a:cs typeface="Calibri" pitchFamily="34" charset="-120"/>
-              </a:rPr>
-              <a:t>Three boundaries: divergent (apart), convergent (together), transform (sideways)</a:t>
-            </a:r>
-            <a:endParaRPr lang="en-US" sz="1500" dirty="0"/>
-          </a:p>
-          <a:p>
-            <a:pPr marL="342900" indent="-342900">
-              <a:spcAft>
-                <a:spcPts val="1000"/>
-              </a:spcAft>
-              <a:buSzPct val="100000"/>
-              <a:buChar char="•"/>
-            </a:pPr>
-            <a:r>
-              <a:rPr lang="en-US" sz="1500" dirty="0">
-                <a:solidFill>
-                  <a:srgbClr val="CADCFC"/>
-                </a:solidFill>
-                <a:latin typeface="Calibri" pitchFamily="34" charset="0"/>
-                <a:ea typeface="Calibri" pitchFamily="34" charset="-122"/>
-                <a:cs typeface="Calibri" pitchFamily="34" charset="-120"/>
-              </a:rPr>
-              <a:t>Wegener's evidence: jigsaw fit, fossils, rocks — accepted with sea-floor spreading</a:t>
-            </a:r>
-            <a:endParaRPr lang="en-US" sz="1500" dirty="0"/>
-          </a:p>
-          <a:p>
-            <a:pPr marL="342900" indent="-342900">
-              <a:spcAft>
-                <a:spcPts val="1000"/>
-              </a:spcAft>
-              <a:buSzPct val="100000"/>
-              <a:buChar char="•"/>
-            </a:pPr>
-            <a:r>
-              <a:rPr lang="en-US" sz="1500" dirty="0">
-                <a:solidFill>
-                  <a:srgbClr val="CADCFC"/>
-                </a:solidFill>
-                <a:latin typeface="Calibri" pitchFamily="34" charset="0"/>
-                <a:ea typeface="Calibri" pitchFamily="34" charset="-122"/>
-                <a:cs typeface="Calibri" pitchFamily="34" charset="-120"/>
-              </a:rPr>
-              <a:t>Ring of Fire: 75% volcanoes, 90% earthquakes around Pacific</a:t>
-            </a:r>
-            <a:endParaRPr lang="en-US" sz="1500" dirty="0"/>
+            <a:endParaRPr lang="en-US" sz="2200" dirty="0"/>
           </a:p>
         </p:txBody>
       </p:sp>
@@ -3176,8 +4340,8 @@
         </p:nvSpPr>
         <p:spPr>
           <a:xfrm>
-            <a:off x="731520" y="4572000"/>
-            <a:ext cx="7772400" cy="365760"/>
+            <a:off x="640080" y="1005840"/>
+            <a:ext cx="7863840" cy="2926080"/>
           </a:xfrm>
           <a:prstGeom prst="rect">
             <a:avLst/>
@@ -3189,21 +4353,88 @@
           <a:bodyPr wrap="square" rtlCol="0" anchor="ctr"/>
           <a:lstStyle/>
           <a:p>
-            <a:pPr indent="0" marL="0">
-              <a:buNone/>
+            <a:pPr marL="342900" indent="-342900">
+              <a:spcAft>
+                <a:spcPts val="800"/>
+              </a:spcAft>
+              <a:buSzPct val="100000"/>
+              <a:buChar char="•"/>
             </a:pPr>
             <a:r>
-              <a:rPr lang="en-US" sz="1100" dirty="0">
+              <a:rPr lang="en-US" sz="1600" dirty="0">
                 <a:solidFill>
-                  <a:srgbClr val="E9C46A"/>
+                  <a:srgbClr val="3D3A36"/>
                 </a:solidFill>
                 <a:latin typeface="Calibri" pitchFamily="34" charset="0"/>
                 <a:ea typeface="Calibri" pitchFamily="34" charset="-122"/>
                 <a:cs typeface="Calibri" pitchFamily="34" charset="-120"/>
               </a:rPr>
-              <a:t>mrzocchi.com</a:t>
+              <a:t>Core heat → convection → plate movement → surface features.</a:t>
             </a:r>
-            <a:endParaRPr lang="en-US" sz="1100" dirty="0"/>
+            <a:endParaRPr lang="en-US" sz="1600" dirty="0"/>
+          </a:p>
+          <a:p>
+            <a:pPr marL="342900" indent="-342900">
+              <a:spcAft>
+                <a:spcPts val="800"/>
+              </a:spcAft>
+              <a:buSzPct val="100000"/>
+              <a:buChar char="•"/>
+            </a:pPr>
+            <a:r>
+              <a:rPr lang="en-US" sz="1600" dirty="0">
+                <a:solidFill>
+                  <a:srgbClr val="3D3A36"/>
+                </a:solidFill>
+                <a:latin typeface="Calibri" pitchFamily="34" charset="0"/>
+                <a:ea typeface="Calibri" pitchFamily="34" charset="-122"/>
+                <a:cs typeface="Calibri" pitchFamily="34" charset="-120"/>
+              </a:rPr>
+              <a:t>Ring of Fire: Japan, Korea, China's coast.</a:t>
+            </a:r>
+            <a:endParaRPr lang="en-US" sz="1600" dirty="0"/>
+          </a:p>
+          <a:p>
+            <a:pPr marL="342900" indent="-342900">
+              <a:spcAft>
+                <a:spcPts val="800"/>
+              </a:spcAft>
+              <a:buSzPct val="100000"/>
+              <a:buChar char="•"/>
+            </a:pPr>
+            <a:r>
+              <a:rPr lang="en-US" sz="1600" dirty="0">
+                <a:solidFill>
+                  <a:srgbClr val="3D3A36"/>
+                </a:solidFill>
+                <a:latin typeface="Calibri" pitchFamily="34" charset="0"/>
+                <a:ea typeface="Calibri" pitchFamily="34" charset="-122"/>
+                <a:cs typeface="Calibri" pitchFamily="34" charset="-120"/>
+              </a:rPr>
+              <a:t>Key Concept: CHANGE — Earth is dynamic, constantly changing.</a:t>
+            </a:r>
+            <a:endParaRPr lang="en-US" sz="1600" dirty="0"/>
+          </a:p>
+          <a:p>
+            <a:pPr marL="342900" indent="-342900">
+              <a:spcAft>
+                <a:spcPts val="800"/>
+              </a:spcAft>
+              <a:buSzPct val="100000"/>
+              <a:buChar char="•"/>
+            </a:pPr>
+            <a:r>
+              <a:rPr lang="en-US" sz="1600" dirty="0">
+                <a:solidFill>
+                  <a:srgbClr val="3D3A36"/>
+                </a:solidFill>
+                <a:latin typeface="Calibri" pitchFamily="34" charset="0"/>
+                <a:ea typeface="Calibri" pitchFamily="34" charset="-122"/>
+                <a:cs typeface="Calibri" pitchFamily="34" charset="-120"/>
+              </a:rPr>
+              <a:t>Japan, Korea, China: earthquake-prepared. Germany: stable interior.</a:t>
+            </a:r>
+            <a:endParaRPr lang="en-US" sz="1600" dirty="0"/>
           </a:p>
         </p:txBody>
       </p:sp>

--- a/static/ppts/G6_Sci_Full_Revision.pptx
+++ b/static/ppts/G6_Sci_Full_Revision.pptx
@@ -13,14 +13,12 @@
     <p:sldId id="261" r:id="rId7"/>
     <p:sldId id="262" r:id="rId8"/>
     <p:sldId id="263" r:id="rId9"/>
-    <p:sldId id="264" r:id="rId10"/>
-    <p:sldId id="265" r:id="rId11"/>
   </p:sldIdLst>
   <p:notesMasterIdLst>
-    <p:notesMasterId r:id="rId12"/>
+    <p:notesMasterId r:id="rId10"/>
   </p:notesMasterIdLst>
-  <p:sldSz cx="9144000" cy="5143500"/>
-  <p:notesSz cx="5143500" cy="9144000"/>
+  <p:sldSz cx="12192000" cy="6858000"/>
+  <p:notesSz cx="6858000" cy="12192000"/>
   <p:defaultTextStyle>
     <a:lvl1pPr marL="0" algn="l" defTabSz="914400" rtl="0" eaLnBrk="1" latinLnBrk="0" hangingPunct="1">
       <a:defRPr sz="1800" kern="1200">
@@ -553,94 +551,6 @@
 </p:notes>
 </file>
 
-<file path=ppt/notesSlides/notesSlide10.xml><?xml version="1.0" encoding="utf-8"?>
-<p:notes xmlns:a="http://schemas.openxmlformats.org/drawingml/2006/main" xmlns:r="http://schemas.openxmlformats.org/officeDocument/2006/relationships" xmlns:p="http://schemas.openxmlformats.org/presentationml/2006/main">
-  <p:cSld>
-    <p:spTree>
-      <p:nvGrpSpPr>
-        <p:cNvPr id="1" name=""/>
-        <p:cNvGrpSpPr/>
-        <p:nvPr/>
-      </p:nvGrpSpPr>
-      <p:grpSpPr>
-        <a:xfrm>
-          <a:off x="0" y="0"/>
-          <a:ext cx="0" cy="0"/>
-          <a:chOff x="0" y="0"/>
-          <a:chExt cx="0" cy="0"/>
-        </a:xfrm>
-      </p:grpSpPr>
-      <p:sp>
-        <p:nvSpPr>
-          <p:cNvPr id="2" name="Slide Image Placeholder 1"/>
-          <p:cNvSpPr>
-            <a:spLocks noGrp="1" noRot="1" noChangeAspect="1"/>
-          </p:cNvSpPr>
-          <p:nvPr>
-            <p:ph type="sldImg"/>
-          </p:nvPr>
-        </p:nvSpPr>
-        <p:spPr/>
-      </p:sp>
-      <p:sp>
-        <p:nvSpPr>
-          <p:cNvPr id="3" name="Notes Placeholder 2"/>
-          <p:cNvSpPr>
-            <a:spLocks noGrp="1"/>
-          </p:cNvSpPr>
-          <p:nvPr>
-            <p:ph type="body" idx="1"/>
-          </p:nvPr>
-        </p:nvSpPr>
-        <p:spPr/>
-        <p:txBody>
-          <a:bodyPr/>
-          <a:lstStyle/>
-          <a:p>
-            <a:r>
-              <a:rPr lang="en-US" dirty="0"/>
-              <a:t/>
-            </a:r>
-            <a:endParaRPr lang="en-US" dirty="0"/>
-          </a:p>
-        </p:txBody>
-      </p:sp>
-      <p:sp>
-        <p:nvSpPr>
-          <p:cNvPr id="4" name="Slide Number Placeholder 3"/>
-          <p:cNvSpPr>
-            <a:spLocks noGrp="1"/>
-          </p:cNvSpPr>
-          <p:nvPr>
-            <p:ph type="sldNum" sz="quarter" idx="10"/>
-          </p:nvPr>
-        </p:nvSpPr>
-        <p:spPr/>
-        <p:txBody>
-          <a:bodyPr/>
-          <a:lstStyle/>
-          <a:p>
-            <a:fld id="{F7021451-1387-4CA6-816F-3879F97B5CBC}" type="slidenum">
-              <a:rPr lang="en-US"/>
-              <a:t>10</a:t>
-            </a:fld>
-            <a:endParaRPr lang="en-US"/>
-          </a:p>
-        </p:txBody>
-      </p:sp>
-    </p:spTree>
-    <p:extLst>
-      <p:ext uri="{BB962C8B-B14F-4D97-AF65-F5344CB8AC3E}">
-        <p14:creationId xmlns:p14="http://schemas.microsoft.com/office/powerpoint/2010/main" val="1024086991"/>
-      </p:ext>
-    </p:extLst>
-  </p:cSld>
-  <p:clrMapOvr>
-    <a:masterClrMapping/>
-  </p:clrMapOvr>
-</p:notes>
-</file>
-
 <file path=ppt/notesSlides/notesSlide2.xml><?xml version="1.0" encoding="utf-8"?>
 <p:notes xmlns:a="http://schemas.openxmlformats.org/drawingml/2006/main" xmlns:r="http://schemas.openxmlformats.org/officeDocument/2006/relationships" xmlns:p="http://schemas.openxmlformats.org/presentationml/2006/main">
   <p:cSld>
@@ -1239,94 +1149,6 @@
             <a:fld id="{F7021451-1387-4CA6-816F-3879F97B5CBC}" type="slidenum">
               <a:rPr lang="en-US"/>
               <a:t>8</a:t>
-            </a:fld>
-            <a:endParaRPr lang="en-US"/>
-          </a:p>
-        </p:txBody>
-      </p:sp>
-    </p:spTree>
-    <p:extLst>
-      <p:ext uri="{BB962C8B-B14F-4D97-AF65-F5344CB8AC3E}">
-        <p14:creationId xmlns:p14="http://schemas.microsoft.com/office/powerpoint/2010/main" val="1024086991"/>
-      </p:ext>
-    </p:extLst>
-  </p:cSld>
-  <p:clrMapOvr>
-    <a:masterClrMapping/>
-  </p:clrMapOvr>
-</p:notes>
-</file>
-
-<file path=ppt/notesSlides/notesSlide9.xml><?xml version="1.0" encoding="utf-8"?>
-<p:notes xmlns:a="http://schemas.openxmlformats.org/drawingml/2006/main" xmlns:r="http://schemas.openxmlformats.org/officeDocument/2006/relationships" xmlns:p="http://schemas.openxmlformats.org/presentationml/2006/main">
-  <p:cSld>
-    <p:spTree>
-      <p:nvGrpSpPr>
-        <p:cNvPr id="1" name=""/>
-        <p:cNvGrpSpPr/>
-        <p:nvPr/>
-      </p:nvGrpSpPr>
-      <p:grpSpPr>
-        <a:xfrm>
-          <a:off x="0" y="0"/>
-          <a:ext cx="0" cy="0"/>
-          <a:chOff x="0" y="0"/>
-          <a:chExt cx="0" cy="0"/>
-        </a:xfrm>
-      </p:grpSpPr>
-      <p:sp>
-        <p:nvSpPr>
-          <p:cNvPr id="2" name="Slide Image Placeholder 1"/>
-          <p:cNvSpPr>
-            <a:spLocks noGrp="1" noRot="1" noChangeAspect="1"/>
-          </p:cNvSpPr>
-          <p:nvPr>
-            <p:ph type="sldImg"/>
-          </p:nvPr>
-        </p:nvSpPr>
-        <p:spPr/>
-      </p:sp>
-      <p:sp>
-        <p:nvSpPr>
-          <p:cNvPr id="3" name="Notes Placeholder 2"/>
-          <p:cNvSpPr>
-            <a:spLocks noGrp="1"/>
-          </p:cNvSpPr>
-          <p:nvPr>
-            <p:ph type="body" idx="1"/>
-          </p:nvPr>
-        </p:nvSpPr>
-        <p:spPr/>
-        <p:txBody>
-          <a:bodyPr/>
-          <a:lstStyle/>
-          <a:p>
-            <a:r>
-              <a:rPr lang="en-US" dirty="0"/>
-              <a:t/>
-            </a:r>
-            <a:endParaRPr lang="en-US" dirty="0"/>
-          </a:p>
-        </p:txBody>
-      </p:sp>
-      <p:sp>
-        <p:nvSpPr>
-          <p:cNvPr id="4" name="Slide Number Placeholder 3"/>
-          <p:cNvSpPr>
-            <a:spLocks noGrp="1"/>
-          </p:cNvSpPr>
-          <p:nvPr>
-            <p:ph type="sldNum" sz="quarter" idx="10"/>
-          </p:nvPr>
-        </p:nvSpPr>
-        <p:spPr/>
-        <p:txBody>
-          <a:bodyPr/>
-          <a:lstStyle/>
-          <a:p>
-            <a:fld id="{F7021451-1387-4CA6-816F-3879F97B5CBC}" type="slidenum">
-              <a:rPr lang="en-US"/>
-              <a:t>9</a:t>
             </a:fld>
             <a:endParaRPr lang="en-US"/>
           </a:p>
@@ -1655,6 +1477,13 @@
 <file path=ppt/slides/slide1.xml><?xml version="1.0" encoding="utf-8"?>
 <p:sld xmlns:a="http://schemas.openxmlformats.org/drawingml/2006/main" xmlns:r="http://schemas.openxmlformats.org/officeDocument/2006/relationships" xmlns:p="http://schemas.openxmlformats.org/presentationml/2006/main">
   <p:cSld name="Slide 1">
+    <p:bg>
+      <p:bgPr>
+        <a:solidFill>
+          <a:srgbClr val="2A9D8F"/>
+        </a:solidFill>
+      </p:bgPr>
+    </p:bg>
     <p:spTree>
       <p:nvGrpSpPr>
         <p:cNvPr id="1" name=""/>
@@ -1677,37 +1506,58 @@
         </p:nvSpPr>
         <p:spPr>
           <a:xfrm>
-            <a:off x="0" y="0"/>
-            <a:ext cx="9144000" cy="5143500"/>
-          </a:xfrm>
-          <a:prstGeom prst="rect">
+            <a:off x="7772400" y="-914400"/>
+            <a:ext cx="3657600" cy="3657600"/>
+          </a:xfrm>
+          <a:prstGeom prst="ellipse">
             <a:avLst/>
           </a:prstGeom>
           <a:solidFill>
-            <a:srgbClr val="1B2A4A"/>
+            <a:srgbClr val="FFFFFF">
+              <a:alpha val="8000"/>
+            </a:srgbClr>
           </a:solidFill>
           <a:ln/>
         </p:spPr>
       </p:sp>
       <p:sp>
         <p:nvSpPr>
-          <p:cNvPr id="3" name="Shape 1"/>
+          <p:cNvPr id="3" name="Text 1"/>
           <p:cNvSpPr/>
           <p:nvPr/>
         </p:nvSpPr>
         <p:spPr>
           <a:xfrm>
-            <a:off x="0" y="4777740"/>
-            <a:ext cx="9144000" cy="365760"/>
-          </a:xfrm>
-          <a:prstGeom prst="rect">
-            <a:avLst/>
-          </a:prstGeom>
-          <a:solidFill>
-            <a:srgbClr val="2A9D8F"/>
-          </a:solidFill>
+            <a:off x="731520" y="548640"/>
+            <a:ext cx="7315200" cy="365760"/>
+          </a:xfrm>
+          <a:prstGeom prst="rect">
+            <a:avLst/>
+          </a:prstGeom>
+          <a:noFill/>
           <a:ln/>
         </p:spPr>
+        <p:txBody>
+          <a:bodyPr wrap="square" rtlCol="0" anchor="ctr"/>
+          <a:lstStyle/>
+          <a:p>
+            <a:pPr indent="0" marL="0">
+              <a:buNone/>
+            </a:pPr>
+            <a:r>
+              <a:rPr lang="en-US" sz="1100" b="1" dirty="0">
+                <a:solidFill>
+                  <a:srgbClr val="F2D68A"/>
+                </a:solidFill>
+                <a:latin typeface="Arial" pitchFamily="34" charset="0"/>
+                <a:ea typeface="Arial" pitchFamily="34" charset="-122"/>
+                <a:cs typeface="Arial" pitchFamily="34" charset="-120"/>
+              </a:rPr>
+              <a:t>GRADE 6 SCIENCE</a:t>
+            </a:r>
+            <a:endParaRPr lang="en-US" sz="1100" dirty="0"/>
+          </a:p>
+        </p:txBody>
       </p:sp>
       <p:sp>
         <p:nvSpPr>
@@ -1717,8 +1567,8 @@
         </p:nvSpPr>
         <p:spPr>
           <a:xfrm>
-            <a:off x="731520" y="1097280"/>
-            <a:ext cx="7680960" cy="457200"/>
+            <a:off x="731520" y="1371600"/>
+            <a:ext cx="9144000" cy="1645920"/>
           </a:xfrm>
           <a:prstGeom prst="rect">
             <a:avLst/>
@@ -1731,49 +1581,13 @@
           <a:lstStyle/>
           <a:p>
             <a:pPr indent="0" marL="0">
+              <a:lnSpc>
+                <a:spcPct val="110000"/>
+              </a:lnSpc>
               <a:buNone/>
             </a:pPr>
             <a:r>
-              <a:rPr lang="en-US" sz="1400" b="1" spc="400" kern="0" dirty="0">
-                <a:solidFill>
-                  <a:srgbClr val="2A9D8F"/>
-                </a:solidFill>
-                <a:latin typeface="Calibri" pitchFamily="34" charset="0"/>
-                <a:ea typeface="Calibri" pitchFamily="34" charset="-122"/>
-                <a:cs typeface="Calibri" pitchFamily="34" charset="-120"/>
-              </a:rPr>
-              <a:t>GRADE 6 SCIENCE</a:t>
-            </a:r>
-            <a:endParaRPr lang="en-US" sz="1400" dirty="0"/>
-          </a:p>
-        </p:txBody>
-      </p:sp>
-      <p:sp>
-        <p:nvSpPr>
-          <p:cNvPr id="5" name="Text 3"/>
-          <p:cNvSpPr/>
-          <p:nvPr/>
-        </p:nvSpPr>
-        <p:spPr>
-          <a:xfrm>
-            <a:off x="731520" y="1645920"/>
-            <a:ext cx="7680960" cy="1463040"/>
-          </a:xfrm>
-          <a:prstGeom prst="rect">
-            <a:avLst/>
-          </a:prstGeom>
-          <a:noFill/>
-          <a:ln/>
-        </p:spPr>
-        <p:txBody>
-          <a:bodyPr wrap="square" rtlCol="0" anchor="t"/>
-          <a:lstStyle/>
-          <a:p>
-            <a:pPr indent="0" marL="0">
-              <a:buNone/>
-            </a:pPr>
-            <a:r>
-              <a:rPr lang="en-US" sz="4000" b="1" dirty="0">
+              <a:rPr lang="en-US" sz="3600" b="1" dirty="0">
                 <a:solidFill>
                   <a:srgbClr val="FFFFFF"/>
                 </a:solidFill>
@@ -1781,26 +1595,50 @@
                 <a:ea typeface="Georgia" pitchFamily="34" charset="-122"/>
                 <a:cs typeface="Georgia" pitchFamily="34" charset="-120"/>
               </a:rPr>
-              <a:t>Earth Science</a:t>
-            </a:r>
-            <a:endParaRPr lang="en-US" sz="4000" dirty="0"/>
-          </a:p>
+              <a:t>Full Revision — Earth Science</a:t>
+            </a:r>
+            <a:endParaRPr lang="en-US" sz="3600" dirty="0"/>
+          </a:p>
+        </p:txBody>
+      </p:sp>
+      <p:sp>
+        <p:nvSpPr>
+          <p:cNvPr id="5" name="Text 3"/>
+          <p:cNvSpPr/>
+          <p:nvPr/>
+        </p:nvSpPr>
+        <p:spPr>
+          <a:xfrm>
+            <a:off x="731520" y="3200400"/>
+            <a:ext cx="7315200" cy="548640"/>
+          </a:xfrm>
+          <a:prstGeom prst="rect">
+            <a:avLst/>
+          </a:prstGeom>
+          <a:noFill/>
+          <a:ln/>
+        </p:spPr>
+        <p:txBody>
+          <a:bodyPr wrap="square" rtlCol="0" anchor="ctr"/>
+          <a:lstStyle/>
           <a:p>
             <a:pPr indent="0" marL="0">
               <a:buNone/>
             </a:pPr>
             <a:r>
-              <a:rPr lang="en-US" sz="4000" b="1" dirty="0">
+              <a:rPr lang="en-US" sz="1600" dirty="0">
                 <a:solidFill>
-                  <a:srgbClr val="FFFFFF"/>
+                  <a:srgbClr val="FFFFFF">
+                    <a:alpha val="65000"/>
+                  </a:srgbClr>
                 </a:solidFill>
-                <a:latin typeface="Georgia" pitchFamily="34" charset="0"/>
-                <a:ea typeface="Georgia" pitchFamily="34" charset="-122"/>
-                <a:cs typeface="Georgia" pitchFamily="34" charset="-120"/>
+                <a:latin typeface="Arial" pitchFamily="34" charset="0"/>
+                <a:ea typeface="Arial" pitchFamily="34" charset="-122"/>
+                <a:cs typeface="Arial" pitchFamily="34" charset="-120"/>
               </a:rPr>
-              <a:t>Full Revision</a:t>
-            </a:r>
-            <a:endParaRPr lang="en-US" sz="4000" dirty="0"/>
+              <a:t>Review all topics from Term 3</a:t>
+            </a:r>
+            <a:endParaRPr lang="en-US" sz="1600" dirty="0"/>
           </a:p>
         </p:txBody>
       </p:sp>
@@ -1812,8 +1650,8 @@
         </p:nvSpPr>
         <p:spPr>
           <a:xfrm>
-            <a:off x="731520" y="3200400"/>
-            <a:ext cx="7680960" cy="548640"/>
+            <a:off x="731520" y="4389120"/>
+            <a:ext cx="2743200" cy="320040"/>
           </a:xfrm>
           <a:prstGeom prst="rect">
             <a:avLst/>
@@ -1829,56 +1667,19 @@
               <a:buNone/>
             </a:pPr>
             <a:r>
-              <a:rPr lang="en-US" sz="1600" i="1" dirty="0">
+              <a:rPr lang="en-US" sz="1000" dirty="0">
                 <a:solidFill>
-                  <a:srgbClr val="9B9690"/>
+                  <a:srgbClr val="FFFFFF">
+                    <a:alpha val="40000"/>
+                  </a:srgbClr>
                 </a:solidFill>
-                <a:latin typeface="Calibri" pitchFamily="34" charset="0"/>
-                <a:ea typeface="Calibri" pitchFamily="34" charset="-122"/>
-                <a:cs typeface="Calibri" pitchFamily="34" charset="-120"/>
+                <a:latin typeface="Arial" pitchFamily="34" charset="0"/>
+                <a:ea typeface="Arial" pitchFamily="34" charset="-122"/>
+                <a:cs typeface="Arial" pitchFamily="34" charset="-120"/>
               </a:rPr>
-              <a:t>Everything you need to know</a:t>
-            </a:r>
-            <a:endParaRPr lang="en-US" sz="1600" dirty="0"/>
-          </a:p>
-        </p:txBody>
-      </p:sp>
-      <p:sp>
-        <p:nvSpPr>
-          <p:cNvPr id="7" name="Text 5"/>
-          <p:cNvSpPr/>
-          <p:nvPr/>
-        </p:nvSpPr>
-        <p:spPr>
-          <a:xfrm>
-            <a:off x="731520" y="4206240"/>
-            <a:ext cx="3657600" cy="365760"/>
-          </a:xfrm>
-          <a:prstGeom prst="rect">
-            <a:avLst/>
-          </a:prstGeom>
-          <a:noFill/>
-          <a:ln/>
-        </p:spPr>
-        <p:txBody>
-          <a:bodyPr wrap="square" rtlCol="0" anchor="ctr"/>
-          <a:lstStyle/>
-          <a:p>
-            <a:pPr indent="0" marL="0">
-              <a:buNone/>
-            </a:pPr>
-            <a:r>
-              <a:rPr lang="en-US" sz="1200" dirty="0">
-                <a:solidFill>
-                  <a:srgbClr val="6B6660"/>
-                </a:solidFill>
-                <a:latin typeface="Calibri" pitchFamily="34" charset="0"/>
-                <a:ea typeface="Calibri" pitchFamily="34" charset="-122"/>
-                <a:cs typeface="Calibri" pitchFamily="34" charset="-120"/>
-              </a:rPr>
-              <a:t>Mr Zocchi</a:t>
-            </a:r>
-            <a:endParaRPr lang="en-US" sz="1200" dirty="0"/>
+              <a:t>mrzocchi.com</a:t>
+            </a:r>
+            <a:endParaRPr lang="en-US" sz="1000" dirty="0"/>
           </a:p>
         </p:txBody>
       </p:sp>
@@ -1890,9 +1691,16 @@
 </p:sld>
 </file>
 
-<file path=ppt/slides/slide10.xml><?xml version="1.0" encoding="utf-8"?>
+<file path=ppt/slides/slide2.xml><?xml version="1.0" encoding="utf-8"?>
 <p:sld xmlns:a="http://schemas.openxmlformats.org/drawingml/2006/main" xmlns:r="http://schemas.openxmlformats.org/officeDocument/2006/relationships" xmlns:p="http://schemas.openxmlformats.org/presentationml/2006/main">
-  <p:cSld name="Slide 10">
+  <p:cSld name="Slide 2">
+    <p:bg>
+      <p:bgPr>
+        <a:solidFill>
+          <a:srgbClr val="111D35"/>
+        </a:solidFill>
+      </p:bgPr>
+    </p:bg>
     <p:spTree>
       <p:nvGrpSpPr>
         <p:cNvPr id="1" name=""/>
@@ -1909,177 +1717,14 @@
       </p:grpSpPr>
       <p:sp>
         <p:nvSpPr>
-          <p:cNvPr id="2" name="Shape 0"/>
+          <p:cNvPr id="2" name="Text 0"/>
           <p:cNvSpPr/>
           <p:nvPr/>
         </p:nvSpPr>
         <p:spPr>
           <a:xfrm>
-            <a:off x="0" y="0"/>
-            <a:ext cx="9144000" cy="5143500"/>
-          </a:xfrm>
-          <a:prstGeom prst="rect">
-            <a:avLst/>
-          </a:prstGeom>
-          <a:solidFill>
-            <a:srgbClr val="1B2A4A"/>
-          </a:solidFill>
-          <a:ln/>
-        </p:spPr>
-      </p:sp>
-      <p:sp>
-        <p:nvSpPr>
-          <p:cNvPr id="3" name="Shape 1"/>
-          <p:cNvSpPr/>
-          <p:nvPr/>
-        </p:nvSpPr>
-        <p:spPr>
-          <a:xfrm>
-            <a:off x="0" y="4777740"/>
-            <a:ext cx="9144000" cy="365760"/>
-          </a:xfrm>
-          <a:prstGeom prst="rect">
-            <a:avLst/>
-          </a:prstGeom>
-          <a:solidFill>
-            <a:srgbClr val="2A9D8F"/>
-          </a:solidFill>
-          <a:ln/>
-        </p:spPr>
-      </p:sp>
-      <p:sp>
-        <p:nvSpPr>
-          <p:cNvPr id="4" name="Text 2"/>
-          <p:cNvSpPr/>
-          <p:nvPr/>
-        </p:nvSpPr>
-        <p:spPr>
-          <a:xfrm>
-            <a:off x="731520" y="1371600"/>
-            <a:ext cx="7680960" cy="914400"/>
-          </a:xfrm>
-          <a:prstGeom prst="rect">
-            <a:avLst/>
-          </a:prstGeom>
-          <a:noFill/>
-          <a:ln/>
-        </p:spPr>
-        <p:txBody>
-          <a:bodyPr wrap="square" rtlCol="0" anchor="ctr"/>
-          <a:lstStyle/>
-          <a:p>
-            <a:pPr algn="ctr" indent="0" marL="0">
-              <a:buNone/>
-            </a:pPr>
-            <a:r>
-              <a:rPr lang="en-US" sz="3600" b="1" dirty="0">
-                <a:solidFill>
-                  <a:srgbClr val="FFFFFF"/>
-                </a:solidFill>
-                <a:latin typeface="Georgia" pitchFamily="34" charset="0"/>
-                <a:ea typeface="Georgia" pitchFamily="34" charset="-122"/>
-                <a:cs typeface="Georgia" pitchFamily="34" charset="-120"/>
-              </a:rPr>
-              <a:t>Review &amp; Practise</a:t>
-            </a:r>
-            <a:endParaRPr lang="en-US" sz="3600" dirty="0"/>
-          </a:p>
-        </p:txBody>
-      </p:sp>
-      <p:sp>
-        <p:nvSpPr>
-          <p:cNvPr id="5" name="Text 3"/>
-          <p:cNvSpPr/>
-          <p:nvPr/>
-        </p:nvSpPr>
-        <p:spPr>
-          <a:xfrm>
-            <a:off x="731520" y="2560320"/>
-            <a:ext cx="7680960" cy="548640"/>
-          </a:xfrm>
-          <a:prstGeom prst="rect">
-            <a:avLst/>
-          </a:prstGeom>
-          <a:noFill/>
-          <a:ln/>
-        </p:spPr>
-        <p:txBody>
-          <a:bodyPr wrap="square" rtlCol="0" anchor="ctr"/>
-          <a:lstStyle/>
-          <a:p>
-            <a:pPr algn="ctr" indent="0" marL="0">
-              <a:buNone/>
-            </a:pPr>
-            <a:r>
-              <a:rPr lang="en-US" sz="2000" dirty="0">
-                <a:solidFill>
-                  <a:srgbClr val="2A9D8F"/>
-                </a:solidFill>
-                <a:latin typeface="Calibri" pitchFamily="34" charset="0"/>
-                <a:ea typeface="Calibri" pitchFamily="34" charset="-122"/>
-                <a:cs typeface="Calibri" pitchFamily="34" charset="-120"/>
-              </a:rPr>
-              <a:t>mrzocchi.com</a:t>
-            </a:r>
-            <a:endParaRPr lang="en-US" sz="2000" dirty="0"/>
-          </a:p>
-        </p:txBody>
-      </p:sp>
-    </p:spTree>
-  </p:cSld>
-  <p:clrMapOvr>
-    <a:masterClrMapping/>
-  </p:clrMapOvr>
-</p:sld>
-</file>
-
-<file path=ppt/slides/slide2.xml><?xml version="1.0" encoding="utf-8"?>
-<p:sld xmlns:a="http://schemas.openxmlformats.org/drawingml/2006/main" xmlns:r="http://schemas.openxmlformats.org/officeDocument/2006/relationships" xmlns:p="http://schemas.openxmlformats.org/presentationml/2006/main">
-  <p:cSld name="Slide 2">
-    <p:spTree>
-      <p:nvGrpSpPr>
-        <p:cNvPr id="1" name=""/>
-        <p:cNvGrpSpPr/>
-        <p:nvPr/>
-      </p:nvGrpSpPr>
-      <p:grpSpPr>
-        <a:xfrm>
-          <a:off x="0" y="0"/>
-          <a:ext cx="0" cy="0"/>
-          <a:chOff x="0" y="0"/>
-          <a:chExt cx="0" cy="0"/>
-        </a:xfrm>
-      </p:grpSpPr>
-      <p:sp>
-        <p:nvSpPr>
-          <p:cNvPr id="2" name="Shape 0"/>
-          <p:cNvSpPr/>
-          <p:nvPr/>
-        </p:nvSpPr>
-        <p:spPr>
-          <a:xfrm>
-            <a:off x="0" y="0"/>
-            <a:ext cx="9144000" cy="5143500"/>
-          </a:xfrm>
-          <a:prstGeom prst="rect">
-            <a:avLst/>
-          </a:prstGeom>
-          <a:solidFill>
-            <a:srgbClr val="111D35"/>
-          </a:solidFill>
-          <a:ln/>
-        </p:spPr>
-      </p:sp>
-      <p:sp>
-        <p:nvSpPr>
-          <p:cNvPr id="3" name="Text 1"/>
-          <p:cNvSpPr/>
-          <p:nvPr/>
-        </p:nvSpPr>
-        <p:spPr>
-          <a:xfrm>
-            <a:off x="731520" y="914400"/>
-            <a:ext cx="1828800" cy="1097280"/>
+            <a:off x="731520" y="731520"/>
+            <a:ext cx="2286000" cy="1828800"/>
           </a:xfrm>
           <a:prstGeom prst="rect">
             <a:avLst/>
@@ -2098,7 +1743,7 @@
               <a:rPr lang="en-US" sz="7200" b="1" dirty="0">
                 <a:solidFill>
                   <a:srgbClr val="2A9D8F">
-                    <a:alpha val="70000"/>
+                    <a:alpha val="80000"/>
                   </a:srgbClr>
                 </a:solidFill>
                 <a:latin typeface="Georgia" pitchFamily="34" charset="0"/>
@@ -2113,14 +1758,14 @@
       </p:sp>
       <p:sp>
         <p:nvSpPr>
-          <p:cNvPr id="4" name="Text 2"/>
+          <p:cNvPr id="3" name="Text 1"/>
           <p:cNvSpPr/>
           <p:nvPr/>
         </p:nvSpPr>
         <p:spPr>
           <a:xfrm>
-            <a:off x="731520" y="2011680"/>
-            <a:ext cx="7680960" cy="1097280"/>
+            <a:off x="731520" y="1828800"/>
+            <a:ext cx="9144000" cy="1097280"/>
           </a:xfrm>
           <a:prstGeom prst="rect">
             <a:avLst/>
@@ -2144,7 +1789,7 @@
                 <a:ea typeface="Georgia" pitchFamily="34" charset="-122"/>
                 <a:cs typeface="Georgia" pitchFamily="34" charset="-120"/>
               </a:rPr>
-              <a:t>Earth's Layers</a:t>
+              <a:t>Earth's Structure</a:t>
             </a:r>
             <a:endParaRPr lang="en-US" sz="3200" dirty="0"/>
           </a:p>
@@ -2152,23 +1797,44 @@
       </p:sp>
       <p:sp>
         <p:nvSpPr>
-          <p:cNvPr id="5" name="Shape 3"/>
+          <p:cNvPr id="4" name="Text 2"/>
           <p:cNvSpPr/>
           <p:nvPr/>
         </p:nvSpPr>
         <p:spPr>
           <a:xfrm>
-            <a:off x="731520" y="3200400"/>
-            <a:ext cx="1828800" cy="54864"/>
-          </a:xfrm>
-          <a:prstGeom prst="rect">
-            <a:avLst/>
-          </a:prstGeom>
-          <a:solidFill>
-            <a:srgbClr val="2A9D8F"/>
-          </a:solidFill>
+            <a:off x="731520" y="3017520"/>
+            <a:ext cx="7315200" cy="457200"/>
+          </a:xfrm>
+          <a:prstGeom prst="rect">
+            <a:avLst/>
+          </a:prstGeom>
+          <a:noFill/>
           <a:ln/>
         </p:spPr>
+        <p:txBody>
+          <a:bodyPr wrap="square" rtlCol="0" anchor="ctr"/>
+          <a:lstStyle/>
+          <a:p>
+            <a:pPr indent="0" marL="0">
+              <a:buNone/>
+            </a:pPr>
+            <a:r>
+              <a:rPr lang="en-US" sz="1400" dirty="0">
+                <a:solidFill>
+                  <a:srgbClr val="FFFFFF">
+                    <a:alpha val="60000"/>
+                  </a:srgbClr>
+                </a:solidFill>
+                <a:latin typeface="Arial" pitchFamily="34" charset="0"/>
+                <a:ea typeface="Arial" pitchFamily="34" charset="-122"/>
+                <a:cs typeface="Arial" pitchFamily="34" charset="-120"/>
+              </a:rPr>
+              <a:t>Layers and composition</a:t>
+            </a:r>
+            <a:endParaRPr lang="en-US" sz="1400" dirty="0"/>
+          </a:p>
+        </p:txBody>
       </p:sp>
     </p:spTree>
   </p:cSld>
@@ -2211,27 +1877,7 @@
         <p:spPr>
           <a:xfrm>
             <a:off x="0" y="0"/>
-            <a:ext cx="9144000" cy="822960"/>
-          </a:xfrm>
-          <a:prstGeom prst="rect">
-            <a:avLst/>
-          </a:prstGeom>
-          <a:solidFill>
-            <a:srgbClr val="FFFFFF"/>
-          </a:solidFill>
-          <a:ln/>
-        </p:spPr>
-      </p:sp>
-      <p:sp>
-        <p:nvSpPr>
-          <p:cNvPr id="3" name="Shape 1"/>
-          <p:cNvSpPr/>
-          <p:nvPr/>
-        </p:nvSpPr>
-        <p:spPr>
-          <a:xfrm>
-            <a:off x="0" y="795528"/>
-            <a:ext cx="9144000" cy="27432"/>
+            <a:ext cx="73152" cy="5148072"/>
           </a:xfrm>
           <a:prstGeom prst="rect">
             <a:avLst/>
@@ -2244,14 +1890,14 @@
       </p:sp>
       <p:sp>
         <p:nvSpPr>
-          <p:cNvPr id="4" name="Text 2"/>
+          <p:cNvPr id="3" name="Text 1"/>
           <p:cNvSpPr/>
           <p:nvPr/>
         </p:nvSpPr>
         <p:spPr>
           <a:xfrm>
-            <a:off x="640080" y="91440"/>
-            <a:ext cx="7863840" cy="640080"/>
+            <a:off x="548640" y="274320"/>
+            <a:ext cx="9144000" cy="640080"/>
           </a:xfrm>
           <a:prstGeom prst="rect">
             <a:avLst/>
@@ -2260,14 +1906,14 @@
           <a:ln/>
         </p:spPr>
         <p:txBody>
-          <a:bodyPr wrap="square" lIns="0" tIns="0" rIns="0" bIns="0" rtlCol="0" anchor="ctr"/>
+          <a:bodyPr wrap="square" rtlCol="0" anchor="ctr"/>
           <a:lstStyle/>
           <a:p>
             <a:pPr indent="0" marL="0">
               <a:buNone/>
             </a:pPr>
             <a:r>
-              <a:rPr lang="en-US" sz="2200" b="1" dirty="0">
+              <a:rPr lang="en-US" sz="2400" b="1" dirty="0">
                 <a:solidFill>
                   <a:srgbClr val="1B2A4A"/>
                 </a:solidFill>
@@ -2275,11 +1921,31 @@
                 <a:ea typeface="Georgia" pitchFamily="34" charset="-122"/>
                 <a:cs typeface="Georgia" pitchFamily="34" charset="-120"/>
               </a:rPr>
-              <a:t>Layers Recap</a:t>
-            </a:r>
-            <a:endParaRPr lang="en-US" sz="2200" dirty="0"/>
-          </a:p>
-        </p:txBody>
+              <a:t>Earth's Layers Recap</a:t>
+            </a:r>
+            <a:endParaRPr lang="en-US" sz="2400" dirty="0"/>
+          </a:p>
+        </p:txBody>
+      </p:sp>
+      <p:sp>
+        <p:nvSpPr>
+          <p:cNvPr id="4" name="Shape 2"/>
+          <p:cNvSpPr/>
+          <p:nvPr/>
+        </p:nvSpPr>
+        <p:spPr>
+          <a:xfrm>
+            <a:off x="548640" y="960120"/>
+            <a:ext cx="2286000" cy="36576"/>
+          </a:xfrm>
+          <a:prstGeom prst="rect">
+            <a:avLst/>
+          </a:prstGeom>
+          <a:solidFill>
+            <a:srgbClr val="2A9D8F"/>
+          </a:solidFill>
+          <a:ln/>
+        </p:spPr>
       </p:sp>
       <p:sp>
         <p:nvSpPr>
@@ -2289,8 +1955,8 @@
         </p:nvSpPr>
         <p:spPr>
           <a:xfrm>
-            <a:off x="640080" y="1005840"/>
-            <a:ext cx="7863840" cy="2926080"/>
+            <a:off x="548640" y="1188720"/>
+            <a:ext cx="10058400" cy="3474720"/>
           </a:xfrm>
           <a:prstGeom prst="rect">
             <a:avLst/>
@@ -2299,91 +1965,73 @@
           <a:ln/>
         </p:spPr>
         <p:txBody>
-          <a:bodyPr wrap="square" rtlCol="0" anchor="ctr"/>
-          <a:lstStyle/>
-          <a:p>
-            <a:pPr marL="342900" indent="-342900">
+          <a:bodyPr wrap="square" rtlCol="0" anchor="t"/>
+          <a:lstStyle/>
+          <a:p>
+            <a:pPr>
+              <a:lnSpc>
+                <a:spcPct val="150000"/>
+              </a:lnSpc>
               <a:spcAft>
-                <a:spcPts val="800"/>
+                <a:spcPts val="600"/>
               </a:spcAft>
-              <a:buSzPct val="100000"/>
-              <a:buChar char="•"/>
             </a:pPr>
             <a:r>
-              <a:rPr lang="en-US" sz="1600" dirty="0">
+              <a:rPr lang="en-US" sz="1500" dirty="0">
                 <a:solidFill>
                   <a:srgbClr val="3D3A36"/>
                 </a:solidFill>
-                <a:latin typeface="Calibri" pitchFamily="34" charset="0"/>
-                <a:ea typeface="Calibri" pitchFamily="34" charset="-122"/>
-                <a:cs typeface="Calibri" pitchFamily="34" charset="-120"/>
+                <a:latin typeface="Arial" pitchFamily="34" charset="0"/>
+                <a:ea typeface="Arial" pitchFamily="34" charset="-122"/>
+                <a:cs typeface="Arial" pitchFamily="34" charset="-120"/>
               </a:rPr>
-              <a:t>Crust → Mantle → Outer Core → Inner Core.</a:t>
-            </a:r>
-            <a:endParaRPr lang="en-US" sz="1600" dirty="0"/>
-          </a:p>
-          <a:p>
-            <a:pPr marL="342900" indent="-342900">
+              <a:t>Crust (5-70km, solid) → Mantle (2900km, semi-liquid) → Outer Core (liquid) → Inner Core (solid, 5500°C).</a:t>
+            </a:r>
+            <a:endParaRPr lang="en-US" sz="1500" dirty="0"/>
+          </a:p>
+          <a:p>
+            <a:pPr>
+              <a:lnSpc>
+                <a:spcPct val="150000"/>
+              </a:lnSpc>
               <a:spcAft>
-                <a:spcPts val="800"/>
+                <a:spcPts val="600"/>
               </a:spcAft>
-              <a:buSzPct val="100000"/>
-              <a:buChar char="•"/>
             </a:pPr>
             <a:r>
-              <a:rPr lang="en-US" sz="1600" dirty="0">
+              <a:rPr lang="en-US" sz="1500" dirty="0">
                 <a:solidFill>
                   <a:srgbClr val="3D3A36"/>
                 </a:solidFill>
-                <a:latin typeface="Calibri" pitchFamily="34" charset="0"/>
-                <a:ea typeface="Calibri" pitchFamily="34" charset="-122"/>
-                <a:cs typeface="Calibri" pitchFamily="34" charset="-120"/>
+                <a:latin typeface="Arial" pitchFamily="34" charset="0"/>
+                <a:ea typeface="Arial" pitchFamily="34" charset="-122"/>
+                <a:cs typeface="Arial" pitchFamily="34" charset="-120"/>
               </a:rPr>
-              <a:t>Continental (thick, granite) vs. Oceanic (thin, basalt).</a:t>
-            </a:r>
-            <a:endParaRPr lang="en-US" sz="1600" dirty="0"/>
-          </a:p>
-          <a:p>
-            <a:pPr marL="342900" indent="-342900">
+              <a:t>We know this from seismic wave behaviour (P-waves vs S-waves).</a:t>
+            </a:r>
+            <a:endParaRPr lang="en-US" sz="1500" dirty="0"/>
+          </a:p>
+          <a:p>
+            <a:pPr>
+              <a:lnSpc>
+                <a:spcPct val="150000"/>
+              </a:lnSpc>
               <a:spcAft>
-                <a:spcPts val="800"/>
+                <a:spcPts val="600"/>
               </a:spcAft>
-              <a:buSzPct val="100000"/>
-              <a:buChar char="•"/>
             </a:pPr>
             <a:r>
-              <a:rPr lang="en-US" sz="1600" dirty="0">
+              <a:rPr lang="en-US" sz="1500" dirty="0">
                 <a:solidFill>
                   <a:srgbClr val="3D3A36"/>
                 </a:solidFill>
-                <a:latin typeface="Calibri" pitchFamily="34" charset="0"/>
-                <a:ea typeface="Calibri" pitchFamily="34" charset="-122"/>
-                <a:cs typeface="Calibri" pitchFamily="34" charset="-120"/>
+                <a:latin typeface="Arial" pitchFamily="34" charset="0"/>
+                <a:ea typeface="Arial" pitchFamily="34" charset="-122"/>
+                <a:cs typeface="Arial" pitchFamily="34" charset="-120"/>
               </a:rPr>
-              <a:t>Mantle: convection currents drive plate movement.</a:t>
-            </a:r>
-            <a:endParaRPr lang="en-US" sz="1600" dirty="0"/>
-          </a:p>
-          <a:p>
-            <a:pPr marL="342900" indent="-342900">
-              <a:spcAft>
-                <a:spcPts val="800"/>
-              </a:spcAft>
-              <a:buSzPct val="100000"/>
-              <a:buChar char="•"/>
-            </a:pPr>
-            <a:r>
-              <a:rPr lang="en-US" sz="1600" dirty="0">
-                <a:solidFill>
-                  <a:srgbClr val="3D3A36"/>
-                </a:solidFill>
-                <a:latin typeface="Calibri" pitchFamily="34" charset="0"/>
-                <a:ea typeface="Calibri" pitchFamily="34" charset="-122"/>
-                <a:cs typeface="Calibri" pitchFamily="34" charset="-120"/>
-              </a:rPr>
-              <a:t>Nanjing sits on the Yangtze Craton — ancient continental crust.</a:t>
-            </a:r>
-            <a:endParaRPr lang="en-US" sz="1600" dirty="0"/>
+              <a:t>Oceanic crust: thin, dense, basalt. Continental: thick, less dense, granite.</a:t>
+            </a:r>
+            <a:endParaRPr lang="en-US" sz="1500" dirty="0"/>
           </a:p>
         </p:txBody>
       </p:sp>
@@ -2398,6 +2046,13 @@
 <file path=ppt/slides/slide4.xml><?xml version="1.0" encoding="utf-8"?>
 <p:sld xmlns:a="http://schemas.openxmlformats.org/drawingml/2006/main" xmlns:r="http://schemas.openxmlformats.org/officeDocument/2006/relationships" xmlns:p="http://schemas.openxmlformats.org/presentationml/2006/main">
   <p:cSld name="Slide 4">
+    <p:bg>
+      <p:bgPr>
+        <a:solidFill>
+          <a:srgbClr val="111D35"/>
+        </a:solidFill>
+      </p:bgPr>
+    </p:bg>
     <p:spTree>
       <p:nvGrpSpPr>
         <p:cNvPr id="1" name=""/>
@@ -2414,34 +2069,14 @@
       </p:grpSpPr>
       <p:sp>
         <p:nvSpPr>
-          <p:cNvPr id="2" name="Shape 0"/>
+          <p:cNvPr id="2" name="Text 0"/>
           <p:cNvSpPr/>
           <p:nvPr/>
         </p:nvSpPr>
         <p:spPr>
           <a:xfrm>
-            <a:off x="0" y="0"/>
-            <a:ext cx="9144000" cy="5143500"/>
-          </a:xfrm>
-          <a:prstGeom prst="rect">
-            <a:avLst/>
-          </a:prstGeom>
-          <a:solidFill>
-            <a:srgbClr val="111D35"/>
-          </a:solidFill>
-          <a:ln/>
-        </p:spPr>
-      </p:sp>
-      <p:sp>
-        <p:nvSpPr>
-          <p:cNvPr id="3" name="Text 1"/>
-          <p:cNvSpPr/>
-          <p:nvPr/>
-        </p:nvSpPr>
-        <p:spPr>
-          <a:xfrm>
-            <a:off x="731520" y="914400"/>
-            <a:ext cx="1828800" cy="1097280"/>
+            <a:off x="731520" y="731520"/>
+            <a:ext cx="2286000" cy="1828800"/>
           </a:xfrm>
           <a:prstGeom prst="rect">
             <a:avLst/>
@@ -2460,7 +2095,7 @@
               <a:rPr lang="en-US" sz="7200" b="1" dirty="0">
                 <a:solidFill>
                   <a:srgbClr val="2A9D8F">
-                    <a:alpha val="70000"/>
+                    <a:alpha val="80000"/>
                   </a:srgbClr>
                 </a:solidFill>
                 <a:latin typeface="Georgia" pitchFamily="34" charset="0"/>
@@ -2475,14 +2110,14 @@
       </p:sp>
       <p:sp>
         <p:nvSpPr>
-          <p:cNvPr id="4" name="Text 2"/>
+          <p:cNvPr id="3" name="Text 1"/>
           <p:cNvSpPr/>
           <p:nvPr/>
         </p:nvSpPr>
         <p:spPr>
           <a:xfrm>
-            <a:off x="731520" y="2011680"/>
-            <a:ext cx="7680960" cy="1097280"/>
+            <a:off x="731520" y="1828800"/>
+            <a:ext cx="9144000" cy="1097280"/>
           </a:xfrm>
           <a:prstGeom prst="rect">
             <a:avLst/>
@@ -2506,7 +2141,7 @@
                 <a:ea typeface="Georgia" pitchFamily="34" charset="-122"/>
                 <a:cs typeface="Georgia" pitchFamily="34" charset="-120"/>
               </a:rPr>
-              <a:t>Convection &amp; Boundaries</a:t>
+              <a:t>Plate Tectonics</a:t>
             </a:r>
             <a:endParaRPr lang="en-US" sz="3200" dirty="0"/>
           </a:p>
@@ -2514,23 +2149,44 @@
       </p:sp>
       <p:sp>
         <p:nvSpPr>
-          <p:cNvPr id="5" name="Shape 3"/>
+          <p:cNvPr id="4" name="Text 2"/>
           <p:cNvSpPr/>
           <p:nvPr/>
         </p:nvSpPr>
         <p:spPr>
           <a:xfrm>
-            <a:off x="731520" y="3200400"/>
-            <a:ext cx="1828800" cy="54864"/>
-          </a:xfrm>
-          <a:prstGeom prst="rect">
-            <a:avLst/>
-          </a:prstGeom>
-          <a:solidFill>
-            <a:srgbClr val="2A9D8F"/>
-          </a:solidFill>
+            <a:off x="731520" y="3017520"/>
+            <a:ext cx="7315200" cy="457200"/>
+          </a:xfrm>
+          <a:prstGeom prst="rect">
+            <a:avLst/>
+          </a:prstGeom>
+          <a:noFill/>
           <a:ln/>
         </p:spPr>
+        <p:txBody>
+          <a:bodyPr wrap="square" rtlCol="0" anchor="ctr"/>
+          <a:lstStyle/>
+          <a:p>
+            <a:pPr indent="0" marL="0">
+              <a:buNone/>
+            </a:pPr>
+            <a:r>
+              <a:rPr lang="en-US" sz="1400" dirty="0">
+                <a:solidFill>
+                  <a:srgbClr val="FFFFFF">
+                    <a:alpha val="60000"/>
+                  </a:srgbClr>
+                </a:solidFill>
+                <a:latin typeface="Arial" pitchFamily="34" charset="0"/>
+                <a:ea typeface="Arial" pitchFamily="34" charset="-122"/>
+                <a:cs typeface="Arial" pitchFamily="34" charset="-120"/>
+              </a:rPr>
+              <a:t>Boundaries, drift, convection</a:t>
+            </a:r>
+            <a:endParaRPr lang="en-US" sz="1400" dirty="0"/>
+          </a:p>
+        </p:txBody>
       </p:sp>
     </p:spTree>
   </p:cSld>
@@ -2573,27 +2229,7 @@
         <p:spPr>
           <a:xfrm>
             <a:off x="0" y="0"/>
-            <a:ext cx="9144000" cy="822960"/>
-          </a:xfrm>
-          <a:prstGeom prst="rect">
-            <a:avLst/>
-          </a:prstGeom>
-          <a:solidFill>
-            <a:srgbClr val="FFFFFF"/>
-          </a:solidFill>
-          <a:ln/>
-        </p:spPr>
-      </p:sp>
-      <p:sp>
-        <p:nvSpPr>
-          <p:cNvPr id="3" name="Shape 1"/>
-          <p:cNvSpPr/>
-          <p:nvPr/>
-        </p:nvSpPr>
-        <p:spPr>
-          <a:xfrm>
-            <a:off x="0" y="795528"/>
-            <a:ext cx="9144000" cy="27432"/>
+            <a:ext cx="73152" cy="5148072"/>
           </a:xfrm>
           <a:prstGeom prst="rect">
             <a:avLst/>
@@ -2606,14 +2242,14 @@
       </p:sp>
       <p:sp>
         <p:nvSpPr>
-          <p:cNvPr id="4" name="Text 2"/>
+          <p:cNvPr id="3" name="Text 1"/>
           <p:cNvSpPr/>
           <p:nvPr/>
         </p:nvSpPr>
         <p:spPr>
           <a:xfrm>
-            <a:off x="640080" y="91440"/>
-            <a:ext cx="7863840" cy="640080"/>
+            <a:off x="548640" y="274320"/>
+            <a:ext cx="9144000" cy="640080"/>
           </a:xfrm>
           <a:prstGeom prst="rect">
             <a:avLst/>
@@ -2622,14 +2258,14 @@
           <a:ln/>
         </p:spPr>
         <p:txBody>
-          <a:bodyPr wrap="square" lIns="0" tIns="0" rIns="0" bIns="0" rtlCol="0" anchor="ctr"/>
+          <a:bodyPr wrap="square" rtlCol="0" anchor="ctr"/>
           <a:lstStyle/>
           <a:p>
             <a:pPr indent="0" marL="0">
               <a:buNone/>
             </a:pPr>
             <a:r>
-              <a:rPr lang="en-US" sz="2200" b="1" dirty="0">
+              <a:rPr lang="en-US" sz="2400" b="1" dirty="0">
                 <a:solidFill>
                   <a:srgbClr val="1B2A4A"/>
                 </a:solidFill>
@@ -2637,1104 +2273,120 @@
                 <a:ea typeface="Georgia" pitchFamily="34" charset="-122"/>
                 <a:cs typeface="Georgia" pitchFamily="34" charset="-120"/>
               </a:rPr>
-              <a:t>Boundaries Summary</a:t>
-            </a:r>
-            <a:endParaRPr lang="en-US" sz="2200" dirty="0"/>
-          </a:p>
-        </p:txBody>
-      </p:sp>
-      <p:graphicFrame>
-        <p:nvGraphicFramePr>
-          <p:cNvPr id="6" name="Table 0"/>
-          <p:cNvGraphicFramePr>
-            <a:graphicFrameLocks noGrp="1"/>
-          </p:cNvGraphicFramePr>
-          <p:nvPr>
-            <p:extLst>
-              <p:ext uri="{D42A27DB-BD31-4B8C-83A1-F6EECF244321}">
-                <p14:modId xmlns:p14="http://schemas.microsoft.com/office/powerpoint/2010/main" val="1579011935"/>
-              </p:ext>
-            </p:extLst>
-          </p:nvPr>
-        </p:nvGraphicFramePr>
-        <p:xfrm>
-          <a:off x="640080" y="1051560"/>
-          <a:ext cx="7863840" cy="914400"/>
-        </p:xfrm>
-        <a:graphic>
-          <a:graphicData uri="http://schemas.openxmlformats.org/drawingml/2006/table">
-            <a:tbl>
-              <a:tblPr/>
-              <a:tblGrid>
-                <a:gridCol w="1965960"/>
-                <a:gridCol w="1965960"/>
-                <a:gridCol w="1965960"/>
-                <a:gridCol w="1965960"/>
-              </a:tblGrid>
-              <a:tr h="502920">
-                <a:tc>
-                  <a:txBody>
-                    <a:bodyPr/>
-                    <a:lstStyle/>
-                    <a:p>
-                      <a:pPr indent="0" marL="0">
-                        <a:buNone/>
-                      </a:pPr>
-                      <a:r>
-                        <a:rPr lang="en-US" sz="1300" b="1" dirty="0">
-                          <a:solidFill>
-                            <a:srgbClr val="FFFFFF"/>
-                          </a:solidFill>
-                          <a:latin typeface="Calibri" pitchFamily="34" charset="0"/>
-                          <a:ea typeface="Calibri" pitchFamily="34" charset="-122"/>
-                          <a:cs typeface="Calibri" pitchFamily="34" charset="-120"/>
-                        </a:rPr>
-                        <a:t>Type</a:t>
-                      </a:r>
-                      <a:endParaRPr lang="en-US" sz="1300" dirty="0">
-                        <a:latin typeface="Calibri" charset="0"/>
-                        <a:ea typeface="Calibri" charset="0"/>
-                        <a:cs typeface="Calibri" charset="0"/>
-                      </a:endParaRPr>
-                    </a:p>
-                  </a:txBody>
-                  <a:tcPr marL="91440" marR="91440" marT="45720" marB="45720">
-                    <a:lnL w="6350" cap="flat" cmpd="sng" algn="ctr">
-                      <a:solidFill>
-                        <a:srgbClr val="E5E2DC"/>
-                      </a:solidFill>
-                      <a:prstDash val="solid"/>
-                      <a:round/>
-                      <a:headEnd type="none" w="med" len="med"/>
-                      <a:tailEnd type="none" w="med" len="med"/>
-                    </a:lnL>
-                    <a:lnR w="6350" cap="flat" cmpd="sng" algn="ctr">
-                      <a:solidFill>
-                        <a:srgbClr val="E5E2DC"/>
-                      </a:solidFill>
-                      <a:prstDash val="solid"/>
-                      <a:round/>
-                      <a:headEnd type="none" w="med" len="med"/>
-                      <a:tailEnd type="none" w="med" len="med"/>
-                    </a:lnR>
-                    <a:lnT w="6350" cap="flat" cmpd="sng" algn="ctr">
-                      <a:solidFill>
-                        <a:srgbClr val="E5E2DC"/>
-                      </a:solidFill>
-                      <a:prstDash val="solid"/>
-                      <a:round/>
-                      <a:headEnd type="none" w="med" len="med"/>
-                      <a:tailEnd type="none" w="med" len="med"/>
-                    </a:lnT>
-                    <a:lnB w="6350" cap="flat" cmpd="sng" algn="ctr">
-                      <a:solidFill>
-                        <a:srgbClr val="E5E2DC"/>
-                      </a:solidFill>
-                      <a:prstDash val="solid"/>
-                      <a:round/>
-                      <a:headEnd type="none" w="med" len="med"/>
-                      <a:tailEnd type="none" w="med" len="med"/>
-                    </a:lnB>
-                    <a:solidFill>
-                      <a:srgbClr val="2A9D8F"/>
-                    </a:solidFill>
-                  </a:tcPr>
-                </a:tc>
-                <a:tc>
-                  <a:txBody>
-                    <a:bodyPr/>
-                    <a:lstStyle/>
-                    <a:p>
-                      <a:pPr indent="0" marL="0">
-                        <a:buNone/>
-                      </a:pPr>
-                      <a:r>
-                        <a:rPr lang="en-US" sz="1300" b="1" dirty="0">
-                          <a:solidFill>
-                            <a:srgbClr val="FFFFFF"/>
-                          </a:solidFill>
-                          <a:latin typeface="Calibri" pitchFamily="34" charset="0"/>
-                          <a:ea typeface="Calibri" pitchFamily="34" charset="-122"/>
-                          <a:cs typeface="Calibri" pitchFamily="34" charset="-120"/>
-                        </a:rPr>
-                        <a:t>Movement</a:t>
-                      </a:r>
-                      <a:endParaRPr lang="en-US" sz="1300" dirty="0">
-                        <a:latin typeface="Calibri" charset="0"/>
-                        <a:ea typeface="Calibri" charset="0"/>
-                        <a:cs typeface="Calibri" charset="0"/>
-                      </a:endParaRPr>
-                    </a:p>
-                  </a:txBody>
-                  <a:tcPr marL="91440" marR="91440" marT="45720" marB="45720">
-                    <a:lnL w="6350" cap="flat" cmpd="sng" algn="ctr">
-                      <a:solidFill>
-                        <a:srgbClr val="E5E2DC"/>
-                      </a:solidFill>
-                      <a:prstDash val="solid"/>
-                      <a:round/>
-                      <a:headEnd type="none" w="med" len="med"/>
-                      <a:tailEnd type="none" w="med" len="med"/>
-                    </a:lnL>
-                    <a:lnR w="6350" cap="flat" cmpd="sng" algn="ctr">
-                      <a:solidFill>
-                        <a:srgbClr val="E5E2DC"/>
-                      </a:solidFill>
-                      <a:prstDash val="solid"/>
-                      <a:round/>
-                      <a:headEnd type="none" w="med" len="med"/>
-                      <a:tailEnd type="none" w="med" len="med"/>
-                    </a:lnR>
-                    <a:lnT w="6350" cap="flat" cmpd="sng" algn="ctr">
-                      <a:solidFill>
-                        <a:srgbClr val="E5E2DC"/>
-                      </a:solidFill>
-                      <a:prstDash val="solid"/>
-                      <a:round/>
-                      <a:headEnd type="none" w="med" len="med"/>
-                      <a:tailEnd type="none" w="med" len="med"/>
-                    </a:lnT>
-                    <a:lnB w="6350" cap="flat" cmpd="sng" algn="ctr">
-                      <a:solidFill>
-                        <a:srgbClr val="E5E2DC"/>
-                      </a:solidFill>
-                      <a:prstDash val="solid"/>
-                      <a:round/>
-                      <a:headEnd type="none" w="med" len="med"/>
-                      <a:tailEnd type="none" w="med" len="med"/>
-                    </a:lnB>
-                    <a:solidFill>
-                      <a:srgbClr val="2A9D8F"/>
-                    </a:solidFill>
-                  </a:tcPr>
-                </a:tc>
-                <a:tc>
-                  <a:txBody>
-                    <a:bodyPr/>
-                    <a:lstStyle/>
-                    <a:p>
-                      <a:pPr indent="0" marL="0">
-                        <a:buNone/>
-                      </a:pPr>
-                      <a:r>
-                        <a:rPr lang="en-US" sz="1300" b="1" dirty="0">
-                          <a:solidFill>
-                            <a:srgbClr val="FFFFFF"/>
-                          </a:solidFill>
-                          <a:latin typeface="Calibri" pitchFamily="34" charset="0"/>
-                          <a:ea typeface="Calibri" pitchFamily="34" charset="-122"/>
-                          <a:cs typeface="Calibri" pitchFamily="34" charset="-120"/>
-                        </a:rPr>
-                        <a:t>Result</a:t>
-                      </a:r>
-                      <a:endParaRPr lang="en-US" sz="1300" dirty="0">
-                        <a:latin typeface="Calibri" charset="0"/>
-                        <a:ea typeface="Calibri" charset="0"/>
-                        <a:cs typeface="Calibri" charset="0"/>
-                      </a:endParaRPr>
-                    </a:p>
-                  </a:txBody>
-                  <a:tcPr marL="91440" marR="91440" marT="45720" marB="45720">
-                    <a:lnL w="6350" cap="flat" cmpd="sng" algn="ctr">
-                      <a:solidFill>
-                        <a:srgbClr val="E5E2DC"/>
-                      </a:solidFill>
-                      <a:prstDash val="solid"/>
-                      <a:round/>
-                      <a:headEnd type="none" w="med" len="med"/>
-                      <a:tailEnd type="none" w="med" len="med"/>
-                    </a:lnL>
-                    <a:lnR w="6350" cap="flat" cmpd="sng" algn="ctr">
-                      <a:solidFill>
-                        <a:srgbClr val="E5E2DC"/>
-                      </a:solidFill>
-                      <a:prstDash val="solid"/>
-                      <a:round/>
-                      <a:headEnd type="none" w="med" len="med"/>
-                      <a:tailEnd type="none" w="med" len="med"/>
-                    </a:lnR>
-                    <a:lnT w="6350" cap="flat" cmpd="sng" algn="ctr">
-                      <a:solidFill>
-                        <a:srgbClr val="E5E2DC"/>
-                      </a:solidFill>
-                      <a:prstDash val="solid"/>
-                      <a:round/>
-                      <a:headEnd type="none" w="med" len="med"/>
-                      <a:tailEnd type="none" w="med" len="med"/>
-                    </a:lnT>
-                    <a:lnB w="6350" cap="flat" cmpd="sng" algn="ctr">
-                      <a:solidFill>
-                        <a:srgbClr val="E5E2DC"/>
-                      </a:solidFill>
-                      <a:prstDash val="solid"/>
-                      <a:round/>
-                      <a:headEnd type="none" w="med" len="med"/>
-                      <a:tailEnd type="none" w="med" len="med"/>
-                    </a:lnB>
-                    <a:solidFill>
-                      <a:srgbClr val="2A9D8F"/>
-                    </a:solidFill>
-                  </a:tcPr>
-                </a:tc>
-                <a:tc>
-                  <a:txBody>
-                    <a:bodyPr/>
-                    <a:lstStyle/>
-                    <a:p>
-                      <a:pPr indent="0" marL="0">
-                        <a:buNone/>
-                      </a:pPr>
-                      <a:r>
-                        <a:rPr lang="en-US" sz="1300" b="1" dirty="0">
-                          <a:solidFill>
-                            <a:srgbClr val="FFFFFF"/>
-                          </a:solidFill>
-                          <a:latin typeface="Calibri" pitchFamily="34" charset="0"/>
-                          <a:ea typeface="Calibri" pitchFamily="34" charset="-122"/>
-                          <a:cs typeface="Calibri" pitchFamily="34" charset="-120"/>
-                        </a:rPr>
-                        <a:t>Regional Example</a:t>
-                      </a:r>
-                      <a:endParaRPr lang="en-US" sz="1300" dirty="0">
-                        <a:latin typeface="Calibri" charset="0"/>
-                        <a:ea typeface="Calibri" charset="0"/>
-                        <a:cs typeface="Calibri" charset="0"/>
-                      </a:endParaRPr>
-                    </a:p>
-                  </a:txBody>
-                  <a:tcPr marL="91440" marR="91440" marT="45720" marB="45720">
-                    <a:lnL w="6350" cap="flat" cmpd="sng" algn="ctr">
-                      <a:solidFill>
-                        <a:srgbClr val="E5E2DC"/>
-                      </a:solidFill>
-                      <a:prstDash val="solid"/>
-                      <a:round/>
-                      <a:headEnd type="none" w="med" len="med"/>
-                      <a:tailEnd type="none" w="med" len="med"/>
-                    </a:lnL>
-                    <a:lnR w="6350" cap="flat" cmpd="sng" algn="ctr">
-                      <a:solidFill>
-                        <a:srgbClr val="E5E2DC"/>
-                      </a:solidFill>
-                      <a:prstDash val="solid"/>
-                      <a:round/>
-                      <a:headEnd type="none" w="med" len="med"/>
-                      <a:tailEnd type="none" w="med" len="med"/>
-                    </a:lnR>
-                    <a:lnT w="6350" cap="flat" cmpd="sng" algn="ctr">
-                      <a:solidFill>
-                        <a:srgbClr val="E5E2DC"/>
-                      </a:solidFill>
-                      <a:prstDash val="solid"/>
-                      <a:round/>
-                      <a:headEnd type="none" w="med" len="med"/>
-                      <a:tailEnd type="none" w="med" len="med"/>
-                    </a:lnT>
-                    <a:lnB w="6350" cap="flat" cmpd="sng" algn="ctr">
-                      <a:solidFill>
-                        <a:srgbClr val="E5E2DC"/>
-                      </a:solidFill>
-                      <a:prstDash val="solid"/>
-                      <a:round/>
-                      <a:headEnd type="none" w="med" len="med"/>
-                      <a:tailEnd type="none" w="med" len="med"/>
-                    </a:lnB>
-                    <a:solidFill>
-                      <a:srgbClr val="2A9D8F"/>
-                    </a:solidFill>
-                  </a:tcPr>
-                </a:tc>
-              </a:tr>
-              <a:tr h="502920">
-                <a:tc>
-                  <a:txBody>
-                    <a:bodyPr/>
-                    <a:lstStyle/>
-                    <a:p>
-                      <a:pPr indent="0" marL="0">
-                        <a:buNone/>
-                      </a:pPr>
-                      <a:r>
-                        <a:rPr lang="en-US" sz="1300" dirty="0">
-                          <a:solidFill>
-                            <a:srgbClr val="3D3A36"/>
-                          </a:solidFill>
-                          <a:latin typeface="Calibri" pitchFamily="34" charset="0"/>
-                          <a:ea typeface="Calibri" pitchFamily="34" charset="-122"/>
-                          <a:cs typeface="Calibri" pitchFamily="34" charset="-120"/>
-                        </a:rPr>
-                        <a:t>Convergent</a:t>
-                      </a:r>
-                      <a:endParaRPr lang="en-US" sz="1300" dirty="0">
-                        <a:latin typeface="Calibri" charset="0"/>
-                        <a:ea typeface="Calibri" charset="0"/>
-                        <a:cs typeface="Calibri" charset="0"/>
-                      </a:endParaRPr>
-                    </a:p>
-                  </a:txBody>
-                  <a:tcPr marL="91440" marR="91440" marT="45720" marB="45720">
-                    <a:lnL w="6350" cap="flat" cmpd="sng" algn="ctr">
-                      <a:solidFill>
-                        <a:srgbClr val="E5E2DC"/>
-                      </a:solidFill>
-                      <a:prstDash val="solid"/>
-                      <a:round/>
-                      <a:headEnd type="none" w="med" len="med"/>
-                      <a:tailEnd type="none" w="med" len="med"/>
-                    </a:lnL>
-                    <a:lnR w="6350" cap="flat" cmpd="sng" algn="ctr">
-                      <a:solidFill>
-                        <a:srgbClr val="E5E2DC"/>
-                      </a:solidFill>
-                      <a:prstDash val="solid"/>
-                      <a:round/>
-                      <a:headEnd type="none" w="med" len="med"/>
-                      <a:tailEnd type="none" w="med" len="med"/>
-                    </a:lnR>
-                    <a:lnT w="6350" cap="flat" cmpd="sng" algn="ctr">
-                      <a:solidFill>
-                        <a:srgbClr val="E5E2DC"/>
-                      </a:solidFill>
-                      <a:prstDash val="solid"/>
-                      <a:round/>
-                      <a:headEnd type="none" w="med" len="med"/>
-                      <a:tailEnd type="none" w="med" len="med"/>
-                    </a:lnT>
-                    <a:lnB w="6350" cap="flat" cmpd="sng" algn="ctr">
-                      <a:solidFill>
-                        <a:srgbClr val="E5E2DC"/>
-                      </a:solidFill>
-                      <a:prstDash val="solid"/>
-                      <a:round/>
-                      <a:headEnd type="none" w="med" len="med"/>
-                      <a:tailEnd type="none" w="med" len="med"/>
-                    </a:lnB>
-                  </a:tcPr>
-                </a:tc>
-                <a:tc>
-                  <a:txBody>
-                    <a:bodyPr/>
-                    <a:lstStyle/>
-                    <a:p>
-                      <a:pPr indent="0" marL="0">
-                        <a:buNone/>
-                      </a:pPr>
-                      <a:r>
-                        <a:rPr lang="en-US" sz="1300" dirty="0">
-                          <a:solidFill>
-                            <a:srgbClr val="3D3A36"/>
-                          </a:solidFill>
-                          <a:latin typeface="Calibri" pitchFamily="34" charset="0"/>
-                          <a:ea typeface="Calibri" pitchFamily="34" charset="-122"/>
-                          <a:cs typeface="Calibri" pitchFamily="34" charset="-120"/>
-                        </a:rPr>
-                        <a:t>Together</a:t>
-                      </a:r>
-                      <a:endParaRPr lang="en-US" sz="1300" dirty="0">
-                        <a:latin typeface="Calibri" charset="0"/>
-                        <a:ea typeface="Calibri" charset="0"/>
-                        <a:cs typeface="Calibri" charset="0"/>
-                      </a:endParaRPr>
-                    </a:p>
-                  </a:txBody>
-                  <a:tcPr marL="91440" marR="91440" marT="45720" marB="45720">
-                    <a:lnL w="6350" cap="flat" cmpd="sng" algn="ctr">
-                      <a:solidFill>
-                        <a:srgbClr val="E5E2DC"/>
-                      </a:solidFill>
-                      <a:prstDash val="solid"/>
-                      <a:round/>
-                      <a:headEnd type="none" w="med" len="med"/>
-                      <a:tailEnd type="none" w="med" len="med"/>
-                    </a:lnL>
-                    <a:lnR w="6350" cap="flat" cmpd="sng" algn="ctr">
-                      <a:solidFill>
-                        <a:srgbClr val="E5E2DC"/>
-                      </a:solidFill>
-                      <a:prstDash val="solid"/>
-                      <a:round/>
-                      <a:headEnd type="none" w="med" len="med"/>
-                      <a:tailEnd type="none" w="med" len="med"/>
-                    </a:lnR>
-                    <a:lnT w="6350" cap="flat" cmpd="sng" algn="ctr">
-                      <a:solidFill>
-                        <a:srgbClr val="E5E2DC"/>
-                      </a:solidFill>
-                      <a:prstDash val="solid"/>
-                      <a:round/>
-                      <a:headEnd type="none" w="med" len="med"/>
-                      <a:tailEnd type="none" w="med" len="med"/>
-                    </a:lnT>
-                    <a:lnB w="6350" cap="flat" cmpd="sng" algn="ctr">
-                      <a:solidFill>
-                        <a:srgbClr val="E5E2DC"/>
-                      </a:solidFill>
-                      <a:prstDash val="solid"/>
-                      <a:round/>
-                      <a:headEnd type="none" w="med" len="med"/>
-                      <a:tailEnd type="none" w="med" len="med"/>
-                    </a:lnB>
-                  </a:tcPr>
-                </a:tc>
-                <a:tc>
-                  <a:txBody>
-                    <a:bodyPr/>
-                    <a:lstStyle/>
-                    <a:p>
-                      <a:pPr indent="0" marL="0">
-                        <a:buNone/>
-                      </a:pPr>
-                      <a:r>
-                        <a:rPr lang="en-US" sz="1300" dirty="0">
-                          <a:solidFill>
-                            <a:srgbClr val="3D3A36"/>
-                          </a:solidFill>
-                          <a:latin typeface="Calibri" pitchFamily="34" charset="0"/>
-                          <a:ea typeface="Calibri" pitchFamily="34" charset="-122"/>
-                          <a:cs typeface="Calibri" pitchFamily="34" charset="-120"/>
-                        </a:rPr>
-                        <a:t>Mountains, trenches</a:t>
-                      </a:r>
-                      <a:endParaRPr lang="en-US" sz="1300" dirty="0">
-                        <a:latin typeface="Calibri" charset="0"/>
-                        <a:ea typeface="Calibri" charset="0"/>
-                        <a:cs typeface="Calibri" charset="0"/>
-                      </a:endParaRPr>
-                    </a:p>
-                  </a:txBody>
-                  <a:tcPr marL="91440" marR="91440" marT="45720" marB="45720">
-                    <a:lnL w="6350" cap="flat" cmpd="sng" algn="ctr">
-                      <a:solidFill>
-                        <a:srgbClr val="E5E2DC"/>
-                      </a:solidFill>
-                      <a:prstDash val="solid"/>
-                      <a:round/>
-                      <a:headEnd type="none" w="med" len="med"/>
-                      <a:tailEnd type="none" w="med" len="med"/>
-                    </a:lnL>
-                    <a:lnR w="6350" cap="flat" cmpd="sng" algn="ctr">
-                      <a:solidFill>
-                        <a:srgbClr val="E5E2DC"/>
-                      </a:solidFill>
-                      <a:prstDash val="solid"/>
-                      <a:round/>
-                      <a:headEnd type="none" w="med" len="med"/>
-                      <a:tailEnd type="none" w="med" len="med"/>
-                    </a:lnR>
-                    <a:lnT w="6350" cap="flat" cmpd="sng" algn="ctr">
-                      <a:solidFill>
-                        <a:srgbClr val="E5E2DC"/>
-                      </a:solidFill>
-                      <a:prstDash val="solid"/>
-                      <a:round/>
-                      <a:headEnd type="none" w="med" len="med"/>
-                      <a:tailEnd type="none" w="med" len="med"/>
-                    </a:lnT>
-                    <a:lnB w="6350" cap="flat" cmpd="sng" algn="ctr">
-                      <a:solidFill>
-                        <a:srgbClr val="E5E2DC"/>
-                      </a:solidFill>
-                      <a:prstDash val="solid"/>
-                      <a:round/>
-                      <a:headEnd type="none" w="med" len="med"/>
-                      <a:tailEnd type="none" w="med" len="med"/>
-                    </a:lnB>
-                  </a:tcPr>
-                </a:tc>
-                <a:tc>
-                  <a:txBody>
-                    <a:bodyPr/>
-                    <a:lstStyle/>
-                    <a:p>
-                      <a:pPr indent="0" marL="0">
-                        <a:buNone/>
-                      </a:pPr>
-                      <a:r>
-                        <a:rPr lang="en-US" sz="1300" dirty="0">
-                          <a:solidFill>
-                            <a:srgbClr val="3D3A36"/>
-                          </a:solidFill>
-                          <a:latin typeface="Calibri" pitchFamily="34" charset="0"/>
-                          <a:ea typeface="Calibri" pitchFamily="34" charset="-122"/>
-                          <a:cs typeface="Calibri" pitchFamily="34" charset="-120"/>
-                        </a:rPr>
-                        <a:t>Himalayas, Japan Trench</a:t>
-                      </a:r>
-                      <a:endParaRPr lang="en-US" sz="1300" dirty="0">
-                        <a:latin typeface="Calibri" charset="0"/>
-                        <a:ea typeface="Calibri" charset="0"/>
-                        <a:cs typeface="Calibri" charset="0"/>
-                      </a:endParaRPr>
-                    </a:p>
-                  </a:txBody>
-                  <a:tcPr marL="91440" marR="91440" marT="45720" marB="45720">
-                    <a:lnL w="6350" cap="flat" cmpd="sng" algn="ctr">
-                      <a:solidFill>
-                        <a:srgbClr val="E5E2DC"/>
-                      </a:solidFill>
-                      <a:prstDash val="solid"/>
-                      <a:round/>
-                      <a:headEnd type="none" w="med" len="med"/>
-                      <a:tailEnd type="none" w="med" len="med"/>
-                    </a:lnL>
-                    <a:lnR w="6350" cap="flat" cmpd="sng" algn="ctr">
-                      <a:solidFill>
-                        <a:srgbClr val="E5E2DC"/>
-                      </a:solidFill>
-                      <a:prstDash val="solid"/>
-                      <a:round/>
-                      <a:headEnd type="none" w="med" len="med"/>
-                      <a:tailEnd type="none" w="med" len="med"/>
-                    </a:lnR>
-                    <a:lnT w="6350" cap="flat" cmpd="sng" algn="ctr">
-                      <a:solidFill>
-                        <a:srgbClr val="E5E2DC"/>
-                      </a:solidFill>
-                      <a:prstDash val="solid"/>
-                      <a:round/>
-                      <a:headEnd type="none" w="med" len="med"/>
-                      <a:tailEnd type="none" w="med" len="med"/>
-                    </a:lnT>
-                    <a:lnB w="6350" cap="flat" cmpd="sng" algn="ctr">
-                      <a:solidFill>
-                        <a:srgbClr val="E5E2DC"/>
-                      </a:solidFill>
-                      <a:prstDash val="solid"/>
-                      <a:round/>
-                      <a:headEnd type="none" w="med" len="med"/>
-                      <a:tailEnd type="none" w="med" len="med"/>
-                    </a:lnB>
-                  </a:tcPr>
-                </a:tc>
-              </a:tr>
-              <a:tr h="502920">
-                <a:tc>
-                  <a:txBody>
-                    <a:bodyPr/>
-                    <a:lstStyle/>
-                    <a:p>
-                      <a:pPr indent="0" marL="0">
-                        <a:buNone/>
-                      </a:pPr>
-                      <a:r>
-                        <a:rPr lang="en-US" sz="1300" dirty="0">
-                          <a:solidFill>
-                            <a:srgbClr val="3D3A36"/>
-                          </a:solidFill>
-                          <a:latin typeface="Calibri" pitchFamily="34" charset="0"/>
-                          <a:ea typeface="Calibri" pitchFamily="34" charset="-122"/>
-                          <a:cs typeface="Calibri" pitchFamily="34" charset="-120"/>
-                        </a:rPr>
-                        <a:t>Divergent</a:t>
-                      </a:r>
-                      <a:endParaRPr lang="en-US" sz="1300" dirty="0">
-                        <a:latin typeface="Calibri" charset="0"/>
-                        <a:ea typeface="Calibri" charset="0"/>
-                        <a:cs typeface="Calibri" charset="0"/>
-                      </a:endParaRPr>
-                    </a:p>
-                  </a:txBody>
-                  <a:tcPr marL="91440" marR="91440" marT="45720" marB="45720">
-                    <a:lnL w="6350" cap="flat" cmpd="sng" algn="ctr">
-                      <a:solidFill>
-                        <a:srgbClr val="E5E2DC"/>
-                      </a:solidFill>
-                      <a:prstDash val="solid"/>
-                      <a:round/>
-                      <a:headEnd type="none" w="med" len="med"/>
-                      <a:tailEnd type="none" w="med" len="med"/>
-                    </a:lnL>
-                    <a:lnR w="6350" cap="flat" cmpd="sng" algn="ctr">
-                      <a:solidFill>
-                        <a:srgbClr val="E5E2DC"/>
-                      </a:solidFill>
-                      <a:prstDash val="solid"/>
-                      <a:round/>
-                      <a:headEnd type="none" w="med" len="med"/>
-                      <a:tailEnd type="none" w="med" len="med"/>
-                    </a:lnR>
-                    <a:lnT w="6350" cap="flat" cmpd="sng" algn="ctr">
-                      <a:solidFill>
-                        <a:srgbClr val="E5E2DC"/>
-                      </a:solidFill>
-                      <a:prstDash val="solid"/>
-                      <a:round/>
-                      <a:headEnd type="none" w="med" len="med"/>
-                      <a:tailEnd type="none" w="med" len="med"/>
-                    </a:lnT>
-                    <a:lnB w="6350" cap="flat" cmpd="sng" algn="ctr">
-                      <a:solidFill>
-                        <a:srgbClr val="E5E2DC"/>
-                      </a:solidFill>
-                      <a:prstDash val="solid"/>
-                      <a:round/>
-                      <a:headEnd type="none" w="med" len="med"/>
-                      <a:tailEnd type="none" w="med" len="med"/>
-                    </a:lnB>
-                  </a:tcPr>
-                </a:tc>
-                <a:tc>
-                  <a:txBody>
-                    <a:bodyPr/>
-                    <a:lstStyle/>
-                    <a:p>
-                      <a:pPr indent="0" marL="0">
-                        <a:buNone/>
-                      </a:pPr>
-                      <a:r>
-                        <a:rPr lang="en-US" sz="1300" dirty="0">
-                          <a:solidFill>
-                            <a:srgbClr val="3D3A36"/>
-                          </a:solidFill>
-                          <a:latin typeface="Calibri" pitchFamily="34" charset="0"/>
-                          <a:ea typeface="Calibri" pitchFamily="34" charset="-122"/>
-                          <a:cs typeface="Calibri" pitchFamily="34" charset="-120"/>
-                        </a:rPr>
-                        <a:t>Apart</a:t>
-                      </a:r>
-                      <a:endParaRPr lang="en-US" sz="1300" dirty="0">
-                        <a:latin typeface="Calibri" charset="0"/>
-                        <a:ea typeface="Calibri" charset="0"/>
-                        <a:cs typeface="Calibri" charset="0"/>
-                      </a:endParaRPr>
-                    </a:p>
-                  </a:txBody>
-                  <a:tcPr marL="91440" marR="91440" marT="45720" marB="45720">
-                    <a:lnL w="6350" cap="flat" cmpd="sng" algn="ctr">
-                      <a:solidFill>
-                        <a:srgbClr val="E5E2DC"/>
-                      </a:solidFill>
-                      <a:prstDash val="solid"/>
-                      <a:round/>
-                      <a:headEnd type="none" w="med" len="med"/>
-                      <a:tailEnd type="none" w="med" len="med"/>
-                    </a:lnL>
-                    <a:lnR w="6350" cap="flat" cmpd="sng" algn="ctr">
-                      <a:solidFill>
-                        <a:srgbClr val="E5E2DC"/>
-                      </a:solidFill>
-                      <a:prstDash val="solid"/>
-                      <a:round/>
-                      <a:headEnd type="none" w="med" len="med"/>
-                      <a:tailEnd type="none" w="med" len="med"/>
-                    </a:lnR>
-                    <a:lnT w="6350" cap="flat" cmpd="sng" algn="ctr">
-                      <a:solidFill>
-                        <a:srgbClr val="E5E2DC"/>
-                      </a:solidFill>
-                      <a:prstDash val="solid"/>
-                      <a:round/>
-                      <a:headEnd type="none" w="med" len="med"/>
-                      <a:tailEnd type="none" w="med" len="med"/>
-                    </a:lnT>
-                    <a:lnB w="6350" cap="flat" cmpd="sng" algn="ctr">
-                      <a:solidFill>
-                        <a:srgbClr val="E5E2DC"/>
-                      </a:solidFill>
-                      <a:prstDash val="solid"/>
-                      <a:round/>
-                      <a:headEnd type="none" w="med" len="med"/>
-                      <a:tailEnd type="none" w="med" len="med"/>
-                    </a:lnB>
-                  </a:tcPr>
-                </a:tc>
-                <a:tc>
-                  <a:txBody>
-                    <a:bodyPr/>
-                    <a:lstStyle/>
-                    <a:p>
-                      <a:pPr indent="0" marL="0">
-                        <a:buNone/>
-                      </a:pPr>
-                      <a:r>
-                        <a:rPr lang="en-US" sz="1300" dirty="0">
-                          <a:solidFill>
-                            <a:srgbClr val="3D3A36"/>
-                          </a:solidFill>
-                          <a:latin typeface="Calibri" pitchFamily="34" charset="0"/>
-                          <a:ea typeface="Calibri" pitchFamily="34" charset="-122"/>
-                          <a:cs typeface="Calibri" pitchFamily="34" charset="-120"/>
-                        </a:rPr>
-                        <a:t>New crust, ridges</a:t>
-                      </a:r>
-                      <a:endParaRPr lang="en-US" sz="1300" dirty="0">
-                        <a:latin typeface="Calibri" charset="0"/>
-                        <a:ea typeface="Calibri" charset="0"/>
-                        <a:cs typeface="Calibri" charset="0"/>
-                      </a:endParaRPr>
-                    </a:p>
-                  </a:txBody>
-                  <a:tcPr marL="91440" marR="91440" marT="45720" marB="45720">
-                    <a:lnL w="6350" cap="flat" cmpd="sng" algn="ctr">
-                      <a:solidFill>
-                        <a:srgbClr val="E5E2DC"/>
-                      </a:solidFill>
-                      <a:prstDash val="solid"/>
-                      <a:round/>
-                      <a:headEnd type="none" w="med" len="med"/>
-                      <a:tailEnd type="none" w="med" len="med"/>
-                    </a:lnL>
-                    <a:lnR w="6350" cap="flat" cmpd="sng" algn="ctr">
-                      <a:solidFill>
-                        <a:srgbClr val="E5E2DC"/>
-                      </a:solidFill>
-                      <a:prstDash val="solid"/>
-                      <a:round/>
-                      <a:headEnd type="none" w="med" len="med"/>
-                      <a:tailEnd type="none" w="med" len="med"/>
-                    </a:lnR>
-                    <a:lnT w="6350" cap="flat" cmpd="sng" algn="ctr">
-                      <a:solidFill>
-                        <a:srgbClr val="E5E2DC"/>
-                      </a:solidFill>
-                      <a:prstDash val="solid"/>
-                      <a:round/>
-                      <a:headEnd type="none" w="med" len="med"/>
-                      <a:tailEnd type="none" w="med" len="med"/>
-                    </a:lnT>
-                    <a:lnB w="6350" cap="flat" cmpd="sng" algn="ctr">
-                      <a:solidFill>
-                        <a:srgbClr val="E5E2DC"/>
-                      </a:solidFill>
-                      <a:prstDash val="solid"/>
-                      <a:round/>
-                      <a:headEnd type="none" w="med" len="med"/>
-                      <a:tailEnd type="none" w="med" len="med"/>
-                    </a:lnB>
-                  </a:tcPr>
-                </a:tc>
-                <a:tc>
-                  <a:txBody>
-                    <a:bodyPr/>
-                    <a:lstStyle/>
-                    <a:p>
-                      <a:pPr indent="0" marL="0">
-                        <a:buNone/>
-                      </a:pPr>
-                      <a:r>
-                        <a:rPr lang="en-US" sz="1300" dirty="0">
-                          <a:solidFill>
-                            <a:srgbClr val="3D3A36"/>
-                          </a:solidFill>
-                          <a:latin typeface="Calibri" pitchFamily="34" charset="0"/>
-                          <a:ea typeface="Calibri" pitchFamily="34" charset="-122"/>
-                          <a:cs typeface="Calibri" pitchFamily="34" charset="-120"/>
-                        </a:rPr>
-                        <a:t>Mid-Atlantic, Rhine Graben (Germany)</a:t>
-                      </a:r>
-                      <a:endParaRPr lang="en-US" sz="1300" dirty="0">
-                        <a:latin typeface="Calibri" charset="0"/>
-                        <a:ea typeface="Calibri" charset="0"/>
-                        <a:cs typeface="Calibri" charset="0"/>
-                      </a:endParaRPr>
-                    </a:p>
-                  </a:txBody>
-                  <a:tcPr marL="91440" marR="91440" marT="45720" marB="45720">
-                    <a:lnL w="6350" cap="flat" cmpd="sng" algn="ctr">
-                      <a:solidFill>
-                        <a:srgbClr val="E5E2DC"/>
-                      </a:solidFill>
-                      <a:prstDash val="solid"/>
-                      <a:round/>
-                      <a:headEnd type="none" w="med" len="med"/>
-                      <a:tailEnd type="none" w="med" len="med"/>
-                    </a:lnL>
-                    <a:lnR w="6350" cap="flat" cmpd="sng" algn="ctr">
-                      <a:solidFill>
-                        <a:srgbClr val="E5E2DC"/>
-                      </a:solidFill>
-                      <a:prstDash val="solid"/>
-                      <a:round/>
-                      <a:headEnd type="none" w="med" len="med"/>
-                      <a:tailEnd type="none" w="med" len="med"/>
-                    </a:lnR>
-                    <a:lnT w="6350" cap="flat" cmpd="sng" algn="ctr">
-                      <a:solidFill>
-                        <a:srgbClr val="E5E2DC"/>
-                      </a:solidFill>
-                      <a:prstDash val="solid"/>
-                      <a:round/>
-                      <a:headEnd type="none" w="med" len="med"/>
-                      <a:tailEnd type="none" w="med" len="med"/>
-                    </a:lnT>
-                    <a:lnB w="6350" cap="flat" cmpd="sng" algn="ctr">
-                      <a:solidFill>
-                        <a:srgbClr val="E5E2DC"/>
-                      </a:solidFill>
-                      <a:prstDash val="solid"/>
-                      <a:round/>
-                      <a:headEnd type="none" w="med" len="med"/>
-                      <a:tailEnd type="none" w="med" len="med"/>
-                    </a:lnB>
-                  </a:tcPr>
-                </a:tc>
-              </a:tr>
-              <a:tr h="502920">
-                <a:tc>
-                  <a:txBody>
-                    <a:bodyPr/>
-                    <a:lstStyle/>
-                    <a:p>
-                      <a:pPr indent="0" marL="0">
-                        <a:buNone/>
-                      </a:pPr>
-                      <a:r>
-                        <a:rPr lang="en-US" sz="1300" dirty="0">
-                          <a:solidFill>
-                            <a:srgbClr val="3D3A36"/>
-                          </a:solidFill>
-                          <a:latin typeface="Calibri" pitchFamily="34" charset="0"/>
-                          <a:ea typeface="Calibri" pitchFamily="34" charset="-122"/>
-                          <a:cs typeface="Calibri" pitchFamily="34" charset="-120"/>
-                        </a:rPr>
-                        <a:t>Transform</a:t>
-                      </a:r>
-                      <a:endParaRPr lang="en-US" sz="1300" dirty="0">
-                        <a:latin typeface="Calibri" charset="0"/>
-                        <a:ea typeface="Calibri" charset="0"/>
-                        <a:cs typeface="Calibri" charset="0"/>
-                      </a:endParaRPr>
-                    </a:p>
-                  </a:txBody>
-                  <a:tcPr marL="91440" marR="91440" marT="45720" marB="45720">
-                    <a:lnL w="6350" cap="flat" cmpd="sng" algn="ctr">
-                      <a:solidFill>
-                        <a:srgbClr val="E5E2DC"/>
-                      </a:solidFill>
-                      <a:prstDash val="solid"/>
-                      <a:round/>
-                      <a:headEnd type="none" w="med" len="med"/>
-                      <a:tailEnd type="none" w="med" len="med"/>
-                    </a:lnL>
-                    <a:lnR w="6350" cap="flat" cmpd="sng" algn="ctr">
-                      <a:solidFill>
-                        <a:srgbClr val="E5E2DC"/>
-                      </a:solidFill>
-                      <a:prstDash val="solid"/>
-                      <a:round/>
-                      <a:headEnd type="none" w="med" len="med"/>
-                      <a:tailEnd type="none" w="med" len="med"/>
-                    </a:lnR>
-                    <a:lnT w="6350" cap="flat" cmpd="sng" algn="ctr">
-                      <a:solidFill>
-                        <a:srgbClr val="E5E2DC"/>
-                      </a:solidFill>
-                      <a:prstDash val="solid"/>
-                      <a:round/>
-                      <a:headEnd type="none" w="med" len="med"/>
-                      <a:tailEnd type="none" w="med" len="med"/>
-                    </a:lnT>
-                    <a:lnB w="6350" cap="flat" cmpd="sng" algn="ctr">
-                      <a:solidFill>
-                        <a:srgbClr val="E5E2DC"/>
-                      </a:solidFill>
-                      <a:prstDash val="solid"/>
-                      <a:round/>
-                      <a:headEnd type="none" w="med" len="med"/>
-                      <a:tailEnd type="none" w="med" len="med"/>
-                    </a:lnB>
-                  </a:tcPr>
-                </a:tc>
-                <a:tc>
-                  <a:txBody>
-                    <a:bodyPr/>
-                    <a:lstStyle/>
-                    <a:p>
-                      <a:pPr indent="0" marL="0">
-                        <a:buNone/>
-                      </a:pPr>
-                      <a:r>
-                        <a:rPr lang="en-US" sz="1300" dirty="0">
-                          <a:solidFill>
-                            <a:srgbClr val="3D3A36"/>
-                          </a:solidFill>
-                          <a:latin typeface="Calibri" pitchFamily="34" charset="0"/>
-                          <a:ea typeface="Calibri" pitchFamily="34" charset="-122"/>
-                          <a:cs typeface="Calibri" pitchFamily="34" charset="-120"/>
-                        </a:rPr>
-                        <a:t>Side by side</a:t>
-                      </a:r>
-                      <a:endParaRPr lang="en-US" sz="1300" dirty="0">
-                        <a:latin typeface="Calibri" charset="0"/>
-                        <a:ea typeface="Calibri" charset="0"/>
-                        <a:cs typeface="Calibri" charset="0"/>
-                      </a:endParaRPr>
-                    </a:p>
-                  </a:txBody>
-                  <a:tcPr marL="91440" marR="91440" marT="45720" marB="45720">
-                    <a:lnL w="6350" cap="flat" cmpd="sng" algn="ctr">
-                      <a:solidFill>
-                        <a:srgbClr val="E5E2DC"/>
-                      </a:solidFill>
-                      <a:prstDash val="solid"/>
-                      <a:round/>
-                      <a:headEnd type="none" w="med" len="med"/>
-                      <a:tailEnd type="none" w="med" len="med"/>
-                    </a:lnL>
-                    <a:lnR w="6350" cap="flat" cmpd="sng" algn="ctr">
-                      <a:solidFill>
-                        <a:srgbClr val="E5E2DC"/>
-                      </a:solidFill>
-                      <a:prstDash val="solid"/>
-                      <a:round/>
-                      <a:headEnd type="none" w="med" len="med"/>
-                      <a:tailEnd type="none" w="med" len="med"/>
-                    </a:lnR>
-                    <a:lnT w="6350" cap="flat" cmpd="sng" algn="ctr">
-                      <a:solidFill>
-                        <a:srgbClr val="E5E2DC"/>
-                      </a:solidFill>
-                      <a:prstDash val="solid"/>
-                      <a:round/>
-                      <a:headEnd type="none" w="med" len="med"/>
-                      <a:tailEnd type="none" w="med" len="med"/>
-                    </a:lnT>
-                    <a:lnB w="6350" cap="flat" cmpd="sng" algn="ctr">
-                      <a:solidFill>
-                        <a:srgbClr val="E5E2DC"/>
-                      </a:solidFill>
-                      <a:prstDash val="solid"/>
-                      <a:round/>
-                      <a:headEnd type="none" w="med" len="med"/>
-                      <a:tailEnd type="none" w="med" len="med"/>
-                    </a:lnB>
-                  </a:tcPr>
-                </a:tc>
-                <a:tc>
-                  <a:txBody>
-                    <a:bodyPr/>
-                    <a:lstStyle/>
-                    <a:p>
-                      <a:pPr indent="0" marL="0">
-                        <a:buNone/>
-                      </a:pPr>
-                      <a:r>
-                        <a:rPr lang="en-US" sz="1300" dirty="0">
-                          <a:solidFill>
-                            <a:srgbClr val="3D3A36"/>
-                          </a:solidFill>
-                          <a:latin typeface="Calibri" pitchFamily="34" charset="0"/>
-                          <a:ea typeface="Calibri" pitchFamily="34" charset="-122"/>
-                          <a:cs typeface="Calibri" pitchFamily="34" charset="-120"/>
-                        </a:rPr>
-                        <a:t>Earthquakes</a:t>
-                      </a:r>
-                      <a:endParaRPr lang="en-US" sz="1300" dirty="0">
-                        <a:latin typeface="Calibri" charset="0"/>
-                        <a:ea typeface="Calibri" charset="0"/>
-                        <a:cs typeface="Calibri" charset="0"/>
-                      </a:endParaRPr>
-                    </a:p>
-                  </a:txBody>
-                  <a:tcPr marL="91440" marR="91440" marT="45720" marB="45720">
-                    <a:lnL w="6350" cap="flat" cmpd="sng" algn="ctr">
-                      <a:solidFill>
-                        <a:srgbClr val="E5E2DC"/>
-                      </a:solidFill>
-                      <a:prstDash val="solid"/>
-                      <a:round/>
-                      <a:headEnd type="none" w="med" len="med"/>
-                      <a:tailEnd type="none" w="med" len="med"/>
-                    </a:lnL>
-                    <a:lnR w="6350" cap="flat" cmpd="sng" algn="ctr">
-                      <a:solidFill>
-                        <a:srgbClr val="E5E2DC"/>
-                      </a:solidFill>
-                      <a:prstDash val="solid"/>
-                      <a:round/>
-                      <a:headEnd type="none" w="med" len="med"/>
-                      <a:tailEnd type="none" w="med" len="med"/>
-                    </a:lnR>
-                    <a:lnT w="6350" cap="flat" cmpd="sng" algn="ctr">
-                      <a:solidFill>
-                        <a:srgbClr val="E5E2DC"/>
-                      </a:solidFill>
-                      <a:prstDash val="solid"/>
-                      <a:round/>
-                      <a:headEnd type="none" w="med" len="med"/>
-                      <a:tailEnd type="none" w="med" len="med"/>
-                    </a:lnT>
-                    <a:lnB w="6350" cap="flat" cmpd="sng" algn="ctr">
-                      <a:solidFill>
-                        <a:srgbClr val="E5E2DC"/>
-                      </a:solidFill>
-                      <a:prstDash val="solid"/>
-                      <a:round/>
-                      <a:headEnd type="none" w="med" len="med"/>
-                      <a:tailEnd type="none" w="med" len="med"/>
-                    </a:lnB>
-                  </a:tcPr>
-                </a:tc>
-                <a:tc>
-                  <a:txBody>
-                    <a:bodyPr/>
-                    <a:lstStyle/>
-                    <a:p>
-                      <a:pPr indent="0" marL="0">
-                        <a:buNone/>
-                      </a:pPr>
-                      <a:r>
-                        <a:rPr lang="en-US" sz="1300" dirty="0">
-                          <a:solidFill>
-                            <a:srgbClr val="3D3A36"/>
-                          </a:solidFill>
-                          <a:latin typeface="Calibri" pitchFamily="34" charset="0"/>
-                          <a:ea typeface="Calibri" pitchFamily="34" charset="-122"/>
-                          <a:cs typeface="Calibri" pitchFamily="34" charset="-120"/>
-                        </a:rPr>
-                        <a:t>Tan-Lu Fault (near Nanjing)</a:t>
-                      </a:r>
-                      <a:endParaRPr lang="en-US" sz="1300" dirty="0">
-                        <a:latin typeface="Calibri" charset="0"/>
-                        <a:ea typeface="Calibri" charset="0"/>
-                        <a:cs typeface="Calibri" charset="0"/>
-                      </a:endParaRPr>
-                    </a:p>
-                  </a:txBody>
-                  <a:tcPr marL="91440" marR="91440" marT="45720" marB="45720">
-                    <a:lnL w="6350" cap="flat" cmpd="sng" algn="ctr">
-                      <a:solidFill>
-                        <a:srgbClr val="E5E2DC"/>
-                      </a:solidFill>
-                      <a:prstDash val="solid"/>
-                      <a:round/>
-                      <a:headEnd type="none" w="med" len="med"/>
-                      <a:tailEnd type="none" w="med" len="med"/>
-                    </a:lnL>
-                    <a:lnR w="6350" cap="flat" cmpd="sng" algn="ctr">
-                      <a:solidFill>
-                        <a:srgbClr val="E5E2DC"/>
-                      </a:solidFill>
-                      <a:prstDash val="solid"/>
-                      <a:round/>
-                      <a:headEnd type="none" w="med" len="med"/>
-                      <a:tailEnd type="none" w="med" len="med"/>
-                    </a:lnR>
-                    <a:lnT w="6350" cap="flat" cmpd="sng" algn="ctr">
-                      <a:solidFill>
-                        <a:srgbClr val="E5E2DC"/>
-                      </a:solidFill>
-                      <a:prstDash val="solid"/>
-                      <a:round/>
-                      <a:headEnd type="none" w="med" len="med"/>
-                      <a:tailEnd type="none" w="med" len="med"/>
-                    </a:lnT>
-                    <a:lnB w="6350" cap="flat" cmpd="sng" algn="ctr">
-                      <a:solidFill>
-                        <a:srgbClr val="E5E2DC"/>
-                      </a:solidFill>
-                      <a:prstDash val="solid"/>
-                      <a:round/>
-                      <a:headEnd type="none" w="med" len="med"/>
-                      <a:tailEnd type="none" w="med" len="med"/>
-                    </a:lnB>
-                  </a:tcPr>
-                </a:tc>
-              </a:tr>
-            </a:tbl>
-          </a:graphicData>
-        </a:graphic>
-      </p:graphicFrame>
+              <a:t>Plate Tectonics Recap</a:t>
+            </a:r>
+            <a:endParaRPr lang="en-US" sz="2400" dirty="0"/>
+          </a:p>
+        </p:txBody>
+      </p:sp>
+      <p:sp>
+        <p:nvSpPr>
+          <p:cNvPr id="4" name="Shape 2"/>
+          <p:cNvSpPr/>
+          <p:nvPr/>
+        </p:nvSpPr>
+        <p:spPr>
+          <a:xfrm>
+            <a:off x="548640" y="960120"/>
+            <a:ext cx="2286000" cy="36576"/>
+          </a:xfrm>
+          <a:prstGeom prst="rect">
+            <a:avLst/>
+          </a:prstGeom>
+          <a:solidFill>
+            <a:srgbClr val="2A9D8F"/>
+          </a:solidFill>
+          <a:ln/>
+        </p:spPr>
+      </p:sp>
+      <p:sp>
+        <p:nvSpPr>
+          <p:cNvPr id="5" name="Text 3"/>
+          <p:cNvSpPr/>
+          <p:nvPr/>
+        </p:nvSpPr>
+        <p:spPr>
+          <a:xfrm>
+            <a:off x="548640" y="1188720"/>
+            <a:ext cx="10058400" cy="3474720"/>
+          </a:xfrm>
+          <a:prstGeom prst="rect">
+            <a:avLst/>
+          </a:prstGeom>
+          <a:noFill/>
+          <a:ln/>
+        </p:spPr>
+        <p:txBody>
+          <a:bodyPr wrap="square" rtlCol="0" anchor="t"/>
+          <a:lstStyle/>
+          <a:p>
+            <a:pPr>
+              <a:lnSpc>
+                <a:spcPct val="150000"/>
+              </a:lnSpc>
+              <a:spcAft>
+                <a:spcPts val="600"/>
+              </a:spcAft>
+            </a:pPr>
+            <a:r>
+              <a:rPr lang="en-US" sz="1500" dirty="0">
+                <a:solidFill>
+                  <a:srgbClr val="3D3A36"/>
+                </a:solidFill>
+                <a:latin typeface="Arial" pitchFamily="34" charset="0"/>
+                <a:ea typeface="Arial" pitchFamily="34" charset="-122"/>
+                <a:cs typeface="Arial" pitchFamily="34" charset="-120"/>
+              </a:rPr>
+              <a:t>Convection currents in the mantle drive plate movement.</a:t>
+            </a:r>
+            <a:endParaRPr lang="en-US" sz="1500" dirty="0"/>
+          </a:p>
+          <a:p>
+            <a:pPr>
+              <a:lnSpc>
+                <a:spcPct val="150000"/>
+              </a:lnSpc>
+              <a:spcAft>
+                <a:spcPts val="600"/>
+              </a:spcAft>
+            </a:pPr>
+            <a:r>
+              <a:rPr lang="en-US" sz="1500" dirty="0">
+                <a:solidFill>
+                  <a:srgbClr val="3D3A36"/>
+                </a:solidFill>
+                <a:latin typeface="Arial" pitchFamily="34" charset="0"/>
+                <a:ea typeface="Arial" pitchFamily="34" charset="-122"/>
+                <a:cs typeface="Arial" pitchFamily="34" charset="-120"/>
+              </a:rPr>
+              <a:t>3 boundary types: convergent (collide), divergent (apart), transform (slide).</a:t>
+            </a:r>
+            <a:endParaRPr lang="en-US" sz="1500" dirty="0"/>
+          </a:p>
+          <a:p>
+            <a:pPr>
+              <a:lnSpc>
+                <a:spcPct val="150000"/>
+              </a:lnSpc>
+              <a:spcAft>
+                <a:spcPts val="600"/>
+              </a:spcAft>
+            </a:pPr>
+            <a:r>
+              <a:rPr lang="en-US" sz="1500" dirty="0">
+                <a:solidFill>
+                  <a:srgbClr val="3D3A36"/>
+                </a:solidFill>
+                <a:latin typeface="Arial" pitchFamily="34" charset="0"/>
+                <a:ea typeface="Arial" pitchFamily="34" charset="-122"/>
+                <a:cs typeface="Arial" pitchFamily="34" charset="-120"/>
+              </a:rPr>
+              <a:t>Wegener: Pangaea, evidence from fossils, rocks, coastline shapes.</a:t>
+            </a:r>
+            <a:endParaRPr lang="en-US" sz="1500" dirty="0"/>
+          </a:p>
+        </p:txBody>
+      </p:sp>
     </p:spTree>
   </p:cSld>
   <p:clrMapOvr>
@@ -3746,6 +2398,13 @@
 <file path=ppt/slides/slide6.xml><?xml version="1.0" encoding="utf-8"?>
 <p:sld xmlns:a="http://schemas.openxmlformats.org/drawingml/2006/main" xmlns:r="http://schemas.openxmlformats.org/officeDocument/2006/relationships" xmlns:p="http://schemas.openxmlformats.org/presentationml/2006/main">
   <p:cSld name="Slide 6">
+    <p:bg>
+      <p:bgPr>
+        <a:solidFill>
+          <a:srgbClr val="111D35"/>
+        </a:solidFill>
+      </p:bgPr>
+    </p:bg>
     <p:spTree>
       <p:nvGrpSpPr>
         <p:cNvPr id="1" name=""/>
@@ -3762,34 +2421,14 @@
       </p:grpSpPr>
       <p:sp>
         <p:nvSpPr>
-          <p:cNvPr id="2" name="Shape 0"/>
+          <p:cNvPr id="2" name="Text 0"/>
           <p:cNvSpPr/>
           <p:nvPr/>
         </p:nvSpPr>
         <p:spPr>
           <a:xfrm>
-            <a:off x="0" y="0"/>
-            <a:ext cx="9144000" cy="5143500"/>
-          </a:xfrm>
-          <a:prstGeom prst="rect">
-            <a:avLst/>
-          </a:prstGeom>
-          <a:solidFill>
-            <a:srgbClr val="111D35"/>
-          </a:solidFill>
-          <a:ln/>
-        </p:spPr>
-      </p:sp>
-      <p:sp>
-        <p:nvSpPr>
-          <p:cNvPr id="3" name="Text 1"/>
-          <p:cNvSpPr/>
-          <p:nvPr/>
-        </p:nvSpPr>
-        <p:spPr>
-          <a:xfrm>
-            <a:off x="731520" y="914400"/>
-            <a:ext cx="1828800" cy="1097280"/>
+            <a:off x="731520" y="731520"/>
+            <a:ext cx="2286000" cy="1828800"/>
           </a:xfrm>
           <a:prstGeom prst="rect">
             <a:avLst/>
@@ -3808,7 +2447,7 @@
               <a:rPr lang="en-US" sz="7200" b="1" dirty="0">
                 <a:solidFill>
                   <a:srgbClr val="2A9D8F">
-                    <a:alpha val="70000"/>
+                    <a:alpha val="80000"/>
                   </a:srgbClr>
                 </a:solidFill>
                 <a:latin typeface="Georgia" pitchFamily="34" charset="0"/>
@@ -3823,14 +2462,14 @@
       </p:sp>
       <p:sp>
         <p:nvSpPr>
-          <p:cNvPr id="4" name="Text 2"/>
+          <p:cNvPr id="3" name="Text 1"/>
           <p:cNvSpPr/>
           <p:nvPr/>
         </p:nvSpPr>
         <p:spPr>
           <a:xfrm>
-            <a:off x="731520" y="2011680"/>
-            <a:ext cx="7680960" cy="1097280"/>
+            <a:off x="731520" y="1828800"/>
+            <a:ext cx="9144000" cy="1097280"/>
           </a:xfrm>
           <a:prstGeom prst="rect">
             <a:avLst/>
@@ -3854,31 +2493,11 @@
                 <a:ea typeface="Georgia" pitchFamily="34" charset="-122"/>
                 <a:cs typeface="Georgia" pitchFamily="34" charset="-120"/>
               </a:rPr>
-              <a:t>Continental Drift</a:t>
+              <a:t>Earthquakes &amp; Volcanoes</a:t>
             </a:r>
             <a:endParaRPr lang="en-US" sz="3200" dirty="0"/>
           </a:p>
         </p:txBody>
-      </p:sp>
-      <p:sp>
-        <p:nvSpPr>
-          <p:cNvPr id="5" name="Shape 3"/>
-          <p:cNvSpPr/>
-          <p:nvPr/>
-        </p:nvSpPr>
-        <p:spPr>
-          <a:xfrm>
-            <a:off x="731520" y="3200400"/>
-            <a:ext cx="1828800" cy="54864"/>
-          </a:xfrm>
-          <a:prstGeom prst="rect">
-            <a:avLst/>
-          </a:prstGeom>
-          <a:solidFill>
-            <a:srgbClr val="2A9D8F"/>
-          </a:solidFill>
-          <a:ln/>
-        </p:spPr>
       </p:sp>
     </p:spTree>
   </p:cSld>
@@ -3921,27 +2540,7 @@
         <p:spPr>
           <a:xfrm>
             <a:off x="0" y="0"/>
-            <a:ext cx="9144000" cy="822960"/>
-          </a:xfrm>
-          <a:prstGeom prst="rect">
-            <a:avLst/>
-          </a:prstGeom>
-          <a:solidFill>
-            <a:srgbClr val="FFFFFF"/>
-          </a:solidFill>
-          <a:ln/>
-        </p:spPr>
-      </p:sp>
-      <p:sp>
-        <p:nvSpPr>
-          <p:cNvPr id="3" name="Shape 1"/>
-          <p:cNvSpPr/>
-          <p:nvPr/>
-        </p:nvSpPr>
-        <p:spPr>
-          <a:xfrm>
-            <a:off x="0" y="795528"/>
-            <a:ext cx="9144000" cy="27432"/>
+            <a:ext cx="73152" cy="5148072"/>
           </a:xfrm>
           <a:prstGeom prst="rect">
             <a:avLst/>
@@ -3954,14 +2553,14 @@
       </p:sp>
       <p:sp>
         <p:nvSpPr>
-          <p:cNvPr id="4" name="Text 2"/>
+          <p:cNvPr id="3" name="Text 1"/>
           <p:cNvSpPr/>
           <p:nvPr/>
         </p:nvSpPr>
         <p:spPr>
           <a:xfrm>
-            <a:off x="640080" y="91440"/>
-            <a:ext cx="7863840" cy="640080"/>
+            <a:off x="548640" y="274320"/>
+            <a:ext cx="9144000" cy="640080"/>
           </a:xfrm>
           <a:prstGeom prst="rect">
             <a:avLst/>
@@ -3970,14 +2569,14 @@
           <a:ln/>
         </p:spPr>
         <p:txBody>
-          <a:bodyPr wrap="square" lIns="0" tIns="0" rIns="0" bIns="0" rtlCol="0" anchor="ctr"/>
+          <a:bodyPr wrap="square" rtlCol="0" anchor="ctr"/>
           <a:lstStyle/>
           <a:p>
             <a:pPr indent="0" marL="0">
               <a:buNone/>
             </a:pPr>
             <a:r>
-              <a:rPr lang="en-US" sz="2200" b="1" dirty="0">
+              <a:rPr lang="en-US" sz="2400" b="1" dirty="0">
                 <a:solidFill>
                   <a:srgbClr val="1B2A4A"/>
                 </a:solidFill>
@@ -3985,11 +2584,31 @@
                 <a:ea typeface="Georgia" pitchFamily="34" charset="-122"/>
                 <a:cs typeface="Georgia" pitchFamily="34" charset="-120"/>
               </a:rPr>
-              <a:t>Drift Recap</a:t>
-            </a:r>
-            <a:endParaRPr lang="en-US" sz="2200" dirty="0"/>
-          </a:p>
-        </p:txBody>
+              <a:t>Earthquakes &amp; Volcanoes Recap</a:t>
+            </a:r>
+            <a:endParaRPr lang="en-US" sz="2400" dirty="0"/>
+          </a:p>
+        </p:txBody>
+      </p:sp>
+      <p:sp>
+        <p:nvSpPr>
+          <p:cNvPr id="4" name="Shape 2"/>
+          <p:cNvSpPr/>
+          <p:nvPr/>
+        </p:nvSpPr>
+        <p:spPr>
+          <a:xfrm>
+            <a:off x="548640" y="960120"/>
+            <a:ext cx="2286000" cy="36576"/>
+          </a:xfrm>
+          <a:prstGeom prst="rect">
+            <a:avLst/>
+          </a:prstGeom>
+          <a:solidFill>
+            <a:srgbClr val="2A9D8F"/>
+          </a:solidFill>
+          <a:ln/>
+        </p:spPr>
       </p:sp>
       <p:sp>
         <p:nvSpPr>
@@ -3999,8 +2618,8 @@
         </p:nvSpPr>
         <p:spPr>
           <a:xfrm>
-            <a:off x="640080" y="1005840"/>
-            <a:ext cx="7863840" cy="2926080"/>
+            <a:off x="548640" y="1188720"/>
+            <a:ext cx="10058400" cy="3474720"/>
           </a:xfrm>
           <a:prstGeom prst="rect">
             <a:avLst/>
@@ -4009,70 +2628,73 @@
           <a:ln/>
         </p:spPr>
         <p:txBody>
-          <a:bodyPr wrap="square" rtlCol="0" anchor="ctr"/>
-          <a:lstStyle/>
-          <a:p>
-            <a:pPr marL="342900" indent="-342900">
+          <a:bodyPr wrap="square" rtlCol="0" anchor="t"/>
+          <a:lstStyle/>
+          <a:p>
+            <a:pPr>
+              <a:lnSpc>
+                <a:spcPct val="150000"/>
+              </a:lnSpc>
               <a:spcAft>
-                <a:spcPts val="800"/>
+                <a:spcPts val="600"/>
               </a:spcAft>
-              <a:buSzPct val="100000"/>
-              <a:buChar char="•"/>
             </a:pPr>
             <a:r>
-              <a:rPr lang="en-US" sz="1600" dirty="0">
+              <a:rPr lang="en-US" sz="1500" dirty="0">
                 <a:solidFill>
                   <a:srgbClr val="3D3A36"/>
                 </a:solidFill>
-                <a:latin typeface="Calibri" pitchFamily="34" charset="0"/>
-                <a:ea typeface="Calibri" pitchFamily="34" charset="-122"/>
-                <a:cs typeface="Calibri" pitchFamily="34" charset="-120"/>
+                <a:latin typeface="Arial" pitchFamily="34" charset="0"/>
+                <a:ea typeface="Arial" pitchFamily="34" charset="-122"/>
+                <a:cs typeface="Arial" pitchFamily="34" charset="-120"/>
               </a:rPr>
-              <a:t>Wegener (German, 1912): Pangaea — all continents joined.</a:t>
-            </a:r>
-            <a:endParaRPr lang="en-US" sz="1600" dirty="0"/>
-          </a:p>
-          <a:p>
-            <a:pPr marL="342900" indent="-342900">
+              <a:t>Earthquakes: plates lock, pressure builds, sudden release of seismic waves.</a:t>
+            </a:r>
+            <a:endParaRPr lang="en-US" sz="1500" dirty="0"/>
+          </a:p>
+          <a:p>
+            <a:pPr>
+              <a:lnSpc>
+                <a:spcPct val="150000"/>
+              </a:lnSpc>
               <a:spcAft>
-                <a:spcPts val="800"/>
+                <a:spcPts val="600"/>
               </a:spcAft>
-              <a:buSzPct val="100000"/>
-              <a:buChar char="•"/>
             </a:pPr>
             <a:r>
-              <a:rPr lang="en-US" sz="1600" dirty="0">
+              <a:rPr lang="en-US" sz="1500" dirty="0">
                 <a:solidFill>
                   <a:srgbClr val="3D3A36"/>
                 </a:solidFill>
-                <a:latin typeface="Calibri" pitchFamily="34" charset="0"/>
-                <a:ea typeface="Calibri" pitchFamily="34" charset="-122"/>
-                <a:cs typeface="Calibri" pitchFamily="34" charset="-120"/>
+                <a:latin typeface="Arial" pitchFamily="34" charset="0"/>
+                <a:ea typeface="Arial" pitchFamily="34" charset="-122"/>
+                <a:cs typeface="Arial" pitchFamily="34" charset="-120"/>
               </a:rPr>
-              <a:t>Evidence: coastline fit, matching fossils (China &amp; Antarctica), rocks, climate.</a:t>
-            </a:r>
-            <a:endParaRPr lang="en-US" sz="1600" dirty="0"/>
-          </a:p>
-          <a:p>
-            <a:pPr marL="342900" indent="-342900">
+              <a:t>Volcanoes: subduction → magma rises → erupts through vent.</a:t>
+            </a:r>
+            <a:endParaRPr lang="en-US" sz="1500" dirty="0"/>
+          </a:p>
+          <a:p>
+            <a:pPr>
+              <a:lnSpc>
+                <a:spcPct val="150000"/>
+              </a:lnSpc>
               <a:spcAft>
-                <a:spcPts val="800"/>
+                <a:spcPts val="600"/>
               </a:spcAft>
-              <a:buSzPct val="100000"/>
-              <a:buChar char="•"/>
             </a:pPr>
             <a:r>
-              <a:rPr lang="en-US" sz="1600" dirty="0">
+              <a:rPr lang="en-US" sz="1500" dirty="0">
                 <a:solidFill>
                   <a:srgbClr val="3D3A36"/>
                 </a:solidFill>
-                <a:latin typeface="Calibri" pitchFamily="34" charset="0"/>
-                <a:ea typeface="Calibri" pitchFamily="34" charset="-122"/>
-                <a:cs typeface="Calibri" pitchFamily="34" charset="-120"/>
+                <a:latin typeface="Arial" pitchFamily="34" charset="0"/>
+                <a:ea typeface="Arial" pitchFamily="34" charset="-122"/>
+                <a:cs typeface="Arial" pitchFamily="34" charset="-120"/>
               </a:rPr>
-              <a:t>Rejected because no mechanism — solved by sea-floor spreading (1960s).</a:t>
-            </a:r>
-            <a:endParaRPr lang="en-US" sz="1600" dirty="0"/>
+              <a:t>Ring of Fire: 75% of volcanoes, 90% of earthquakes.</a:t>
+            </a:r>
+            <a:endParaRPr lang="en-US" sz="1500" dirty="0"/>
           </a:p>
         </p:txBody>
       </p:sp>
@@ -4087,155 +2709,10 @@
 <file path=ppt/slides/slide8.xml><?xml version="1.0" encoding="utf-8"?>
 <p:sld xmlns:a="http://schemas.openxmlformats.org/drawingml/2006/main" xmlns:r="http://schemas.openxmlformats.org/officeDocument/2006/relationships" xmlns:p="http://schemas.openxmlformats.org/presentationml/2006/main">
   <p:cSld name="Slide 8">
-    <p:spTree>
-      <p:nvGrpSpPr>
-        <p:cNvPr id="1" name=""/>
-        <p:cNvGrpSpPr/>
-        <p:nvPr/>
-      </p:nvGrpSpPr>
-      <p:grpSpPr>
-        <a:xfrm>
-          <a:off x="0" y="0"/>
-          <a:ext cx="0" cy="0"/>
-          <a:chOff x="0" y="0"/>
-          <a:chExt cx="0" cy="0"/>
-        </a:xfrm>
-      </p:grpSpPr>
-      <p:sp>
-        <p:nvSpPr>
-          <p:cNvPr id="2" name="Shape 0"/>
-          <p:cNvSpPr/>
-          <p:nvPr/>
-        </p:nvSpPr>
-        <p:spPr>
-          <a:xfrm>
-            <a:off x="0" y="0"/>
-            <a:ext cx="9144000" cy="5143500"/>
-          </a:xfrm>
-          <a:prstGeom prst="rect">
-            <a:avLst/>
-          </a:prstGeom>
-          <a:solidFill>
-            <a:srgbClr val="111D35"/>
-          </a:solidFill>
-          <a:ln/>
-        </p:spPr>
-      </p:sp>
-      <p:sp>
-        <p:nvSpPr>
-          <p:cNvPr id="3" name="Text 1"/>
-          <p:cNvSpPr/>
-          <p:nvPr/>
-        </p:nvSpPr>
-        <p:spPr>
-          <a:xfrm>
-            <a:off x="731520" y="914400"/>
-            <a:ext cx="1828800" cy="1097280"/>
-          </a:xfrm>
-          <a:prstGeom prst="rect">
-            <a:avLst/>
-          </a:prstGeom>
-          <a:noFill/>
-          <a:ln/>
-        </p:spPr>
-        <p:txBody>
-          <a:bodyPr wrap="square" rtlCol="0" anchor="ctr"/>
-          <a:lstStyle/>
-          <a:p>
-            <a:pPr indent="0" marL="0">
-              <a:buNone/>
-            </a:pPr>
-            <a:r>
-              <a:rPr lang="en-US" sz="7200" b="1" dirty="0">
-                <a:solidFill>
-                  <a:srgbClr val="2A9D8F">
-                    <a:alpha val="70000"/>
-                  </a:srgbClr>
-                </a:solidFill>
-                <a:latin typeface="Georgia" pitchFamily="34" charset="0"/>
-                <a:ea typeface="Georgia" pitchFamily="34" charset="-122"/>
-                <a:cs typeface="Georgia" pitchFamily="34" charset="-120"/>
-              </a:rPr>
-              <a:t>04</a:t>
-            </a:r>
-            <a:endParaRPr lang="en-US" sz="7200" dirty="0"/>
-          </a:p>
-        </p:txBody>
-      </p:sp>
-      <p:sp>
-        <p:nvSpPr>
-          <p:cNvPr id="4" name="Text 2"/>
-          <p:cNvSpPr/>
-          <p:nvPr/>
-        </p:nvSpPr>
-        <p:spPr>
-          <a:xfrm>
-            <a:off x="731520" y="2011680"/>
-            <a:ext cx="7680960" cy="1097280"/>
-          </a:xfrm>
-          <a:prstGeom prst="rect">
-            <a:avLst/>
-          </a:prstGeom>
-          <a:noFill/>
-          <a:ln/>
-        </p:spPr>
-        <p:txBody>
-          <a:bodyPr wrap="square" rtlCol="0" anchor="ctr"/>
-          <a:lstStyle/>
-          <a:p>
-            <a:pPr indent="0" marL="0">
-              <a:buNone/>
-            </a:pPr>
-            <a:r>
-              <a:rPr lang="en-US" sz="3200" b="1" dirty="0">
-                <a:solidFill>
-                  <a:srgbClr val="FFFFFF"/>
-                </a:solidFill>
-                <a:latin typeface="Georgia" pitchFamily="34" charset="0"/>
-                <a:ea typeface="Georgia" pitchFamily="34" charset="-122"/>
-                <a:cs typeface="Georgia" pitchFamily="34" charset="-120"/>
-              </a:rPr>
-              <a:t>Earthquakes &amp; Volcanoes</a:t>
-            </a:r>
-            <a:endParaRPr lang="en-US" sz="3200" dirty="0"/>
-          </a:p>
-        </p:txBody>
-      </p:sp>
-      <p:sp>
-        <p:nvSpPr>
-          <p:cNvPr id="5" name="Shape 3"/>
-          <p:cNvSpPr/>
-          <p:nvPr/>
-        </p:nvSpPr>
-        <p:spPr>
-          <a:xfrm>
-            <a:off x="731520" y="3200400"/>
-            <a:ext cx="1828800" cy="54864"/>
-          </a:xfrm>
-          <a:prstGeom prst="rect">
-            <a:avLst/>
-          </a:prstGeom>
-          <a:solidFill>
-            <a:srgbClr val="2A9D8F"/>
-          </a:solidFill>
-          <a:ln/>
-        </p:spPr>
-      </p:sp>
-    </p:spTree>
-  </p:cSld>
-  <p:clrMapOvr>
-    <a:masterClrMapping/>
-  </p:clrMapOvr>
-</p:sld>
-</file>
-
-<file path=ppt/slides/slide9.xml><?xml version="1.0" encoding="utf-8"?>
-<p:sld xmlns:a="http://schemas.openxmlformats.org/drawingml/2006/main" xmlns:r="http://schemas.openxmlformats.org/officeDocument/2006/relationships" xmlns:p="http://schemas.openxmlformats.org/presentationml/2006/main">
-  <p:cSld name="Slide 9">
     <p:bg>
       <p:bgPr>
         <a:solidFill>
-          <a:srgbClr val="FAF8F5"/>
+          <a:srgbClr val="111D35"/>
         </a:solidFill>
       </p:bgPr>
     </p:bg>
@@ -4255,54 +2732,14 @@
       </p:grpSpPr>
       <p:sp>
         <p:nvSpPr>
-          <p:cNvPr id="2" name="Shape 0"/>
+          <p:cNvPr id="2" name="Text 0"/>
           <p:cNvSpPr/>
           <p:nvPr/>
         </p:nvSpPr>
         <p:spPr>
           <a:xfrm>
-            <a:off x="0" y="0"/>
-            <a:ext cx="9144000" cy="822960"/>
-          </a:xfrm>
-          <a:prstGeom prst="rect">
-            <a:avLst/>
-          </a:prstGeom>
-          <a:solidFill>
-            <a:srgbClr val="FFFFFF"/>
-          </a:solidFill>
-          <a:ln/>
-        </p:spPr>
-      </p:sp>
-      <p:sp>
-        <p:nvSpPr>
-          <p:cNvPr id="3" name="Shape 1"/>
-          <p:cNvSpPr/>
-          <p:nvPr/>
-        </p:nvSpPr>
-        <p:spPr>
-          <a:xfrm>
-            <a:off x="0" y="795528"/>
-            <a:ext cx="9144000" cy="27432"/>
-          </a:xfrm>
-          <a:prstGeom prst="rect">
-            <a:avLst/>
-          </a:prstGeom>
-          <a:solidFill>
-            <a:srgbClr val="2A9D8F"/>
-          </a:solidFill>
-          <a:ln/>
-        </p:spPr>
-      </p:sp>
-      <p:sp>
-        <p:nvSpPr>
-          <p:cNvPr id="4" name="Text 2"/>
-          <p:cNvSpPr/>
-          <p:nvPr/>
-        </p:nvSpPr>
-        <p:spPr>
-          <a:xfrm>
-            <a:off x="640080" y="91440"/>
-            <a:ext cx="7863840" cy="640080"/>
+            <a:off x="731520" y="1371600"/>
+            <a:ext cx="9144000" cy="914400"/>
           </a:xfrm>
           <a:prstGeom prst="rect">
             <a:avLst/>
@@ -4311,37 +2748,37 @@
           <a:ln/>
         </p:spPr>
         <p:txBody>
-          <a:bodyPr wrap="square" lIns="0" tIns="0" rIns="0" bIns="0" rtlCol="0" anchor="ctr"/>
+          <a:bodyPr wrap="square" rtlCol="0" anchor="ctr"/>
           <a:lstStyle/>
           <a:p>
             <a:pPr indent="0" marL="0">
               <a:buNone/>
             </a:pPr>
             <a:r>
-              <a:rPr lang="en-US" sz="2200" b="1" dirty="0">
+              <a:rPr lang="en-US" sz="3200" b="1" dirty="0">
                 <a:solidFill>
-                  <a:srgbClr val="1B2A4A"/>
+                  <a:srgbClr val="FFFFFF"/>
                 </a:solidFill>
                 <a:latin typeface="Georgia" pitchFamily="34" charset="0"/>
                 <a:ea typeface="Georgia" pitchFamily="34" charset="-122"/>
                 <a:cs typeface="Georgia" pitchFamily="34" charset="-120"/>
               </a:rPr>
-              <a:t>The Big Picture</a:t>
-            </a:r>
-            <a:endParaRPr lang="en-US" sz="2200" dirty="0"/>
-          </a:p>
-        </p:txBody>
-      </p:sp>
-      <p:sp>
-        <p:nvSpPr>
-          <p:cNvPr id="5" name="Text 3"/>
+              <a:t>Review &amp; Practise</a:t>
+            </a:r>
+            <a:endParaRPr lang="en-US" sz="3200" dirty="0"/>
+          </a:p>
+        </p:txBody>
+      </p:sp>
+      <p:sp>
+        <p:nvSpPr>
+          <p:cNvPr id="3" name="Text 1"/>
           <p:cNvSpPr/>
           <p:nvPr/>
         </p:nvSpPr>
         <p:spPr>
           <a:xfrm>
-            <a:off x="640080" y="1005840"/>
-            <a:ext cx="7863840" cy="2926080"/>
+            <a:off x="731520" y="2377440"/>
+            <a:ext cx="7315200" cy="548640"/>
           </a:xfrm>
           <a:prstGeom prst="rect">
             <a:avLst/>
@@ -4353,88 +2790,62 @@
           <a:bodyPr wrap="square" rtlCol="0" anchor="ctr"/>
           <a:lstStyle/>
           <a:p>
-            <a:pPr marL="342900" indent="-342900">
-              <a:spcAft>
-                <a:spcPts val="800"/>
-              </a:spcAft>
-              <a:buSzPct val="100000"/>
-              <a:buChar char="•"/>
+            <a:pPr indent="0" marL="0">
+              <a:buNone/>
             </a:pPr>
             <a:r>
-              <a:rPr lang="en-US" sz="1600" dirty="0">
+              <a:rPr lang="en-US" sz="1500" dirty="0">
                 <a:solidFill>
-                  <a:srgbClr val="3D3A36"/>
+                  <a:srgbClr val="FFFFFF">
+                    <a:alpha val="60000"/>
+                  </a:srgbClr>
                 </a:solidFill>
-                <a:latin typeface="Calibri" pitchFamily="34" charset="0"/>
-                <a:ea typeface="Calibri" pitchFamily="34" charset="-122"/>
-                <a:cs typeface="Calibri" pitchFamily="34" charset="-120"/>
+                <a:latin typeface="Arial" pitchFamily="34" charset="0"/>
+                <a:ea typeface="Arial" pitchFamily="34" charset="-122"/>
+                <a:cs typeface="Arial" pitchFamily="34" charset="-120"/>
               </a:rPr>
-              <a:t>Core heat → convection → plate movement → surface features.</a:t>
-            </a:r>
-            <a:endParaRPr lang="en-US" sz="1600" dirty="0"/>
-          </a:p>
-          <a:p>
-            <a:pPr marL="342900" indent="-342900">
-              <a:spcAft>
-                <a:spcPts val="800"/>
-              </a:spcAft>
-              <a:buSzPct val="100000"/>
-              <a:buChar char="•"/>
+              <a:t>Use the Self-Quiz, Review Games, and Practice Builder to test yourself.</a:t>
+            </a:r>
+            <a:endParaRPr lang="en-US" sz="1500" dirty="0"/>
+          </a:p>
+        </p:txBody>
+      </p:sp>
+      <p:sp>
+        <p:nvSpPr>
+          <p:cNvPr id="4" name="Text 2"/>
+          <p:cNvSpPr/>
+          <p:nvPr/>
+        </p:nvSpPr>
+        <p:spPr>
+          <a:xfrm>
+            <a:off x="731520" y="3291840"/>
+            <a:ext cx="3657600" cy="457200"/>
+          </a:xfrm>
+          <a:prstGeom prst="rect">
+            <a:avLst/>
+          </a:prstGeom>
+          <a:noFill/>
+          <a:ln/>
+        </p:spPr>
+        <p:txBody>
+          <a:bodyPr wrap="square" rtlCol="0" anchor="ctr"/>
+          <a:lstStyle/>
+          <a:p>
+            <a:pPr indent="0" marL="0">
+              <a:buNone/>
             </a:pPr>
             <a:r>
-              <a:rPr lang="en-US" sz="1600" dirty="0">
+              <a:rPr lang="en-US" sz="1800" b="1" dirty="0">
                 <a:solidFill>
-                  <a:srgbClr val="3D3A36"/>
+                  <a:srgbClr val="E9C46A"/>
                 </a:solidFill>
-                <a:latin typeface="Calibri" pitchFamily="34" charset="0"/>
-                <a:ea typeface="Calibri" pitchFamily="34" charset="-122"/>
-                <a:cs typeface="Calibri" pitchFamily="34" charset="-120"/>
+                <a:latin typeface="Georgia" pitchFamily="34" charset="0"/>
+                <a:ea typeface="Georgia" pitchFamily="34" charset="-122"/>
+                <a:cs typeface="Georgia" pitchFamily="34" charset="-120"/>
               </a:rPr>
-              <a:t>Ring of Fire: Japan, Korea, China's coast.</a:t>
-            </a:r>
-            <a:endParaRPr lang="en-US" sz="1600" dirty="0"/>
-          </a:p>
-          <a:p>
-            <a:pPr marL="342900" indent="-342900">
-              <a:spcAft>
-                <a:spcPts val="800"/>
-              </a:spcAft>
-              <a:buSzPct val="100000"/>
-              <a:buChar char="•"/>
-            </a:pPr>
-            <a:r>
-              <a:rPr lang="en-US" sz="1600" dirty="0">
-                <a:solidFill>
-                  <a:srgbClr val="3D3A36"/>
-                </a:solidFill>
-                <a:latin typeface="Calibri" pitchFamily="34" charset="0"/>
-                <a:ea typeface="Calibri" pitchFamily="34" charset="-122"/>
-                <a:cs typeface="Calibri" pitchFamily="34" charset="-120"/>
-              </a:rPr>
-              <a:t>Key Concept: CHANGE — Earth is dynamic, constantly changing.</a:t>
-            </a:r>
-            <a:endParaRPr lang="en-US" sz="1600" dirty="0"/>
-          </a:p>
-          <a:p>
-            <a:pPr marL="342900" indent="-342900">
-              <a:spcAft>
-                <a:spcPts val="800"/>
-              </a:spcAft>
-              <a:buSzPct val="100000"/>
-              <a:buChar char="•"/>
-            </a:pPr>
-            <a:r>
-              <a:rPr lang="en-US" sz="1600" dirty="0">
-                <a:solidFill>
-                  <a:srgbClr val="3D3A36"/>
-                </a:solidFill>
-                <a:latin typeface="Calibri" pitchFamily="34" charset="0"/>
-                <a:ea typeface="Calibri" pitchFamily="34" charset="-122"/>
-                <a:cs typeface="Calibri" pitchFamily="34" charset="-120"/>
-              </a:rPr>
-              <a:t>Japan, Korea, China: earthquake-prepared. Germany: stable interior.</a:t>
-            </a:r>
-            <a:endParaRPr lang="en-US" sz="1600" dirty="0"/>
+              <a:t>mrzocchi.com</a:t>
+            </a:r>
+            <a:endParaRPr lang="en-US" sz="1800" dirty="0"/>
           </a:p>
         </p:txBody>
       </p:sp>
